--- a/Endogeneity.pptx
+++ b/Endogeneity.pptx
@@ -146,16 +146,24 @@
   <pc:docChgLst>
     <pc:chgData name="Daryanto, Ahmad" userId="61940c2a-8427-4576-9f17-0c8fab086415" providerId="ADAL" clId="{7843BEE4-BB9E-47EA-A812-8FBB036213D7}"/>
     <pc:docChg chg="addSld delSld modSld sldOrd">
-      <pc:chgData name="Daryanto, Ahmad" userId="61940c2a-8427-4576-9f17-0c8fab086415" providerId="ADAL" clId="{7843BEE4-BB9E-47EA-A812-8FBB036213D7}" dt="2026-09-03T02:00:43.090" v="10" actId="1076"/>
+      <pc:chgData name="Daryanto, Ahmad" userId="61940c2a-8427-4576-9f17-0c8fab086415" providerId="ADAL" clId="{7843BEE4-BB9E-47EA-A812-8FBB036213D7}" dt="2026-09-03T02:32:36.687" v="11" actId="22"/>
       <pc:docMkLst>
         <pc:docMk/>
       </pc:docMkLst>
-      <pc:sldChg chg="modSp mod">
-        <pc:chgData name="Daryanto, Ahmad" userId="61940c2a-8427-4576-9f17-0c8fab086415" providerId="ADAL" clId="{7843BEE4-BB9E-47EA-A812-8FBB036213D7}" dt="2026-09-03T01:38:06.338" v="1" actId="20577"/>
+      <pc:sldChg chg="addSp modSp mod">
+        <pc:chgData name="Daryanto, Ahmad" userId="61940c2a-8427-4576-9f17-0c8fab086415" providerId="ADAL" clId="{7843BEE4-BB9E-47EA-A812-8FBB036213D7}" dt="2026-09-03T02:32:36.687" v="11" actId="22"/>
         <pc:sldMkLst>
           <pc:docMk/>
           <pc:sldMk cId="2087706263" sldId="275"/>
         </pc:sldMkLst>
+        <pc:spChg chg="add">
+          <ac:chgData name="Daryanto, Ahmad" userId="61940c2a-8427-4576-9f17-0c8fab086415" providerId="ADAL" clId="{7843BEE4-BB9E-47EA-A812-8FBB036213D7}" dt="2026-09-03T02:32:36.687" v="11" actId="22"/>
+          <ac:spMkLst>
+            <pc:docMk/>
+            <pc:sldMk cId="2087706263" sldId="275"/>
+            <ac:spMk id="3" creationId="{1A41D51D-6D0D-985F-2472-268B9A056F44}"/>
+          </ac:spMkLst>
+        </pc:spChg>
         <pc:spChg chg="mod">
           <ac:chgData name="Daryanto, Ahmad" userId="61940c2a-8427-4576-9f17-0c8fab086415" providerId="ADAL" clId="{7843BEE4-BB9E-47EA-A812-8FBB036213D7}" dt="2026-09-03T01:38:06.338" v="1" actId="20577"/>
           <ac:spMkLst>
@@ -6493,6 +6501,47 @@
           </a:p>
         </p:txBody>
       </p:sp>
+      <p:sp>
+        <p:nvSpPr>
+          <p:cNvPr id="3" name="TextBox 2">
+            <a:extLst>
+              <a:ext uri="{FF2B5EF4-FFF2-40B4-BE49-F238E27FC236}">
+                <a16:creationId xmlns:a16="http://schemas.microsoft.com/office/drawing/2014/main" id="{1A41D51D-6D0D-985F-2472-268B9A056F44}"/>
+              </a:ext>
+            </a:extLst>
+          </p:cNvPr>
+          <p:cNvSpPr txBox="1"/>
+          <p:nvPr/>
+        </p:nvSpPr>
+        <p:spPr>
+          <a:xfrm>
+            <a:off x="1077686" y="5711862"/>
+            <a:ext cx="6096000" cy="954107"/>
+          </a:xfrm>
+          <a:prstGeom prst="rect">
+            <a:avLst/>
+          </a:prstGeom>
+          <a:noFill/>
+        </p:spPr>
+        <p:txBody>
+          <a:bodyPr wrap="square">
+            <a:spAutoFit/>
+          </a:bodyPr>
+          <a:lstStyle/>
+          <a:p>
+            <a:r>
+              <a:rPr lang="en-GB" sz="2800" dirty="0">
+                <a:hlinkClick r:id="rId2"/>
+              </a:rPr>
+              <a:t>https://github.com/ahdar1/FIA</a:t>
+            </a:r>
+            <a:endParaRPr lang="en-GB" sz="2800" dirty="0"/>
+          </a:p>
+          <a:p>
+            <a:endParaRPr lang="en-GB" sz="2800" dirty="0"/>
+          </a:p>
+        </p:txBody>
+      </p:sp>
     </p:spTree>
     <p:extLst>
       <p:ext uri="{BB962C8B-B14F-4D97-AF65-F5344CB8AC3E}">

--- a/Endogeneity.pptx
+++ b/Endogeneity.pptx
@@ -7,26 +7,28 @@
   <p:sldIdLst>
     <p:sldId id="463" r:id="rId2"/>
     <p:sldId id="275" r:id="rId3"/>
-    <p:sldId id="285" r:id="rId4"/>
-    <p:sldId id="276" r:id="rId5"/>
-    <p:sldId id="277" r:id="rId6"/>
-    <p:sldId id="278" r:id="rId7"/>
-    <p:sldId id="279" r:id="rId8"/>
-    <p:sldId id="280" r:id="rId9"/>
-    <p:sldId id="256" r:id="rId10"/>
-    <p:sldId id="281" r:id="rId11"/>
-    <p:sldId id="282" r:id="rId12"/>
-    <p:sldId id="283" r:id="rId13"/>
-    <p:sldId id="257" r:id="rId14"/>
-    <p:sldId id="258" r:id="rId15"/>
-    <p:sldId id="260" r:id="rId16"/>
-    <p:sldId id="261" r:id="rId17"/>
-    <p:sldId id="272" r:id="rId18"/>
-    <p:sldId id="262" r:id="rId19"/>
-    <p:sldId id="263" r:id="rId20"/>
-    <p:sldId id="273" r:id="rId21"/>
-    <p:sldId id="274" r:id="rId22"/>
-    <p:sldId id="284" r:id="rId23"/>
+    <p:sldId id="465" r:id="rId4"/>
+    <p:sldId id="285" r:id="rId5"/>
+    <p:sldId id="276" r:id="rId6"/>
+    <p:sldId id="277" r:id="rId7"/>
+    <p:sldId id="278" r:id="rId8"/>
+    <p:sldId id="279" r:id="rId9"/>
+    <p:sldId id="280" r:id="rId10"/>
+    <p:sldId id="256" r:id="rId11"/>
+    <p:sldId id="281" r:id="rId12"/>
+    <p:sldId id="282" r:id="rId13"/>
+    <p:sldId id="283" r:id="rId14"/>
+    <p:sldId id="257" r:id="rId15"/>
+    <p:sldId id="258" r:id="rId16"/>
+    <p:sldId id="260" r:id="rId17"/>
+    <p:sldId id="261" r:id="rId18"/>
+    <p:sldId id="272" r:id="rId19"/>
+    <p:sldId id="262" r:id="rId20"/>
+    <p:sldId id="263" r:id="rId21"/>
+    <p:sldId id="273" r:id="rId22"/>
+    <p:sldId id="274" r:id="rId23"/>
+    <p:sldId id="466" r:id="rId24"/>
+    <p:sldId id="284" r:id="rId25"/>
   </p:sldIdLst>
   <p:sldSz cx="12192000" cy="6858000"/>
   <p:notesSz cx="6858000" cy="9144000"/>
@@ -136,7 +138,7 @@
 <file path=ppt/revisionInfo.xml><?xml version="1.0" encoding="utf-8"?>
 <p1510:revInfo xmlns:a="http://schemas.openxmlformats.org/drawingml/2006/main" xmlns:r="http://schemas.openxmlformats.org/officeDocument/2006/relationships" xmlns:p1510="http://schemas.microsoft.com/office/powerpoint/2015/10/main">
   <p1510:revLst>
-    <p1510:client id="{69BBADDF-7ED2-49C9-9491-7A5646CCA949}" v="2" dt="2026-09-03T01:59:48.250"/>
+    <p1510:client id="{69BBADDF-7ED2-49C9-9491-7A5646CCA949}" v="3" dt="2026-09-07T02:45:22.304"/>
   </p1510:revLst>
 </p1510:revInfo>
 </file>
@@ -145,19 +147,19 @@
 <pc:chgInfo xmlns:a="http://schemas.openxmlformats.org/drawingml/2006/main" xmlns:r="http://schemas.openxmlformats.org/officeDocument/2006/relationships" xmlns:ac="http://schemas.microsoft.com/office/drawing/2013/main/command" xmlns:pc="http://schemas.microsoft.com/office/powerpoint/2013/main/command">
   <pc:docChgLst>
     <pc:chgData name="Daryanto, Ahmad" userId="61940c2a-8427-4576-9f17-0c8fab086415" providerId="ADAL" clId="{7843BEE4-BB9E-47EA-A812-8FBB036213D7}"/>
-    <pc:docChg chg="addSld delSld modSld sldOrd">
-      <pc:chgData name="Daryanto, Ahmad" userId="61940c2a-8427-4576-9f17-0c8fab086415" providerId="ADAL" clId="{7843BEE4-BB9E-47EA-A812-8FBB036213D7}" dt="2026-09-03T02:32:36.687" v="11" actId="22"/>
+    <pc:docChg chg="custSel addSld delSld modSld sldOrd">
+      <pc:chgData name="Daryanto, Ahmad" userId="61940c2a-8427-4576-9f17-0c8fab086415" providerId="ADAL" clId="{7843BEE4-BB9E-47EA-A812-8FBB036213D7}" dt="2026-09-07T02:52:00.858" v="158" actId="20577"/>
       <pc:docMkLst>
         <pc:docMk/>
       </pc:docMkLst>
-      <pc:sldChg chg="addSp modSp mod">
-        <pc:chgData name="Daryanto, Ahmad" userId="61940c2a-8427-4576-9f17-0c8fab086415" providerId="ADAL" clId="{7843BEE4-BB9E-47EA-A812-8FBB036213D7}" dt="2026-09-03T02:32:36.687" v="11" actId="22"/>
+      <pc:sldChg chg="addSp delSp modSp mod">
+        <pc:chgData name="Daryanto, Ahmad" userId="61940c2a-8427-4576-9f17-0c8fab086415" providerId="ADAL" clId="{7843BEE4-BB9E-47EA-A812-8FBB036213D7}" dt="2026-09-07T02:45:28.831" v="13" actId="478"/>
         <pc:sldMkLst>
           <pc:docMk/>
           <pc:sldMk cId="2087706263" sldId="275"/>
         </pc:sldMkLst>
-        <pc:spChg chg="add">
-          <ac:chgData name="Daryanto, Ahmad" userId="61940c2a-8427-4576-9f17-0c8fab086415" providerId="ADAL" clId="{7843BEE4-BB9E-47EA-A812-8FBB036213D7}" dt="2026-09-03T02:32:36.687" v="11" actId="22"/>
+        <pc:spChg chg="add del">
+          <ac:chgData name="Daryanto, Ahmad" userId="61940c2a-8427-4576-9f17-0c8fab086415" providerId="ADAL" clId="{7843BEE4-BB9E-47EA-A812-8FBB036213D7}" dt="2026-09-07T02:45:28.831" v="13" actId="478"/>
           <ac:spMkLst>
             <pc:docMk/>
             <pc:sldMk cId="2087706263" sldId="275"/>
@@ -187,6 +189,36 @@
             <ac:picMk id="3" creationId="{FC3A2D54-2A0E-E117-04A6-D65B3AE90A4F}"/>
           </ac:picMkLst>
         </pc:picChg>
+      </pc:sldChg>
+      <pc:sldChg chg="add">
+        <pc:chgData name="Daryanto, Ahmad" userId="61940c2a-8427-4576-9f17-0c8fab086415" providerId="ADAL" clId="{7843BEE4-BB9E-47EA-A812-8FBB036213D7}" dt="2026-09-07T02:45:22.299" v="12"/>
+        <pc:sldMkLst>
+          <pc:docMk/>
+          <pc:sldMk cId="2718271772" sldId="465"/>
+        </pc:sldMkLst>
+      </pc:sldChg>
+      <pc:sldChg chg="addSp modSp new mod modClrScheme chgLayout">
+        <pc:chgData name="Daryanto, Ahmad" userId="61940c2a-8427-4576-9f17-0c8fab086415" providerId="ADAL" clId="{7843BEE4-BB9E-47EA-A812-8FBB036213D7}" dt="2026-09-07T02:52:00.858" v="158" actId="20577"/>
+        <pc:sldMkLst>
+          <pc:docMk/>
+          <pc:sldMk cId="3053267717" sldId="466"/>
+        </pc:sldMkLst>
+        <pc:spChg chg="add mod">
+          <ac:chgData name="Daryanto, Ahmad" userId="61940c2a-8427-4576-9f17-0c8fab086415" providerId="ADAL" clId="{7843BEE4-BB9E-47EA-A812-8FBB036213D7}" dt="2026-09-07T02:50:41.419" v="25" actId="20577"/>
+          <ac:spMkLst>
+            <pc:docMk/>
+            <pc:sldMk cId="3053267717" sldId="466"/>
+            <ac:spMk id="2" creationId="{DC0FE2E0-4499-A9F5-A67C-16D6E61A480B}"/>
+          </ac:spMkLst>
+        </pc:spChg>
+        <pc:spChg chg="add mod">
+          <ac:chgData name="Daryanto, Ahmad" userId="61940c2a-8427-4576-9f17-0c8fab086415" providerId="ADAL" clId="{7843BEE4-BB9E-47EA-A812-8FBB036213D7}" dt="2026-09-07T02:52:00.858" v="158" actId="20577"/>
+          <ac:spMkLst>
+            <pc:docMk/>
+            <pc:sldMk cId="3053267717" sldId="466"/>
+            <ac:spMk id="3" creationId="{7DD30527-AAE8-E285-45B2-52940AC42AC9}"/>
+          </ac:spMkLst>
+        </pc:spChg>
       </pc:sldChg>
     </pc:docChg>
   </pc:docChgLst>
@@ -342,7 +374,7 @@
           <a:p>
             <a:fld id="{F5DCFBB3-2397-5441-8DD5-BDF2C45F759B}" type="datetimeFigureOut">
               <a:rPr lang="en-US" smtClean="0"/>
-              <a:t>9/3/2026</a:t>
+              <a:t>9/7/2026</a:t>
             </a:fld>
             <a:endParaRPr lang="en-US"/>
           </a:p>
@@ -542,7 +574,7 @@
           <a:p>
             <a:fld id="{F5DCFBB3-2397-5441-8DD5-BDF2C45F759B}" type="datetimeFigureOut">
               <a:rPr lang="en-US" smtClean="0"/>
-              <a:t>9/3/2026</a:t>
+              <a:t>9/7/2026</a:t>
             </a:fld>
             <a:endParaRPr lang="en-US"/>
           </a:p>
@@ -752,7 +784,7 @@
           <a:p>
             <a:fld id="{F5DCFBB3-2397-5441-8DD5-BDF2C45F759B}" type="datetimeFigureOut">
               <a:rPr lang="en-US" smtClean="0"/>
-              <a:t>9/3/2026</a:t>
+              <a:t>9/7/2026</a:t>
             </a:fld>
             <a:endParaRPr lang="en-US"/>
           </a:p>
@@ -952,7 +984,7 @@
           <a:p>
             <a:fld id="{F5DCFBB3-2397-5441-8DD5-BDF2C45F759B}" type="datetimeFigureOut">
               <a:rPr lang="en-US" smtClean="0"/>
-              <a:t>9/3/2026</a:t>
+              <a:t>9/7/2026</a:t>
             </a:fld>
             <a:endParaRPr lang="en-US"/>
           </a:p>
@@ -1228,7 +1260,7 @@
           <a:p>
             <a:fld id="{F5DCFBB3-2397-5441-8DD5-BDF2C45F759B}" type="datetimeFigureOut">
               <a:rPr lang="en-US" smtClean="0"/>
-              <a:t>9/3/2026</a:t>
+              <a:t>9/7/2026</a:t>
             </a:fld>
             <a:endParaRPr lang="en-US"/>
           </a:p>
@@ -1496,7 +1528,7 @@
           <a:p>
             <a:fld id="{F5DCFBB3-2397-5441-8DD5-BDF2C45F759B}" type="datetimeFigureOut">
               <a:rPr lang="en-US" smtClean="0"/>
-              <a:t>9/3/2026</a:t>
+              <a:t>9/7/2026</a:t>
             </a:fld>
             <a:endParaRPr lang="en-US"/>
           </a:p>
@@ -1911,7 +1943,7 @@
           <a:p>
             <a:fld id="{F5DCFBB3-2397-5441-8DD5-BDF2C45F759B}" type="datetimeFigureOut">
               <a:rPr lang="en-US" smtClean="0"/>
-              <a:t>9/3/2026</a:t>
+              <a:t>9/7/2026</a:t>
             </a:fld>
             <a:endParaRPr lang="en-US"/>
           </a:p>
@@ -2053,7 +2085,7 @@
           <a:p>
             <a:fld id="{F5DCFBB3-2397-5441-8DD5-BDF2C45F759B}" type="datetimeFigureOut">
               <a:rPr lang="en-US" smtClean="0"/>
-              <a:t>9/3/2026</a:t>
+              <a:t>9/7/2026</a:t>
             </a:fld>
             <a:endParaRPr lang="en-US"/>
           </a:p>
@@ -2166,7 +2198,7 @@
           <a:p>
             <a:fld id="{F5DCFBB3-2397-5441-8DD5-BDF2C45F759B}" type="datetimeFigureOut">
               <a:rPr lang="en-US" smtClean="0"/>
-              <a:t>9/3/2026</a:t>
+              <a:t>9/7/2026</a:t>
             </a:fld>
             <a:endParaRPr lang="en-US"/>
           </a:p>
@@ -2479,7 +2511,7 @@
           <a:p>
             <a:fld id="{F5DCFBB3-2397-5441-8DD5-BDF2C45F759B}" type="datetimeFigureOut">
               <a:rPr lang="en-US" smtClean="0"/>
-              <a:t>9/3/2026</a:t>
+              <a:t>9/7/2026</a:t>
             </a:fld>
             <a:endParaRPr lang="en-US"/>
           </a:p>
@@ -2768,7 +2800,7 @@
           <a:p>
             <a:fld id="{F5DCFBB3-2397-5441-8DD5-BDF2C45F759B}" type="datetimeFigureOut">
               <a:rPr lang="en-US" smtClean="0"/>
-              <a:t>9/3/2026</a:t>
+              <a:t>9/7/2026</a:t>
             </a:fld>
             <a:endParaRPr lang="en-US"/>
           </a:p>
@@ -3011,7 +3043,7 @@
           <a:p>
             <a:fld id="{F5DCFBB3-2397-5441-8DD5-BDF2C45F759B}" type="datetimeFigureOut">
               <a:rPr lang="en-US" smtClean="0"/>
-              <a:t>9/3/2026</a:t>
+              <a:t>9/7/2026</a:t>
             </a:fld>
             <a:endParaRPr lang="en-US"/>
           </a:p>
@@ -3639,6 +3671,708 @@
           <a:chExt cx="0" cy="0"/>
         </a:xfrm>
       </p:grpSpPr>
+      <p:grpSp>
+        <p:nvGrpSpPr>
+          <p:cNvPr id="2" name="Group 1">
+            <a:extLst>
+              <a:ext uri="{FF2B5EF4-FFF2-40B4-BE49-F238E27FC236}">
+                <a16:creationId xmlns:a16="http://schemas.microsoft.com/office/drawing/2014/main" id="{E85888ED-213D-4394-718C-1E0564CA40B4}"/>
+              </a:ext>
+            </a:extLst>
+          </p:cNvPr>
+          <p:cNvGrpSpPr/>
+          <p:nvPr/>
+        </p:nvGrpSpPr>
+        <p:grpSpPr>
+          <a:xfrm>
+            <a:off x="1498282" y="2062480"/>
+            <a:ext cx="9195435" cy="3903345"/>
+            <a:chOff x="1557338" y="182880"/>
+            <a:chExt cx="9195435" cy="3903345"/>
+          </a:xfrm>
+        </p:grpSpPr>
+        <p:sp>
+          <p:nvSpPr>
+            <p:cNvPr id="4" name="Rectangle 3">
+              <a:extLst>
+                <a:ext uri="{FF2B5EF4-FFF2-40B4-BE49-F238E27FC236}">
+                  <a16:creationId xmlns:a16="http://schemas.microsoft.com/office/drawing/2014/main" id="{7AA97629-8B6C-CB4C-9900-3C784E492AA4}"/>
+                </a:ext>
+              </a:extLst>
+            </p:cNvPr>
+            <p:cNvSpPr/>
+            <p:nvPr/>
+          </p:nvSpPr>
+          <p:spPr>
+            <a:xfrm>
+              <a:off x="1557338" y="2728913"/>
+              <a:ext cx="1571625" cy="1314450"/>
+            </a:xfrm>
+            <a:prstGeom prst="rect">
+              <a:avLst/>
+            </a:prstGeom>
+            <a:noFill/>
+            <a:ln w="25400">
+              <a:solidFill>
+                <a:schemeClr val="tx1">
+                  <a:lumMod val="85000"/>
+                  <a:lumOff val="15000"/>
+                </a:schemeClr>
+              </a:solidFill>
+            </a:ln>
+          </p:spPr>
+          <p:style>
+            <a:lnRef idx="2">
+              <a:schemeClr val="accent1">
+                <a:shade val="50000"/>
+              </a:schemeClr>
+            </a:lnRef>
+            <a:fillRef idx="1">
+              <a:schemeClr val="accent1"/>
+            </a:fillRef>
+            <a:effectRef idx="0">
+              <a:schemeClr val="accent1"/>
+            </a:effectRef>
+            <a:fontRef idx="minor">
+              <a:schemeClr val="lt1"/>
+            </a:fontRef>
+          </p:style>
+          <p:txBody>
+            <a:bodyPr rtlCol="0" anchor="ctr"/>
+            <a:lstStyle/>
+            <a:p>
+              <a:pPr algn="ctr"/>
+              <a:r>
+                <a:rPr lang="en-US" sz="3600">
+                  <a:solidFill>
+                    <a:schemeClr val="tx1"/>
+                  </a:solidFill>
+                </a:rPr>
+                <a:t>Z</a:t>
+              </a:r>
+              <a:endParaRPr lang="en-US" sz="3600" dirty="0">
+                <a:solidFill>
+                  <a:schemeClr val="tx1"/>
+                </a:solidFill>
+              </a:endParaRPr>
+            </a:p>
+          </p:txBody>
+        </p:sp>
+        <p:sp>
+          <p:nvSpPr>
+            <p:cNvPr id="5" name="Rectangle 4">
+              <a:extLst>
+                <a:ext uri="{FF2B5EF4-FFF2-40B4-BE49-F238E27FC236}">
+                  <a16:creationId xmlns:a16="http://schemas.microsoft.com/office/drawing/2014/main" id="{66AB836B-2141-C943-AAF9-2E90F904989A}"/>
+                </a:ext>
+              </a:extLst>
+            </p:cNvPr>
+            <p:cNvSpPr/>
+            <p:nvPr/>
+          </p:nvSpPr>
+          <p:spPr>
+            <a:xfrm>
+              <a:off x="5310187" y="2728913"/>
+              <a:ext cx="1571625" cy="1314450"/>
+            </a:xfrm>
+            <a:prstGeom prst="rect">
+              <a:avLst/>
+            </a:prstGeom>
+            <a:noFill/>
+            <a:ln w="25400">
+              <a:solidFill>
+                <a:schemeClr val="tx1">
+                  <a:lumMod val="85000"/>
+                  <a:lumOff val="15000"/>
+                </a:schemeClr>
+              </a:solidFill>
+            </a:ln>
+          </p:spPr>
+          <p:style>
+            <a:lnRef idx="2">
+              <a:schemeClr val="accent1">
+                <a:shade val="50000"/>
+              </a:schemeClr>
+            </a:lnRef>
+            <a:fillRef idx="1">
+              <a:schemeClr val="accent1"/>
+            </a:fillRef>
+            <a:effectRef idx="0">
+              <a:schemeClr val="accent1"/>
+            </a:effectRef>
+            <a:fontRef idx="minor">
+              <a:schemeClr val="lt1"/>
+            </a:fontRef>
+          </p:style>
+          <p:txBody>
+            <a:bodyPr rtlCol="0" anchor="ctr"/>
+            <a:lstStyle/>
+            <a:p>
+              <a:pPr algn="ctr"/>
+              <a:r>
+                <a:rPr lang="en-US" sz="3600" dirty="0">
+                  <a:solidFill>
+                    <a:schemeClr val="tx1"/>
+                  </a:solidFill>
+                </a:rPr>
+                <a:t>MUSIC</a:t>
+              </a:r>
+              <a:endParaRPr lang="en-US" dirty="0">
+                <a:solidFill>
+                  <a:schemeClr val="tx1"/>
+                </a:solidFill>
+              </a:endParaRPr>
+            </a:p>
+          </p:txBody>
+        </p:sp>
+        <p:sp>
+          <p:nvSpPr>
+            <p:cNvPr id="6" name="Rectangle 5">
+              <a:extLst>
+                <a:ext uri="{FF2B5EF4-FFF2-40B4-BE49-F238E27FC236}">
+                  <a16:creationId xmlns:a16="http://schemas.microsoft.com/office/drawing/2014/main" id="{D9411C71-BF7C-DD4A-B916-4C38202AB8FA}"/>
+                </a:ext>
+              </a:extLst>
+            </p:cNvPr>
+            <p:cNvSpPr/>
+            <p:nvPr/>
+          </p:nvSpPr>
+          <p:spPr>
+            <a:xfrm>
+              <a:off x="9063036" y="2771775"/>
+              <a:ext cx="1689737" cy="1314450"/>
+            </a:xfrm>
+            <a:prstGeom prst="rect">
+              <a:avLst/>
+            </a:prstGeom>
+            <a:noFill/>
+            <a:ln w="25400">
+              <a:solidFill>
+                <a:schemeClr val="tx1">
+                  <a:lumMod val="85000"/>
+                  <a:lumOff val="15000"/>
+                </a:schemeClr>
+              </a:solidFill>
+            </a:ln>
+          </p:spPr>
+          <p:style>
+            <a:lnRef idx="2">
+              <a:schemeClr val="accent1">
+                <a:shade val="50000"/>
+              </a:schemeClr>
+            </a:lnRef>
+            <a:fillRef idx="1">
+              <a:schemeClr val="accent1"/>
+            </a:fillRef>
+            <a:effectRef idx="0">
+              <a:schemeClr val="accent1"/>
+            </a:effectRef>
+            <a:fontRef idx="minor">
+              <a:schemeClr val="lt1"/>
+            </a:fontRef>
+          </p:style>
+          <p:txBody>
+            <a:bodyPr rtlCol="0" anchor="ctr"/>
+            <a:lstStyle/>
+            <a:p>
+              <a:pPr algn="ctr"/>
+              <a:r>
+                <a:rPr lang="en-US" sz="3600">
+                  <a:solidFill>
+                    <a:schemeClr val="tx1"/>
+                  </a:solidFill>
+                </a:rPr>
+                <a:t>REVISIT</a:t>
+              </a:r>
+              <a:endParaRPr lang="en-US" sz="3600" dirty="0">
+                <a:solidFill>
+                  <a:schemeClr val="tx1"/>
+                </a:solidFill>
+              </a:endParaRPr>
+            </a:p>
+          </p:txBody>
+        </p:sp>
+        <p:cxnSp>
+          <p:nvCxnSpPr>
+            <p:cNvPr id="8" name="Straight Arrow Connector 7">
+              <a:extLst>
+                <a:ext uri="{FF2B5EF4-FFF2-40B4-BE49-F238E27FC236}">
+                  <a16:creationId xmlns:a16="http://schemas.microsoft.com/office/drawing/2014/main" id="{0C2CE18C-971F-804F-89DC-8A025FF1164E}"/>
+                </a:ext>
+              </a:extLst>
+            </p:cNvPr>
+            <p:cNvCxnSpPr>
+              <a:stCxn id="4" idx="3"/>
+              <a:endCxn id="5" idx="1"/>
+            </p:cNvCxnSpPr>
+            <p:nvPr/>
+          </p:nvCxnSpPr>
+          <p:spPr>
+            <a:xfrm>
+              <a:off x="3128963" y="3386138"/>
+              <a:ext cx="2181224" cy="0"/>
+            </a:xfrm>
+            <a:prstGeom prst="straightConnector1">
+              <a:avLst/>
+            </a:prstGeom>
+            <a:ln w="25400">
+              <a:solidFill>
+                <a:schemeClr val="tx1">
+                  <a:lumMod val="75000"/>
+                  <a:lumOff val="25000"/>
+                </a:schemeClr>
+              </a:solidFill>
+              <a:tailEnd type="triangle"/>
+            </a:ln>
+          </p:spPr>
+          <p:style>
+            <a:lnRef idx="1">
+              <a:schemeClr val="accent1"/>
+            </a:lnRef>
+            <a:fillRef idx="0">
+              <a:schemeClr val="accent1"/>
+            </a:fillRef>
+            <a:effectRef idx="0">
+              <a:schemeClr val="accent1"/>
+            </a:effectRef>
+            <a:fontRef idx="minor">
+              <a:schemeClr val="tx1"/>
+            </a:fontRef>
+          </p:style>
+        </p:cxnSp>
+        <p:cxnSp>
+          <p:nvCxnSpPr>
+            <p:cNvPr id="9" name="Straight Arrow Connector 8">
+              <a:extLst>
+                <a:ext uri="{FF2B5EF4-FFF2-40B4-BE49-F238E27FC236}">
+                  <a16:creationId xmlns:a16="http://schemas.microsoft.com/office/drawing/2014/main" id="{986302C4-9685-7D41-AF06-37D70D366D2D}"/>
+                </a:ext>
+              </a:extLst>
+            </p:cNvPr>
+            <p:cNvCxnSpPr/>
+            <p:nvPr/>
+          </p:nvCxnSpPr>
+          <p:spPr>
+            <a:xfrm>
+              <a:off x="6881812" y="3401378"/>
+              <a:ext cx="2181224" cy="0"/>
+            </a:xfrm>
+            <a:prstGeom prst="straightConnector1">
+              <a:avLst/>
+            </a:prstGeom>
+            <a:ln w="25400">
+              <a:solidFill>
+                <a:schemeClr val="tx1">
+                  <a:lumMod val="75000"/>
+                  <a:lumOff val="25000"/>
+                </a:schemeClr>
+              </a:solidFill>
+              <a:tailEnd type="triangle"/>
+            </a:ln>
+          </p:spPr>
+          <p:style>
+            <a:lnRef idx="1">
+              <a:schemeClr val="accent1"/>
+            </a:lnRef>
+            <a:fillRef idx="0">
+              <a:schemeClr val="accent1"/>
+            </a:fillRef>
+            <a:effectRef idx="0">
+              <a:schemeClr val="accent1"/>
+            </a:effectRef>
+            <a:fontRef idx="minor">
+              <a:schemeClr val="tx1"/>
+            </a:fontRef>
+          </p:style>
+        </p:cxnSp>
+        <p:sp>
+          <p:nvSpPr>
+            <p:cNvPr id="10" name="Rectangle 9">
+              <a:extLst>
+                <a:ext uri="{FF2B5EF4-FFF2-40B4-BE49-F238E27FC236}">
+                  <a16:creationId xmlns:a16="http://schemas.microsoft.com/office/drawing/2014/main" id="{2BC16C0C-0507-9945-857C-389491722944}"/>
+                </a:ext>
+              </a:extLst>
+            </p:cNvPr>
+            <p:cNvSpPr/>
+            <p:nvPr/>
+          </p:nvSpPr>
+          <p:spPr>
+            <a:xfrm>
+              <a:off x="7186611" y="572453"/>
+              <a:ext cx="1571625" cy="1314450"/>
+            </a:xfrm>
+            <a:prstGeom prst="rect">
+              <a:avLst/>
+            </a:prstGeom>
+            <a:noFill/>
+            <a:ln w="25400">
+              <a:solidFill>
+                <a:schemeClr val="tx1">
+                  <a:lumMod val="85000"/>
+                  <a:lumOff val="15000"/>
+                </a:schemeClr>
+              </a:solidFill>
+            </a:ln>
+          </p:spPr>
+          <p:style>
+            <a:lnRef idx="2">
+              <a:schemeClr val="accent1">
+                <a:shade val="50000"/>
+              </a:schemeClr>
+            </a:lnRef>
+            <a:fillRef idx="1">
+              <a:schemeClr val="accent1"/>
+            </a:fillRef>
+            <a:effectRef idx="0">
+              <a:schemeClr val="accent1"/>
+            </a:effectRef>
+            <a:fontRef idx="minor">
+              <a:schemeClr val="lt1"/>
+            </a:fontRef>
+          </p:style>
+          <p:txBody>
+            <a:bodyPr rtlCol="0" anchor="ctr"/>
+            <a:lstStyle/>
+            <a:p>
+              <a:pPr algn="ctr"/>
+              <a:r>
+                <a:rPr lang="en-US" sz="3600" dirty="0">
+                  <a:solidFill>
+                    <a:schemeClr val="tx1"/>
+                  </a:solidFill>
+                </a:rPr>
+                <a:t>O</a:t>
+              </a:r>
+            </a:p>
+          </p:txBody>
+        </p:sp>
+        <p:cxnSp>
+          <p:nvCxnSpPr>
+            <p:cNvPr id="11" name="Straight Arrow Connector 10">
+              <a:extLst>
+                <a:ext uri="{FF2B5EF4-FFF2-40B4-BE49-F238E27FC236}">
+                  <a16:creationId xmlns:a16="http://schemas.microsoft.com/office/drawing/2014/main" id="{1A7A49E6-6517-7E40-ADFE-51908E8CA48D}"/>
+                </a:ext>
+              </a:extLst>
+            </p:cNvPr>
+            <p:cNvCxnSpPr>
+              <a:cxnSpLocks/>
+              <a:stCxn id="10" idx="2"/>
+              <a:endCxn id="5" idx="0"/>
+            </p:cNvCxnSpPr>
+            <p:nvPr/>
+          </p:nvCxnSpPr>
+          <p:spPr>
+            <a:xfrm flipH="1">
+              <a:off x="6096000" y="1886903"/>
+              <a:ext cx="1876424" cy="842010"/>
+            </a:xfrm>
+            <a:prstGeom prst="straightConnector1">
+              <a:avLst/>
+            </a:prstGeom>
+            <a:ln w="25400">
+              <a:solidFill>
+                <a:schemeClr val="tx1">
+                  <a:lumMod val="75000"/>
+                  <a:lumOff val="25000"/>
+                </a:schemeClr>
+              </a:solidFill>
+              <a:tailEnd type="triangle"/>
+            </a:ln>
+          </p:spPr>
+          <p:style>
+            <a:lnRef idx="1">
+              <a:schemeClr val="accent1"/>
+            </a:lnRef>
+            <a:fillRef idx="0">
+              <a:schemeClr val="accent1"/>
+            </a:fillRef>
+            <a:effectRef idx="0">
+              <a:schemeClr val="accent1"/>
+            </a:effectRef>
+            <a:fontRef idx="minor">
+              <a:schemeClr val="tx1"/>
+            </a:fontRef>
+          </p:style>
+        </p:cxnSp>
+        <p:cxnSp>
+          <p:nvCxnSpPr>
+            <p:cNvPr id="14" name="Straight Arrow Connector 13">
+              <a:extLst>
+                <a:ext uri="{FF2B5EF4-FFF2-40B4-BE49-F238E27FC236}">
+                  <a16:creationId xmlns:a16="http://schemas.microsoft.com/office/drawing/2014/main" id="{699CD9EE-8EF4-A74D-B6E5-732A9E76A310}"/>
+                </a:ext>
+              </a:extLst>
+            </p:cNvPr>
+            <p:cNvCxnSpPr>
+              <a:cxnSpLocks/>
+              <a:stCxn id="10" idx="2"/>
+            </p:cNvCxnSpPr>
+            <p:nvPr/>
+          </p:nvCxnSpPr>
+          <p:spPr>
+            <a:xfrm>
+              <a:off x="7972424" y="1886903"/>
+              <a:ext cx="1994536" cy="884872"/>
+            </a:xfrm>
+            <a:prstGeom prst="straightConnector1">
+              <a:avLst/>
+            </a:prstGeom>
+            <a:ln w="25400">
+              <a:solidFill>
+                <a:schemeClr val="tx1">
+                  <a:lumMod val="75000"/>
+                  <a:lumOff val="25000"/>
+                </a:schemeClr>
+              </a:solidFill>
+              <a:tailEnd type="triangle"/>
+            </a:ln>
+          </p:spPr>
+          <p:style>
+            <a:lnRef idx="1">
+              <a:schemeClr val="accent1"/>
+            </a:lnRef>
+            <a:fillRef idx="0">
+              <a:schemeClr val="accent1"/>
+            </a:fillRef>
+            <a:effectRef idx="0">
+              <a:schemeClr val="accent1"/>
+            </a:effectRef>
+            <a:fontRef idx="minor">
+              <a:schemeClr val="tx1"/>
+            </a:fontRef>
+          </p:style>
+        </p:cxnSp>
+        <p:sp>
+          <p:nvSpPr>
+            <p:cNvPr id="17" name="Oval 16">
+              <a:extLst>
+                <a:ext uri="{FF2B5EF4-FFF2-40B4-BE49-F238E27FC236}">
+                  <a16:creationId xmlns:a16="http://schemas.microsoft.com/office/drawing/2014/main" id="{493B321D-DEC4-E748-AB34-3280A9551BCE}"/>
+                </a:ext>
+              </a:extLst>
+            </p:cNvPr>
+            <p:cNvSpPr/>
+            <p:nvPr/>
+          </p:nvSpPr>
+          <p:spPr>
+            <a:xfrm>
+              <a:off x="6095999" y="182880"/>
+              <a:ext cx="3771900" cy="1931670"/>
+            </a:xfrm>
+            <a:prstGeom prst="ellipse">
+              <a:avLst/>
+            </a:prstGeom>
+            <a:ln w="25400">
+              <a:solidFill>
+                <a:schemeClr val="tx1">
+                  <a:lumMod val="75000"/>
+                  <a:lumOff val="25000"/>
+                </a:schemeClr>
+              </a:solidFill>
+              <a:tailEnd type="triangle"/>
+            </a:ln>
+          </p:spPr>
+          <p:style>
+            <a:lnRef idx="1">
+              <a:schemeClr val="accent1"/>
+            </a:lnRef>
+            <a:fillRef idx="0">
+              <a:schemeClr val="accent1"/>
+            </a:fillRef>
+            <a:effectRef idx="0">
+              <a:schemeClr val="accent1"/>
+            </a:effectRef>
+            <a:fontRef idx="minor">
+              <a:schemeClr val="tx1"/>
+            </a:fontRef>
+          </p:style>
+          <p:txBody>
+            <a:bodyPr rtlCol="0" anchor="ctr"/>
+            <a:lstStyle/>
+            <a:p>
+              <a:pPr algn="ctr"/>
+              <a:endParaRPr lang="en-US"/>
+            </a:p>
+          </p:txBody>
+        </p:sp>
+        <mc:AlternateContent xmlns:mc="http://schemas.openxmlformats.org/markup-compatibility/2006" xmlns:a14="http://schemas.microsoft.com/office/drawing/2010/main">
+          <mc:Choice Requires="a14">
+            <p:sp>
+              <p:nvSpPr>
+                <p:cNvPr id="18" name="TextBox 17">
+                  <a:extLst>
+                    <a:ext uri="{FF2B5EF4-FFF2-40B4-BE49-F238E27FC236}">
+                      <a16:creationId xmlns:a16="http://schemas.microsoft.com/office/drawing/2014/main" id="{740BB39A-A8AD-1F4B-B638-6BD43DB4D5DB}"/>
+                    </a:ext>
+                  </a:extLst>
+                </p:cNvPr>
+                <p:cNvSpPr txBox="1"/>
+                <p:nvPr/>
+              </p:nvSpPr>
+              <p:spPr>
+                <a:xfrm>
+                  <a:off x="9064057" y="814180"/>
+                  <a:ext cx="525713" cy="615553"/>
+                </a:xfrm>
+                <a:prstGeom prst="rect">
+                  <a:avLst/>
+                </a:prstGeom>
+                <a:noFill/>
+              </p:spPr>
+              <p:txBody>
+                <a:bodyPr wrap="square" lIns="0" tIns="0" rIns="0" bIns="0" rtlCol="0">
+                  <a:spAutoFit/>
+                </a:bodyPr>
+                <a:lstStyle/>
+                <a:p>
+                  <a:pPr/>
+                  <a14:m>
+                    <m:oMathPara xmlns:m="http://schemas.openxmlformats.org/officeDocument/2006/math">
+                      <m:oMath>
+                        <m:r>
+                          <a:rPr lang="en-US" sz="4000" i="1" smtClean="0">
+                            <a:latin typeface="Cambria Math" panose="02040503050406030204" pitchFamily="18" charset="0"/>
+                            <a:ea typeface="Cambria Math" panose="02040503050406030204" pitchFamily="18" charset="0"/>
+                          </a:rPr>
+                          <m:t>𝜀</m:t>
+                        </m:r>
+                      </m:oMath>
+                    </m:oMathPara>
+                  </a14:m>
+                  <a:endParaRPr lang="en-US" sz="4000" dirty="0"/>
+                </a:p>
+              </p:txBody>
+            </p:sp>
+          </mc:Choice>
+          <mc:Fallback xmlns="">
+            <p:sp>
+              <p:nvSpPr>
+                <p:cNvPr id="18" name="TextBox 17">
+                  <a:extLst>
+                    <a:ext uri="{FF2B5EF4-FFF2-40B4-BE49-F238E27FC236}">
+                      <a16:creationId xmlns:a16="http://schemas.microsoft.com/office/drawing/2014/main" id="{740BB39A-A8AD-1F4B-B638-6BD43DB4D5DB}"/>
+                    </a:ext>
+                  </a:extLst>
+                </p:cNvPr>
+                <p:cNvSpPr txBox="1">
+                  <a:spLocks noRot="1" noChangeAspect="1" noMove="1" noResize="1" noEditPoints="1" noAdjustHandles="1" noChangeArrowheads="1" noChangeShapeType="1" noTextEdit="1"/>
+                </p:cNvSpPr>
+                <p:nvPr/>
+              </p:nvSpPr>
+              <p:spPr>
+                <a:xfrm>
+                  <a:off x="9064057" y="814180"/>
+                  <a:ext cx="525713" cy="615553"/>
+                </a:xfrm>
+                <a:prstGeom prst="rect">
+                  <a:avLst/>
+                </a:prstGeom>
+                <a:blipFill>
+                  <a:blip r:embed="rId2"/>
+                  <a:stretch>
+                    <a:fillRect/>
+                  </a:stretch>
+                </a:blipFill>
+              </p:spPr>
+              <p:txBody>
+                <a:bodyPr/>
+                <a:lstStyle/>
+                <a:p>
+                  <a:r>
+                    <a:rPr lang="en-GB">
+                      <a:noFill/>
+                    </a:rPr>
+                    <a:t> </a:t>
+                  </a:r>
+                </a:p>
+              </p:txBody>
+            </p:sp>
+          </mc:Fallback>
+        </mc:AlternateContent>
+      </p:grpSp>
+      <p:sp>
+        <p:nvSpPr>
+          <p:cNvPr id="7" name="TextBox 6">
+            <a:extLst>
+              <a:ext uri="{FF2B5EF4-FFF2-40B4-BE49-F238E27FC236}">
+                <a16:creationId xmlns:a16="http://schemas.microsoft.com/office/drawing/2014/main" id="{E508EAD4-68E1-F15C-F167-E2893283D8A2}"/>
+              </a:ext>
+            </a:extLst>
+          </p:cNvPr>
+          <p:cNvSpPr txBox="1"/>
+          <p:nvPr/>
+        </p:nvSpPr>
+        <p:spPr>
+          <a:xfrm>
+            <a:off x="847880" y="696714"/>
+            <a:ext cx="10378126" cy="1815882"/>
+          </a:xfrm>
+          <a:prstGeom prst="rect">
+            <a:avLst/>
+          </a:prstGeom>
+          <a:noFill/>
+        </p:spPr>
+        <p:txBody>
+          <a:bodyPr wrap="square">
+            <a:spAutoFit/>
+          </a:bodyPr>
+          <a:lstStyle/>
+          <a:p>
+            <a:r>
+              <a:rPr lang="en-GB" sz="2800" dirty="0"/>
+              <a:t>The </a:t>
+            </a:r>
+            <a:r>
+              <a:rPr lang="en-GB" sz="2800" dirty="0">
+                <a:effectLst/>
+              </a:rPr>
+              <a:t>relationship between the instrument Z, the endogenous variable X, and the dependent variable Y.</a:t>
+            </a:r>
+          </a:p>
+          <a:p>
+            <a:br>
+              <a:rPr lang="en-GB" sz="2800" dirty="0">
+                <a:effectLst/>
+              </a:rPr>
+            </a:br>
+            <a:endParaRPr lang="en-GB" sz="2800" dirty="0">
+              <a:effectLst/>
+            </a:endParaRPr>
+          </a:p>
+        </p:txBody>
+      </p:sp>
+    </p:spTree>
+    <p:extLst>
+      <p:ext uri="{BB962C8B-B14F-4D97-AF65-F5344CB8AC3E}">
+        <p14:creationId xmlns:p14="http://schemas.microsoft.com/office/powerpoint/2010/main" val="351993274"/>
+      </p:ext>
+    </p:extLst>
+  </p:cSld>
+  <p:clrMapOvr>
+    <a:masterClrMapping/>
+  </p:clrMapOvr>
+</p:sld>
+</file>
+
+<file path=ppt/slides/slide11.xml><?xml version="1.0" encoding="utf-8"?>
+<p:sld xmlns:a="http://schemas.openxmlformats.org/drawingml/2006/main" xmlns:r="http://schemas.openxmlformats.org/officeDocument/2006/relationships" xmlns:p="http://schemas.openxmlformats.org/presentationml/2006/main">
+  <p:cSld>
+    <p:spTree>
+      <p:nvGrpSpPr>
+        <p:cNvPr id="1" name=""/>
+        <p:cNvGrpSpPr/>
+        <p:nvPr/>
+      </p:nvGrpSpPr>
+      <p:grpSpPr>
+        <a:xfrm>
+          <a:off x="0" y="0"/>
+          <a:ext cx="0" cy="0"/>
+          <a:chOff x="0" y="0"/>
+          <a:chExt cx="0" cy="0"/>
+        </a:xfrm>
+      </p:grpSpPr>
       <p:sp>
         <p:nvSpPr>
           <p:cNvPr id="2" name="Title 1">
@@ -3729,7 +4463,7 @@
 </p:sld>
 </file>
 
-<file path=ppt/slides/slide11.xml><?xml version="1.0" encoding="utf-8"?>
+<file path=ppt/slides/slide12.xml><?xml version="1.0" encoding="utf-8"?>
 <p:sld xmlns:a="http://schemas.openxmlformats.org/drawingml/2006/main" xmlns:r="http://schemas.openxmlformats.org/officeDocument/2006/relationships" xmlns:p="http://schemas.openxmlformats.org/presentationml/2006/main">
   <p:cSld>
     <p:spTree>
@@ -4160,7 +4894,7 @@
 </p:sld>
 </file>
 
-<file path=ppt/slides/slide12.xml><?xml version="1.0" encoding="utf-8"?>
+<file path=ppt/slides/slide13.xml><?xml version="1.0" encoding="utf-8"?>
 <p:sld xmlns:a="http://schemas.openxmlformats.org/drawingml/2006/main" xmlns:r="http://schemas.openxmlformats.org/officeDocument/2006/relationships" xmlns:p="http://schemas.openxmlformats.org/presentationml/2006/main">
   <p:cSld>
     <p:spTree>
@@ -5028,7 +5762,7 @@
 </p:sld>
 </file>
 
-<file path=ppt/slides/slide13.xml><?xml version="1.0" encoding="utf-8"?>
+<file path=ppt/slides/slide14.xml><?xml version="1.0" encoding="utf-8"?>
 <p:sld xmlns:a="http://schemas.openxmlformats.org/drawingml/2006/main" xmlns:r="http://schemas.openxmlformats.org/officeDocument/2006/relationships" xmlns:p="http://schemas.openxmlformats.org/presentationml/2006/main">
   <p:cSld>
     <p:spTree>
@@ -5186,7 +5920,7 @@
 </p:sld>
 </file>
 
-<file path=ppt/slides/slide14.xml><?xml version="1.0" encoding="utf-8"?>
+<file path=ppt/slides/slide15.xml><?xml version="1.0" encoding="utf-8"?>
 <p:sld xmlns:a="http://schemas.openxmlformats.org/drawingml/2006/main" xmlns:r="http://schemas.openxmlformats.org/officeDocument/2006/relationships" xmlns:p="http://schemas.openxmlformats.org/presentationml/2006/main">
   <p:cSld>
     <p:spTree>
@@ -5558,7 +6292,7 @@
 </p:sld>
 </file>
 
-<file path=ppt/slides/slide15.xml><?xml version="1.0" encoding="utf-8"?>
+<file path=ppt/slides/slide16.xml><?xml version="1.0" encoding="utf-8"?>
 <p:sld xmlns:a="http://schemas.openxmlformats.org/drawingml/2006/main" xmlns:r="http://schemas.openxmlformats.org/officeDocument/2006/relationships" xmlns:p="http://schemas.openxmlformats.org/presentationml/2006/main">
   <p:cSld>
     <p:spTree>
@@ -5644,101 +6378,6 @@
     <p:extLst>
       <p:ext uri="{BB962C8B-B14F-4D97-AF65-F5344CB8AC3E}">
         <p14:creationId xmlns:p14="http://schemas.microsoft.com/office/powerpoint/2010/main" val="2167213104"/>
-      </p:ext>
-    </p:extLst>
-  </p:cSld>
-  <p:clrMapOvr>
-    <a:masterClrMapping/>
-  </p:clrMapOvr>
-</p:sld>
-</file>
-
-<file path=ppt/slides/slide16.xml><?xml version="1.0" encoding="utf-8"?>
-<p:sld xmlns:a="http://schemas.openxmlformats.org/drawingml/2006/main" xmlns:r="http://schemas.openxmlformats.org/officeDocument/2006/relationships" xmlns:p="http://schemas.openxmlformats.org/presentationml/2006/main">
-  <p:cSld>
-    <p:spTree>
-      <p:nvGrpSpPr>
-        <p:cNvPr id="1" name=""/>
-        <p:cNvGrpSpPr/>
-        <p:nvPr/>
-      </p:nvGrpSpPr>
-      <p:grpSpPr>
-        <a:xfrm>
-          <a:off x="0" y="0"/>
-          <a:ext cx="0" cy="0"/>
-          <a:chOff x="0" y="0"/>
-          <a:chExt cx="0" cy="0"/>
-        </a:xfrm>
-      </p:grpSpPr>
-      <p:pic>
-        <p:nvPicPr>
-          <p:cNvPr id="3" name="Picture 2">
-            <a:extLst>
-              <a:ext uri="{FF2B5EF4-FFF2-40B4-BE49-F238E27FC236}">
-                <a16:creationId xmlns:a16="http://schemas.microsoft.com/office/drawing/2014/main" id="{C28292AB-F74E-A409-FF5F-E5A230AD921E}"/>
-              </a:ext>
-            </a:extLst>
-          </p:cNvPr>
-          <p:cNvPicPr>
-            <a:picLocks noChangeAspect="1"/>
-          </p:cNvPicPr>
-          <p:nvPr/>
-        </p:nvPicPr>
-        <p:blipFill>
-          <a:blip r:embed="rId2"/>
-          <a:stretch>
-            <a:fillRect/>
-          </a:stretch>
-        </p:blipFill>
-        <p:spPr>
-          <a:xfrm>
-            <a:off x="753631" y="88900"/>
-            <a:ext cx="6823937" cy="6858000"/>
-          </a:xfrm>
-          <a:prstGeom prst="rect">
-            <a:avLst/>
-          </a:prstGeom>
-        </p:spPr>
-      </p:pic>
-      <p:sp>
-        <p:nvSpPr>
-          <p:cNvPr id="2" name="TextBox 1">
-            <a:extLst>
-              <a:ext uri="{FF2B5EF4-FFF2-40B4-BE49-F238E27FC236}">
-                <a16:creationId xmlns:a16="http://schemas.microsoft.com/office/drawing/2014/main" id="{18BCA09F-47AC-4C21-2D98-75BFE570103F}"/>
-              </a:ext>
-            </a:extLst>
-          </p:cNvPr>
-          <p:cNvSpPr txBox="1"/>
-          <p:nvPr/>
-        </p:nvSpPr>
-        <p:spPr>
-          <a:xfrm>
-            <a:off x="6096000" y="2184400"/>
-            <a:ext cx="4635500" cy="369332"/>
-          </a:xfrm>
-          <a:prstGeom prst="rect">
-            <a:avLst/>
-          </a:prstGeom>
-          <a:noFill/>
-        </p:spPr>
-        <p:txBody>
-          <a:bodyPr wrap="square" rtlCol="0">
-            <a:spAutoFit/>
-          </a:bodyPr>
-          <a:lstStyle/>
-          <a:p>
-            <a:r>
-              <a:rPr lang="en-GB" dirty="0"/>
-              <a:t>With TSLS, MUSIC is no longer significant</a:t>
-            </a:r>
-          </a:p>
-        </p:txBody>
-      </p:sp>
-    </p:spTree>
-    <p:extLst>
-      <p:ext uri="{BB962C8B-B14F-4D97-AF65-F5344CB8AC3E}">
-        <p14:creationId xmlns:p14="http://schemas.microsoft.com/office/powerpoint/2010/main" val="686734705"/>
       </p:ext>
     </p:extLst>
   </p:cSld>
@@ -5767,10 +6406,10 @@
       </p:grpSpPr>
       <p:pic>
         <p:nvPicPr>
-          <p:cNvPr id="2" name="Picture 1">
-            <a:extLst>
-              <a:ext uri="{FF2B5EF4-FFF2-40B4-BE49-F238E27FC236}">
-                <a16:creationId xmlns:a16="http://schemas.microsoft.com/office/drawing/2014/main" id="{96AAE875-152E-B615-650C-60DE87FDD285}"/>
+          <p:cNvPr id="3" name="Picture 2">
+            <a:extLst>
+              <a:ext uri="{FF2B5EF4-FFF2-40B4-BE49-F238E27FC236}">
+                <a16:creationId xmlns:a16="http://schemas.microsoft.com/office/drawing/2014/main" id="{C28292AB-F74E-A409-FF5F-E5A230AD921E}"/>
               </a:ext>
             </a:extLst>
           </p:cNvPr>
@@ -5787,8 +6426,8 @@
         </p:blipFill>
         <p:spPr>
           <a:xfrm>
-            <a:off x="6096000" y="1562100"/>
-            <a:ext cx="5945383" cy="4400172"/>
+            <a:off x="753631" y="88900"/>
+            <a:ext cx="6823937" cy="6858000"/>
           </a:xfrm>
           <a:prstGeom prst="rect">
             <a:avLst/>
@@ -5797,54 +6436,10 @@
       </p:pic>
       <p:sp>
         <p:nvSpPr>
-          <p:cNvPr id="3" name="Title 2">
-            <a:extLst>
-              <a:ext uri="{FF2B5EF4-FFF2-40B4-BE49-F238E27FC236}">
-                <a16:creationId xmlns:a16="http://schemas.microsoft.com/office/drawing/2014/main" id="{24C58AAE-1855-DCC1-AF7E-28334C392CEC}"/>
-              </a:ext>
-            </a:extLst>
-          </p:cNvPr>
-          <p:cNvSpPr>
-            <a:spLocks noGrp="1"/>
-          </p:cNvSpPr>
-          <p:nvPr>
-            <p:ph type="title"/>
-          </p:nvPr>
-        </p:nvSpPr>
-        <p:spPr/>
-        <p:txBody>
-          <a:bodyPr/>
-          <a:lstStyle/>
-          <a:p>
-            <a:r>
-              <a:rPr lang="en-GB" b="1" i="0" u="none" strike="noStrike" dirty="0">
-                <a:solidFill>
-                  <a:srgbClr val="000000"/>
-                </a:solidFill>
-                <a:effectLst/>
-                <a:latin typeface="Source Sans Pro" panose="020B0503030403020204" pitchFamily="34" charset="0"/>
-              </a:rPr>
-              <a:t>Hausman’s specification test</a:t>
-            </a:r>
-            <a:br>
-              <a:rPr lang="en-GB" b="1" i="0" u="none" strike="noStrike" dirty="0">
-                <a:solidFill>
-                  <a:srgbClr val="000000"/>
-                </a:solidFill>
-                <a:effectLst/>
-                <a:latin typeface="Source Sans Pro" panose="020B0503030403020204" pitchFamily="34" charset="0"/>
-              </a:rPr>
-            </a:br>
-            <a:endParaRPr lang="en-GB" dirty="0"/>
-          </a:p>
-        </p:txBody>
-      </p:sp>
-      <p:sp>
-        <p:nvSpPr>
-          <p:cNvPr id="6" name="TextBox 5">
-            <a:extLst>
-              <a:ext uri="{FF2B5EF4-FFF2-40B4-BE49-F238E27FC236}">
-                <a16:creationId xmlns:a16="http://schemas.microsoft.com/office/drawing/2014/main" id="{889FA254-1DA0-89F0-CD9E-8E3DC314F270}"/>
+          <p:cNvPr id="2" name="TextBox 1">
+            <a:extLst>
+              <a:ext uri="{FF2B5EF4-FFF2-40B4-BE49-F238E27FC236}">
+                <a16:creationId xmlns:a16="http://schemas.microsoft.com/office/drawing/2014/main" id="{18BCA09F-47AC-4C21-2D98-75BFE570103F}"/>
               </a:ext>
             </a:extLst>
           </p:cNvPr>
@@ -5853,8 +6448,8 @@
         </p:nvSpPr>
         <p:spPr>
           <a:xfrm>
-            <a:off x="342900" y="1690688"/>
-            <a:ext cx="6096000" cy="923330"/>
+            <a:off x="6096000" y="2184400"/>
+            <a:ext cx="4635500" cy="369332"/>
           </a:xfrm>
           <a:prstGeom prst="rect">
             <a:avLst/>
@@ -5862,198 +6457,22 @@
           <a:noFill/>
         </p:spPr>
         <p:txBody>
-          <a:bodyPr wrap="square">
+          <a:bodyPr wrap="square" rtlCol="0">
             <a:spAutoFit/>
           </a:bodyPr>
           <a:lstStyle/>
           <a:p>
-            <a:pPr algn="l"/>
-            <a:r>
-              <a:rPr lang="en-GB" b="0" i="0" u="none" strike="noStrike" dirty="0">
-                <a:solidFill>
-                  <a:srgbClr val="000000"/>
-                </a:solidFill>
-                <a:effectLst/>
-                <a:latin typeface="Source Sans Pro" panose="020B0503030403020204" pitchFamily="34" charset="0"/>
-              </a:rPr>
-              <a:t>H0: MUSIC is an exogenous variable (OLS is better)</a:t>
-            </a:r>
-          </a:p>
-          <a:p>
-            <a:pPr algn="l"/>
-            <a:r>
-              <a:rPr lang="en-GB" b="0" i="0" u="none" strike="noStrike" dirty="0">
-                <a:solidFill>
-                  <a:srgbClr val="000000"/>
-                </a:solidFill>
-                <a:effectLst/>
-                <a:latin typeface="Source Sans Pro" panose="020B0503030403020204" pitchFamily="34" charset="0"/>
-              </a:rPr>
-              <a:t>H1: MUSIC is an endogenous variable </a:t>
-            </a:r>
-          </a:p>
-          <a:p>
-            <a:pPr algn="l"/>
-            <a:r>
-              <a:rPr lang="en-GB" b="0" i="0" u="none" strike="noStrike" dirty="0">
-                <a:solidFill>
-                  <a:srgbClr val="000000"/>
-                </a:solidFill>
-                <a:effectLst/>
-                <a:latin typeface="Source Sans Pro" panose="020B0503030403020204" pitchFamily="34" charset="0"/>
-              </a:rPr>
-              <a:t>(TSLS is better than OLS)</a:t>
-            </a:r>
-          </a:p>
-        </p:txBody>
-      </p:sp>
-      <p:sp>
-        <p:nvSpPr>
-          <p:cNvPr id="8" name="TextBox 7">
-            <a:extLst>
-              <a:ext uri="{FF2B5EF4-FFF2-40B4-BE49-F238E27FC236}">
-                <a16:creationId xmlns:a16="http://schemas.microsoft.com/office/drawing/2014/main" id="{E8C1FB43-672A-C4FB-ACD7-EBA485F72719}"/>
-              </a:ext>
-            </a:extLst>
-          </p:cNvPr>
-          <p:cNvSpPr txBox="1"/>
-          <p:nvPr/>
-        </p:nvSpPr>
-        <p:spPr>
-          <a:xfrm>
-            <a:off x="558800" y="3006537"/>
-            <a:ext cx="6096000" cy="646331"/>
-          </a:xfrm>
-          <a:prstGeom prst="rect">
-            <a:avLst/>
-          </a:prstGeom>
-          <a:noFill/>
-        </p:spPr>
-        <p:txBody>
-          <a:bodyPr wrap="square">
-            <a:spAutoFit/>
-          </a:bodyPr>
-          <a:lstStyle/>
-          <a:p>
-            <a:r>
-              <a:rPr lang="en-GB" b="0" i="0" u="none" strike="noStrike" dirty="0">
-                <a:solidFill>
-                  <a:srgbClr val="000000"/>
-                </a:solidFill>
-                <a:effectLst/>
-                <a:latin typeface="Source Sans Pro" panose="020B0503030403020204" pitchFamily="34" charset="0"/>
-              </a:rPr>
-              <a:t>To assess the significance of H1. You need to look at the significance of the ‘</a:t>
-            </a:r>
-            <a:r>
-              <a:rPr lang="en-GB" b="0" i="0" u="none" strike="noStrike" dirty="0" err="1">
-                <a:solidFill>
-                  <a:srgbClr val="000000"/>
-                </a:solidFill>
-                <a:effectLst/>
-                <a:latin typeface="Source Sans Pro" panose="020B0503030403020204" pitchFamily="34" charset="0"/>
-              </a:rPr>
-              <a:t>resid</a:t>
-            </a:r>
-            <a:r>
-              <a:rPr lang="en-GB" b="0" i="0" u="none" strike="noStrike" dirty="0">
-                <a:solidFill>
-                  <a:srgbClr val="000000"/>
-                </a:solidFill>
-                <a:effectLst/>
-                <a:latin typeface="Source Sans Pro" panose="020B0503030403020204" pitchFamily="34" charset="0"/>
-              </a:rPr>
-              <a:t>’ variable (i.e., resid1).</a:t>
-            </a:r>
-            <a:endParaRPr lang="en-GB" dirty="0"/>
-          </a:p>
-        </p:txBody>
-      </p:sp>
-      <p:sp>
-        <p:nvSpPr>
-          <p:cNvPr id="10" name="TextBox 9">
-            <a:extLst>
-              <a:ext uri="{FF2B5EF4-FFF2-40B4-BE49-F238E27FC236}">
-                <a16:creationId xmlns:a16="http://schemas.microsoft.com/office/drawing/2014/main" id="{9A40B538-CB72-59BD-C506-2EA7FCA85769}"/>
-              </a:ext>
-            </a:extLst>
-          </p:cNvPr>
-          <p:cNvSpPr txBox="1"/>
-          <p:nvPr/>
-        </p:nvSpPr>
-        <p:spPr>
-          <a:xfrm>
-            <a:off x="558800" y="4253572"/>
-            <a:ext cx="6096000" cy="923330"/>
-          </a:xfrm>
-          <a:prstGeom prst="rect">
-            <a:avLst/>
-          </a:prstGeom>
-          <a:noFill/>
-        </p:spPr>
-        <p:txBody>
-          <a:bodyPr wrap="square">
-            <a:spAutoFit/>
-          </a:bodyPr>
-          <a:lstStyle/>
-          <a:p>
-            <a:r>
-              <a:rPr lang="en-GB" b="0" i="0" u="none" strike="noStrike" dirty="0">
-                <a:solidFill>
-                  <a:srgbClr val="000000"/>
-                </a:solidFill>
-                <a:effectLst/>
-                <a:latin typeface="Source Sans Pro" panose="020B0503030403020204" pitchFamily="34" charset="0"/>
-              </a:rPr>
-              <a:t> H0 is rejected because resid1 is significant. </a:t>
-            </a:r>
-          </a:p>
-          <a:p>
-            <a:endParaRPr lang="en-GB" dirty="0">
-              <a:solidFill>
-                <a:srgbClr val="000000"/>
-              </a:solidFill>
-              <a:latin typeface="Source Sans Pro" panose="020B0503030403020204" pitchFamily="34" charset="0"/>
-            </a:endParaRPr>
-          </a:p>
-          <a:p>
-            <a:r>
-              <a:rPr lang="en-GB" b="0" i="0" u="none" strike="noStrike" dirty="0">
-                <a:solidFill>
-                  <a:srgbClr val="000000"/>
-                </a:solidFill>
-                <a:effectLst/>
-                <a:latin typeface="Source Sans Pro" panose="020B0503030403020204" pitchFamily="34" charset="0"/>
-              </a:rPr>
-              <a:t>Thus, </a:t>
-            </a:r>
-            <a:r>
-              <a:rPr lang="en-GB" dirty="0">
-                <a:solidFill>
-                  <a:srgbClr val="000000"/>
-                </a:solidFill>
-                <a:latin typeface="Source Sans Pro" panose="020B0503030403020204" pitchFamily="34" charset="0"/>
-              </a:rPr>
-              <a:t>MUSIC is endogenous, and </a:t>
-            </a:r>
-            <a:r>
-              <a:rPr lang="en-GB" b="0" i="0" u="none" strike="noStrike" dirty="0">
-                <a:solidFill>
-                  <a:srgbClr val="000000"/>
-                </a:solidFill>
-                <a:effectLst/>
-                <a:latin typeface="Source Sans Pro" panose="020B0503030403020204" pitchFamily="34" charset="0"/>
-              </a:rPr>
-              <a:t>TSLS is justified</a:t>
-            </a:r>
-            <a:endParaRPr lang="en-GB" dirty="0"/>
+            <a:r>
+              <a:rPr lang="en-GB" dirty="0"/>
+              <a:t>With TSLS, MUSIC is no longer significant</a:t>
+            </a:r>
           </a:p>
         </p:txBody>
       </p:sp>
     </p:spTree>
     <p:extLst>
       <p:ext uri="{BB962C8B-B14F-4D97-AF65-F5344CB8AC3E}">
-        <p14:creationId xmlns:p14="http://schemas.microsoft.com/office/powerpoint/2010/main" val="3212878605"/>
+        <p14:creationId xmlns:p14="http://schemas.microsoft.com/office/powerpoint/2010/main" val="686734705"/>
       </p:ext>
     </p:extLst>
   </p:cSld>
@@ -6085,7 +6504,7 @@
           <p:cNvPr id="2" name="Picture 1">
             <a:extLst>
               <a:ext uri="{FF2B5EF4-FFF2-40B4-BE49-F238E27FC236}">
-                <a16:creationId xmlns:a16="http://schemas.microsoft.com/office/drawing/2014/main" id="{1DCC5359-718F-5D8B-522E-F7018A5C89A7}"/>
+                <a16:creationId xmlns:a16="http://schemas.microsoft.com/office/drawing/2014/main" id="{96AAE875-152E-B615-650C-60DE87FDD285}"/>
               </a:ext>
             </a:extLst>
           </p:cNvPr>
@@ -6102,8 +6521,8 @@
         </p:blipFill>
         <p:spPr>
           <a:xfrm>
-            <a:off x="3467100" y="2914650"/>
-            <a:ext cx="8585200" cy="1765300"/>
+            <a:off x="6096000" y="1562100"/>
+            <a:ext cx="5945383" cy="4400172"/>
           </a:xfrm>
           <a:prstGeom prst="rect">
             <a:avLst/>
@@ -6115,7 +6534,7 @@
           <p:cNvPr id="3" name="Title 2">
             <a:extLst>
               <a:ext uri="{FF2B5EF4-FFF2-40B4-BE49-F238E27FC236}">
-                <a16:creationId xmlns:a16="http://schemas.microsoft.com/office/drawing/2014/main" id="{231AE72D-DA04-B1FA-1BD4-0DC158608572}"/>
+                <a16:creationId xmlns:a16="http://schemas.microsoft.com/office/drawing/2014/main" id="{24C58AAE-1855-DCC1-AF7E-28334C392CEC}"/>
               </a:ext>
             </a:extLst>
           </p:cNvPr>
@@ -6139,7 +6558,7 @@
                 <a:effectLst/>
                 <a:latin typeface="Source Sans Pro" panose="020B0503030403020204" pitchFamily="34" charset="0"/>
               </a:rPr>
-              <a:t>Overidentifying restriction test</a:t>
+              <a:t>Hausman’s specification test</a:t>
             </a:r>
             <a:br>
               <a:rPr lang="en-GB" b="1" i="0" u="none" strike="noStrike" dirty="0">
@@ -6156,10 +6575,10 @@
       </p:sp>
       <p:sp>
         <p:nvSpPr>
-          <p:cNvPr id="5" name="TextBox 4">
-            <a:extLst>
-              <a:ext uri="{FF2B5EF4-FFF2-40B4-BE49-F238E27FC236}">
-                <a16:creationId xmlns:a16="http://schemas.microsoft.com/office/drawing/2014/main" id="{54416761-5DC7-ABA9-10A1-325C4B8E693B}"/>
+          <p:cNvPr id="6" name="TextBox 5">
+            <a:extLst>
+              <a:ext uri="{FF2B5EF4-FFF2-40B4-BE49-F238E27FC236}">
+                <a16:creationId xmlns:a16="http://schemas.microsoft.com/office/drawing/2014/main" id="{889FA254-1DA0-89F0-CD9E-8E3DC314F270}"/>
               </a:ext>
             </a:extLst>
           </p:cNvPr>
@@ -6168,7 +6587,75 @@
         </p:nvSpPr>
         <p:spPr>
           <a:xfrm>
-            <a:off x="1092200" y="1823135"/>
+            <a:off x="342900" y="1690688"/>
+            <a:ext cx="6096000" cy="923330"/>
+          </a:xfrm>
+          <a:prstGeom prst="rect">
+            <a:avLst/>
+          </a:prstGeom>
+          <a:noFill/>
+        </p:spPr>
+        <p:txBody>
+          <a:bodyPr wrap="square">
+            <a:spAutoFit/>
+          </a:bodyPr>
+          <a:lstStyle/>
+          <a:p>
+            <a:pPr algn="l"/>
+            <a:r>
+              <a:rPr lang="en-GB" b="0" i="0" u="none" strike="noStrike" dirty="0">
+                <a:solidFill>
+                  <a:srgbClr val="000000"/>
+                </a:solidFill>
+                <a:effectLst/>
+                <a:latin typeface="Source Sans Pro" panose="020B0503030403020204" pitchFamily="34" charset="0"/>
+              </a:rPr>
+              <a:t>H0: MUSIC is an exogenous variable (OLS is better)</a:t>
+            </a:r>
+          </a:p>
+          <a:p>
+            <a:pPr algn="l"/>
+            <a:r>
+              <a:rPr lang="en-GB" b="0" i="0" u="none" strike="noStrike" dirty="0">
+                <a:solidFill>
+                  <a:srgbClr val="000000"/>
+                </a:solidFill>
+                <a:effectLst/>
+                <a:latin typeface="Source Sans Pro" panose="020B0503030403020204" pitchFamily="34" charset="0"/>
+              </a:rPr>
+              <a:t>H1: MUSIC is an endogenous variable </a:t>
+            </a:r>
+          </a:p>
+          <a:p>
+            <a:pPr algn="l"/>
+            <a:r>
+              <a:rPr lang="en-GB" b="0" i="0" u="none" strike="noStrike" dirty="0">
+                <a:solidFill>
+                  <a:srgbClr val="000000"/>
+                </a:solidFill>
+                <a:effectLst/>
+                <a:latin typeface="Source Sans Pro" panose="020B0503030403020204" pitchFamily="34" charset="0"/>
+              </a:rPr>
+              <a:t>(TSLS is better than OLS)</a:t>
+            </a:r>
+          </a:p>
+        </p:txBody>
+      </p:sp>
+      <p:sp>
+        <p:nvSpPr>
+          <p:cNvPr id="8" name="TextBox 7">
+            <a:extLst>
+              <a:ext uri="{FF2B5EF4-FFF2-40B4-BE49-F238E27FC236}">
+                <a16:creationId xmlns:a16="http://schemas.microsoft.com/office/drawing/2014/main" id="{E8C1FB43-672A-C4FB-ACD7-EBA485F72719}"/>
+              </a:ext>
+            </a:extLst>
+          </p:cNvPr>
+          <p:cNvSpPr txBox="1"/>
+          <p:nvPr/>
+        </p:nvSpPr>
+        <p:spPr>
+          <a:xfrm>
+            <a:off x="558800" y="3006537"/>
             <a:ext cx="6096000" cy="646331"/>
           </a:xfrm>
           <a:prstGeom prst="rect">
@@ -6190,40 +6677,18 @@
                 <a:effectLst/>
                 <a:latin typeface="Source Sans Pro" panose="020B0503030403020204" pitchFamily="34" charset="0"/>
               </a:rPr>
-              <a:t>H0: All instruments are exogenous H1. One of the instrument is endogenous (i.e., related to the error term)</a:t>
-            </a:r>
-            <a:endParaRPr lang="en-GB" dirty="0"/>
-          </a:p>
-        </p:txBody>
-      </p:sp>
-      <p:sp>
-        <p:nvSpPr>
-          <p:cNvPr id="7" name="TextBox 6">
-            <a:extLst>
-              <a:ext uri="{FF2B5EF4-FFF2-40B4-BE49-F238E27FC236}">
-                <a16:creationId xmlns:a16="http://schemas.microsoft.com/office/drawing/2014/main" id="{7191BD04-D057-9653-0810-EA9210B6F515}"/>
-              </a:ext>
-            </a:extLst>
-          </p:cNvPr>
-          <p:cNvSpPr txBox="1"/>
-          <p:nvPr/>
-        </p:nvSpPr>
-        <p:spPr>
-          <a:xfrm>
-            <a:off x="1092200" y="5015547"/>
-            <a:ext cx="6096000" cy="1477328"/>
-          </a:xfrm>
-          <a:prstGeom prst="rect">
-            <a:avLst/>
-          </a:prstGeom>
-          <a:noFill/>
-        </p:spPr>
-        <p:txBody>
-          <a:bodyPr wrap="square">
-            <a:spAutoFit/>
-          </a:bodyPr>
-          <a:lstStyle/>
-          <a:p>
+              <a:t>To assess the significance of H1. You need to look at the significance of the ‘</a:t>
+            </a:r>
+            <a:r>
+              <a:rPr lang="en-GB" b="0" i="0" u="none" strike="noStrike" dirty="0" err="1">
+                <a:solidFill>
+                  <a:srgbClr val="000000"/>
+                </a:solidFill>
+                <a:effectLst/>
+                <a:latin typeface="Source Sans Pro" panose="020B0503030403020204" pitchFamily="34" charset="0"/>
+              </a:rPr>
+              <a:t>resid</a:t>
+            </a:r>
             <a:r>
               <a:rPr lang="en-GB" b="0" i="0" u="none" strike="noStrike" dirty="0">
                 <a:solidFill>
@@ -6232,7 +6697,88 @@
                 <a:effectLst/>
                 <a:latin typeface="Source Sans Pro" panose="020B0503030403020204" pitchFamily="34" charset="0"/>
               </a:rPr>
-              <a:t>As we have only one instrument, therefore, this test is not applicable. For one instrument, the value of the J statistic is printed as zero with p-value is equal to 1. For multiple instruments, if the test is not significant (p-value &lt; 0.05), then all instruments are likely to be exogenous.</a:t>
+              <a:t>’ variable (i.e., resid1).</a:t>
+            </a:r>
+            <a:endParaRPr lang="en-GB" dirty="0"/>
+          </a:p>
+        </p:txBody>
+      </p:sp>
+      <p:sp>
+        <p:nvSpPr>
+          <p:cNvPr id="10" name="TextBox 9">
+            <a:extLst>
+              <a:ext uri="{FF2B5EF4-FFF2-40B4-BE49-F238E27FC236}">
+                <a16:creationId xmlns:a16="http://schemas.microsoft.com/office/drawing/2014/main" id="{9A40B538-CB72-59BD-C506-2EA7FCA85769}"/>
+              </a:ext>
+            </a:extLst>
+          </p:cNvPr>
+          <p:cNvSpPr txBox="1"/>
+          <p:nvPr/>
+        </p:nvSpPr>
+        <p:spPr>
+          <a:xfrm>
+            <a:off x="558800" y="4253572"/>
+            <a:ext cx="6096000" cy="923330"/>
+          </a:xfrm>
+          <a:prstGeom prst="rect">
+            <a:avLst/>
+          </a:prstGeom>
+          <a:noFill/>
+        </p:spPr>
+        <p:txBody>
+          <a:bodyPr wrap="square">
+            <a:spAutoFit/>
+          </a:bodyPr>
+          <a:lstStyle/>
+          <a:p>
+            <a:r>
+              <a:rPr lang="en-GB" b="0" i="0" u="none" strike="noStrike" dirty="0">
+                <a:solidFill>
+                  <a:srgbClr val="000000"/>
+                </a:solidFill>
+                <a:effectLst/>
+                <a:latin typeface="Source Sans Pro" panose="020B0503030403020204" pitchFamily="34" charset="0"/>
+              </a:rPr>
+              <a:t> H0 is rejected because resid1 is significant. </a:t>
+            </a:r>
+          </a:p>
+          <a:p>
+            <a:endParaRPr lang="en-GB" dirty="0">
+              <a:solidFill>
+                <a:srgbClr val="000000"/>
+              </a:solidFill>
+              <a:latin typeface="Source Sans Pro" panose="020B0503030403020204" pitchFamily="34" charset="0"/>
+            </a:endParaRPr>
+          </a:p>
+          <a:p>
+            <a:r>
+              <a:rPr lang="en-GB" b="0" i="0" u="none" strike="noStrike" dirty="0">
+                <a:solidFill>
+                  <a:srgbClr val="000000"/>
+                </a:solidFill>
+                <a:effectLst/>
+                <a:latin typeface="Source Sans Pro" panose="020B0503030403020204" pitchFamily="34" charset="0"/>
+              </a:rPr>
+              <a:t>Thus, </a:t>
+            </a:r>
+            <a:r>
+              <a:rPr lang="en-GB" dirty="0">
+                <a:solidFill>
+                  <a:srgbClr val="000000"/>
+                </a:solidFill>
+                <a:latin typeface="Source Sans Pro" panose="020B0503030403020204" pitchFamily="34" charset="0"/>
+              </a:rPr>
+              <a:t>MUSIC is endogenous, and </a:t>
+            </a:r>
+            <a:r>
+              <a:rPr lang="en-GB" b="0" i="0" u="none" strike="noStrike" dirty="0">
+                <a:solidFill>
+                  <a:srgbClr val="000000"/>
+                </a:solidFill>
+                <a:effectLst/>
+                <a:latin typeface="Source Sans Pro" panose="020B0503030403020204" pitchFamily="34" charset="0"/>
+              </a:rPr>
+              <a:t>TSLS is justified</a:t>
             </a:r>
             <a:endParaRPr lang="en-GB" dirty="0"/>
           </a:p>
@@ -6241,7 +6787,7 @@
     </p:spTree>
     <p:extLst>
       <p:ext uri="{BB962C8B-B14F-4D97-AF65-F5344CB8AC3E}">
-        <p14:creationId xmlns:p14="http://schemas.microsoft.com/office/powerpoint/2010/main" val="3462105238"/>
+        <p14:creationId xmlns:p14="http://schemas.microsoft.com/office/powerpoint/2010/main" val="3212878605"/>
       </p:ext>
     </p:extLst>
   </p:cSld>
@@ -6270,10 +6816,10 @@
       </p:grpSpPr>
       <p:pic>
         <p:nvPicPr>
-          <p:cNvPr id="3" name="Picture 2">
-            <a:extLst>
-              <a:ext uri="{FF2B5EF4-FFF2-40B4-BE49-F238E27FC236}">
-                <a16:creationId xmlns:a16="http://schemas.microsoft.com/office/drawing/2014/main" id="{5EB56B0D-C2DC-7B69-FE18-ED3DEF5F3C0C}"/>
+          <p:cNvPr id="2" name="Picture 1">
+            <a:extLst>
+              <a:ext uri="{FF2B5EF4-FFF2-40B4-BE49-F238E27FC236}">
+                <a16:creationId xmlns:a16="http://schemas.microsoft.com/office/drawing/2014/main" id="{1DCC5359-718F-5D8B-522E-F7018A5C89A7}"/>
               </a:ext>
             </a:extLst>
           </p:cNvPr>
@@ -6290,8 +6836,8 @@
         </p:blipFill>
         <p:spPr>
           <a:xfrm>
-            <a:off x="4013200" y="2057153"/>
-            <a:ext cx="7772400" cy="2540493"/>
+            <a:off x="3467100" y="2914650"/>
+            <a:ext cx="8585200" cy="1765300"/>
           </a:xfrm>
           <a:prstGeom prst="rect">
             <a:avLst/>
@@ -6300,10 +6846,10 @@
       </p:pic>
       <p:sp>
         <p:nvSpPr>
-          <p:cNvPr id="2" name="Title 1">
-            <a:extLst>
-              <a:ext uri="{FF2B5EF4-FFF2-40B4-BE49-F238E27FC236}">
-                <a16:creationId xmlns:a16="http://schemas.microsoft.com/office/drawing/2014/main" id="{E096D4CA-81E1-B883-DA82-FD47747CA9C7}"/>
+          <p:cNvPr id="3" name="Title 2">
+            <a:extLst>
+              <a:ext uri="{FF2B5EF4-FFF2-40B4-BE49-F238E27FC236}">
+                <a16:creationId xmlns:a16="http://schemas.microsoft.com/office/drawing/2014/main" id="{231AE72D-DA04-B1FA-1BD4-0DC158608572}"/>
               </a:ext>
             </a:extLst>
           </p:cNvPr>
@@ -6327,8 +6873,17 @@
                 <a:effectLst/>
                 <a:latin typeface="Source Sans Pro" panose="020B0503030403020204" pitchFamily="34" charset="0"/>
               </a:rPr>
-              <a:t> Weak instrument test</a:t>
-            </a:r>
+              <a:t>Overidentifying restriction test</a:t>
+            </a:r>
+            <a:br>
+              <a:rPr lang="en-GB" b="1" i="0" u="none" strike="noStrike" dirty="0">
+                <a:solidFill>
+                  <a:srgbClr val="000000"/>
+                </a:solidFill>
+                <a:effectLst/>
+                <a:latin typeface="Source Sans Pro" panose="020B0503030403020204" pitchFamily="34" charset="0"/>
+              </a:rPr>
+            </a:br>
             <a:endParaRPr lang="en-GB" dirty="0"/>
           </a:p>
         </p:txBody>
@@ -6338,7 +6893,7 @@
           <p:cNvPr id="5" name="TextBox 4">
             <a:extLst>
               <a:ext uri="{FF2B5EF4-FFF2-40B4-BE49-F238E27FC236}">
-                <a16:creationId xmlns:a16="http://schemas.microsoft.com/office/drawing/2014/main" id="{DC3EE392-2ACA-3C08-6E7B-6C6B6B66326B}"/>
+                <a16:creationId xmlns:a16="http://schemas.microsoft.com/office/drawing/2014/main" id="{54416761-5DC7-ABA9-10A1-325C4B8E693B}"/>
               </a:ext>
             </a:extLst>
           </p:cNvPr>
@@ -6347,8 +6902,8 @@
         </p:nvSpPr>
         <p:spPr>
           <a:xfrm>
-            <a:off x="736600" y="4699338"/>
-            <a:ext cx="6096000" cy="2031325"/>
+            <a:off x="1092200" y="1823135"/>
+            <a:ext cx="6096000" cy="646331"/>
           </a:xfrm>
           <a:prstGeom prst="rect">
             <a:avLst/>
@@ -6369,19 +6924,40 @@
                 <a:effectLst/>
                 <a:latin typeface="Source Sans Pro" panose="020B0503030403020204" pitchFamily="34" charset="0"/>
               </a:rPr>
-              <a:t>An instrument is considered as weak if it weakly correlates with the instrumental variable Z. To know whether CDs is a weak instrument, we look at the F statistic related to first-stage regression of the TSLS procedure. If the F-statistic is less than 10 (</a:t>
-            </a:r>
-            <a:r>
-              <a:rPr lang="en-GB" b="0" i="0" u="none" strike="noStrike" dirty="0">
-                <a:solidFill>
-                  <a:srgbClr val="75AADB"/>
-                </a:solidFill>
-                <a:effectLst/>
-                <a:latin typeface="Source Sans Pro" panose="020B0503030403020204" pitchFamily="34" charset="0"/>
-                <a:hlinkClick r:id="rId3"/>
-              </a:rPr>
-              <a:t>Staiger &amp; Stock, 1994</a:t>
-            </a:r>
+              <a:t>H0: All instruments are exogenous H1. One of the instrument is endogenous (i.e., related to the error term)</a:t>
+            </a:r>
+            <a:endParaRPr lang="en-GB" dirty="0"/>
+          </a:p>
+        </p:txBody>
+      </p:sp>
+      <p:sp>
+        <p:nvSpPr>
+          <p:cNvPr id="7" name="TextBox 6">
+            <a:extLst>
+              <a:ext uri="{FF2B5EF4-FFF2-40B4-BE49-F238E27FC236}">
+                <a16:creationId xmlns:a16="http://schemas.microsoft.com/office/drawing/2014/main" id="{7191BD04-D057-9653-0810-EA9210B6F515}"/>
+              </a:ext>
+            </a:extLst>
+          </p:cNvPr>
+          <p:cNvSpPr txBox="1"/>
+          <p:nvPr/>
+        </p:nvSpPr>
+        <p:spPr>
+          <a:xfrm>
+            <a:off x="1092200" y="5015547"/>
+            <a:ext cx="6096000" cy="1477328"/>
+          </a:xfrm>
+          <a:prstGeom prst="rect">
+            <a:avLst/>
+          </a:prstGeom>
+          <a:noFill/>
+        </p:spPr>
+        <p:txBody>
+          <a:bodyPr wrap="square">
+            <a:spAutoFit/>
+          </a:bodyPr>
+          <a:lstStyle/>
+          <a:p>
             <a:r>
               <a:rPr lang="en-GB" b="0" i="0" u="none" strike="noStrike" dirty="0">
                 <a:solidFill>
@@ -6390,7 +6966,7 @@
                 <a:effectLst/>
                 <a:latin typeface="Source Sans Pro" panose="020B0503030403020204" pitchFamily="34" charset="0"/>
               </a:rPr>
-              <a:t>), the instrument is weak. In the output, the F-statistic is larger than 10, therefore CDs is not a weak instrument</a:t>
+              <a:t>As we have only one instrument, therefore, this test is not applicable. For one instrument, the value of the J statistic is printed as zero with p-value is equal to 1. For multiple instruments, if the test is not significant (p-value &lt; 0.05), then all instruments are likely to be exogenous.</a:t>
             </a:r>
             <a:endParaRPr lang="en-GB" dirty="0"/>
           </a:p>
@@ -6399,7 +6975,7 @@
     </p:spTree>
     <p:extLst>
       <p:ext uri="{BB962C8B-B14F-4D97-AF65-F5344CB8AC3E}">
-        <p14:creationId xmlns:p14="http://schemas.microsoft.com/office/powerpoint/2010/main" val="212682209"/>
+        <p14:creationId xmlns:p14="http://schemas.microsoft.com/office/powerpoint/2010/main" val="3462105238"/>
       </p:ext>
     </p:extLst>
   </p:cSld>
@@ -6501,47 +7077,6 @@
           </a:p>
         </p:txBody>
       </p:sp>
-      <p:sp>
-        <p:nvSpPr>
-          <p:cNvPr id="3" name="TextBox 2">
-            <a:extLst>
-              <a:ext uri="{FF2B5EF4-FFF2-40B4-BE49-F238E27FC236}">
-                <a16:creationId xmlns:a16="http://schemas.microsoft.com/office/drawing/2014/main" id="{1A41D51D-6D0D-985F-2472-268B9A056F44}"/>
-              </a:ext>
-            </a:extLst>
-          </p:cNvPr>
-          <p:cNvSpPr txBox="1"/>
-          <p:nvPr/>
-        </p:nvSpPr>
-        <p:spPr>
-          <a:xfrm>
-            <a:off x="1077686" y="5711862"/>
-            <a:ext cx="6096000" cy="954107"/>
-          </a:xfrm>
-          <a:prstGeom prst="rect">
-            <a:avLst/>
-          </a:prstGeom>
-          <a:noFill/>
-        </p:spPr>
-        <p:txBody>
-          <a:bodyPr wrap="square">
-            <a:spAutoFit/>
-          </a:bodyPr>
-          <a:lstStyle/>
-          <a:p>
-            <a:r>
-              <a:rPr lang="en-GB" sz="2800" dirty="0">
-                <a:hlinkClick r:id="rId2"/>
-              </a:rPr>
-              <a:t>https://github.com/ahdar1/FIA</a:t>
-            </a:r>
-            <a:endParaRPr lang="en-GB" sz="2800" dirty="0"/>
-          </a:p>
-          <a:p>
-            <a:endParaRPr lang="en-GB" sz="2800" dirty="0"/>
-          </a:p>
-        </p:txBody>
-      </p:sp>
     </p:spTree>
     <p:extLst>
       <p:ext uri="{BB962C8B-B14F-4D97-AF65-F5344CB8AC3E}">
@@ -6556,6 +7091,164 @@
 </file>
 
 <file path=ppt/slides/slide20.xml><?xml version="1.0" encoding="utf-8"?>
+<p:sld xmlns:a="http://schemas.openxmlformats.org/drawingml/2006/main" xmlns:r="http://schemas.openxmlformats.org/officeDocument/2006/relationships" xmlns:p="http://schemas.openxmlformats.org/presentationml/2006/main">
+  <p:cSld>
+    <p:spTree>
+      <p:nvGrpSpPr>
+        <p:cNvPr id="1" name=""/>
+        <p:cNvGrpSpPr/>
+        <p:nvPr/>
+      </p:nvGrpSpPr>
+      <p:grpSpPr>
+        <a:xfrm>
+          <a:off x="0" y="0"/>
+          <a:ext cx="0" cy="0"/>
+          <a:chOff x="0" y="0"/>
+          <a:chExt cx="0" cy="0"/>
+        </a:xfrm>
+      </p:grpSpPr>
+      <p:pic>
+        <p:nvPicPr>
+          <p:cNvPr id="3" name="Picture 2">
+            <a:extLst>
+              <a:ext uri="{FF2B5EF4-FFF2-40B4-BE49-F238E27FC236}">
+                <a16:creationId xmlns:a16="http://schemas.microsoft.com/office/drawing/2014/main" id="{5EB56B0D-C2DC-7B69-FE18-ED3DEF5F3C0C}"/>
+              </a:ext>
+            </a:extLst>
+          </p:cNvPr>
+          <p:cNvPicPr>
+            <a:picLocks noChangeAspect="1"/>
+          </p:cNvPicPr>
+          <p:nvPr/>
+        </p:nvPicPr>
+        <p:blipFill>
+          <a:blip r:embed="rId2"/>
+          <a:stretch>
+            <a:fillRect/>
+          </a:stretch>
+        </p:blipFill>
+        <p:spPr>
+          <a:xfrm>
+            <a:off x="4013200" y="2057153"/>
+            <a:ext cx="7772400" cy="2540493"/>
+          </a:xfrm>
+          <a:prstGeom prst="rect">
+            <a:avLst/>
+          </a:prstGeom>
+        </p:spPr>
+      </p:pic>
+      <p:sp>
+        <p:nvSpPr>
+          <p:cNvPr id="2" name="Title 1">
+            <a:extLst>
+              <a:ext uri="{FF2B5EF4-FFF2-40B4-BE49-F238E27FC236}">
+                <a16:creationId xmlns:a16="http://schemas.microsoft.com/office/drawing/2014/main" id="{E096D4CA-81E1-B883-DA82-FD47747CA9C7}"/>
+              </a:ext>
+            </a:extLst>
+          </p:cNvPr>
+          <p:cNvSpPr>
+            <a:spLocks noGrp="1"/>
+          </p:cNvSpPr>
+          <p:nvPr>
+            <p:ph type="title"/>
+          </p:nvPr>
+        </p:nvSpPr>
+        <p:spPr/>
+        <p:txBody>
+          <a:bodyPr/>
+          <a:lstStyle/>
+          <a:p>
+            <a:r>
+              <a:rPr lang="en-GB" b="1" i="0" u="none" strike="noStrike" dirty="0">
+                <a:solidFill>
+                  <a:srgbClr val="000000"/>
+                </a:solidFill>
+                <a:effectLst/>
+                <a:latin typeface="Source Sans Pro" panose="020B0503030403020204" pitchFamily="34" charset="0"/>
+              </a:rPr>
+              <a:t> Weak instrument test</a:t>
+            </a:r>
+            <a:endParaRPr lang="en-GB" dirty="0"/>
+          </a:p>
+        </p:txBody>
+      </p:sp>
+      <p:sp>
+        <p:nvSpPr>
+          <p:cNvPr id="5" name="TextBox 4">
+            <a:extLst>
+              <a:ext uri="{FF2B5EF4-FFF2-40B4-BE49-F238E27FC236}">
+                <a16:creationId xmlns:a16="http://schemas.microsoft.com/office/drawing/2014/main" id="{DC3EE392-2ACA-3C08-6E7B-6C6B6B66326B}"/>
+              </a:ext>
+            </a:extLst>
+          </p:cNvPr>
+          <p:cNvSpPr txBox="1"/>
+          <p:nvPr/>
+        </p:nvSpPr>
+        <p:spPr>
+          <a:xfrm>
+            <a:off x="736600" y="4699338"/>
+            <a:ext cx="6096000" cy="2031325"/>
+          </a:xfrm>
+          <a:prstGeom prst="rect">
+            <a:avLst/>
+          </a:prstGeom>
+          <a:noFill/>
+        </p:spPr>
+        <p:txBody>
+          <a:bodyPr wrap="square">
+            <a:spAutoFit/>
+          </a:bodyPr>
+          <a:lstStyle/>
+          <a:p>
+            <a:r>
+              <a:rPr lang="en-GB" b="0" i="0" u="none" strike="noStrike" dirty="0">
+                <a:solidFill>
+                  <a:srgbClr val="000000"/>
+                </a:solidFill>
+                <a:effectLst/>
+                <a:latin typeface="Source Sans Pro" panose="020B0503030403020204" pitchFamily="34" charset="0"/>
+              </a:rPr>
+              <a:t>An instrument is considered as weak if it weakly correlates with the instrumental variable Z. To know whether CDs is a weak instrument, we look at the F statistic related to first-stage regression of the TSLS procedure. If the F-statistic is less than 10 (</a:t>
+            </a:r>
+            <a:r>
+              <a:rPr lang="en-GB" b="0" i="0" u="none" strike="noStrike" dirty="0">
+                <a:solidFill>
+                  <a:srgbClr val="75AADB"/>
+                </a:solidFill>
+                <a:effectLst/>
+                <a:latin typeface="Source Sans Pro" panose="020B0503030403020204" pitchFamily="34" charset="0"/>
+                <a:hlinkClick r:id="rId3"/>
+              </a:rPr>
+              <a:t>Staiger &amp; Stock, 1994</a:t>
+            </a:r>
+            <a:r>
+              <a:rPr lang="en-GB" b="0" i="0" u="none" strike="noStrike" dirty="0">
+                <a:solidFill>
+                  <a:srgbClr val="000000"/>
+                </a:solidFill>
+                <a:effectLst/>
+                <a:latin typeface="Source Sans Pro" panose="020B0503030403020204" pitchFamily="34" charset="0"/>
+              </a:rPr>
+              <a:t>), the instrument is weak. In the output, the F-statistic is larger than 10, therefore CDs is not a weak instrument</a:t>
+            </a:r>
+            <a:endParaRPr lang="en-GB" dirty="0"/>
+          </a:p>
+        </p:txBody>
+      </p:sp>
+    </p:spTree>
+    <p:extLst>
+      <p:ext uri="{BB962C8B-B14F-4D97-AF65-F5344CB8AC3E}">
+        <p14:creationId xmlns:p14="http://schemas.microsoft.com/office/powerpoint/2010/main" val="212682209"/>
+      </p:ext>
+    </p:extLst>
+  </p:cSld>
+  <p:clrMapOvr>
+    <a:masterClrMapping/>
+  </p:clrMapOvr>
+</p:sld>
+</file>
+
+<file path=ppt/slides/slide21.xml><?xml version="1.0" encoding="utf-8"?>
 <p:sld xmlns:a="http://schemas.openxmlformats.org/drawingml/2006/main" xmlns:r="http://schemas.openxmlformats.org/officeDocument/2006/relationships" xmlns:p="http://schemas.openxmlformats.org/presentationml/2006/main">
   <p:cSld>
     <p:spTree>
@@ -7297,7 +7990,7 @@
 </p:sld>
 </file>
 
-<file path=ppt/slides/slide21.xml><?xml version="1.0" encoding="utf-8"?>
+<file path=ppt/slides/slide22.xml><?xml version="1.0" encoding="utf-8"?>
 <p:sld xmlns:a="http://schemas.openxmlformats.org/drawingml/2006/main" xmlns:r="http://schemas.openxmlformats.org/officeDocument/2006/relationships" xmlns:p="http://schemas.openxmlformats.org/presentationml/2006/main">
   <p:cSld>
     <p:spTree>
@@ -8270,7 +8963,138 @@
 </p:sld>
 </file>
 
-<file path=ppt/slides/slide22.xml><?xml version="1.0" encoding="utf-8"?>
+<file path=ppt/slides/slide23.xml><?xml version="1.0" encoding="utf-8"?>
+<p:sld xmlns:a="http://schemas.openxmlformats.org/drawingml/2006/main" xmlns:r="http://schemas.openxmlformats.org/officeDocument/2006/relationships" xmlns:p="http://schemas.openxmlformats.org/presentationml/2006/main">
+  <p:cSld>
+    <p:spTree>
+      <p:nvGrpSpPr>
+        <p:cNvPr id="1" name=""/>
+        <p:cNvGrpSpPr/>
+        <p:nvPr/>
+      </p:nvGrpSpPr>
+      <p:grpSpPr>
+        <a:xfrm>
+          <a:off x="0" y="0"/>
+          <a:ext cx="0" cy="0"/>
+          <a:chOff x="0" y="0"/>
+          <a:chExt cx="0" cy="0"/>
+        </a:xfrm>
+      </p:grpSpPr>
+      <p:sp>
+        <p:nvSpPr>
+          <p:cNvPr id="2" name="Title 1">
+            <a:extLst>
+              <a:ext uri="{FF2B5EF4-FFF2-40B4-BE49-F238E27FC236}">
+                <a16:creationId xmlns:a16="http://schemas.microsoft.com/office/drawing/2014/main" id="{DC0FE2E0-4499-A9F5-A67C-16D6E61A480B}"/>
+              </a:ext>
+            </a:extLst>
+          </p:cNvPr>
+          <p:cNvSpPr>
+            <a:spLocks noGrp="1"/>
+          </p:cNvSpPr>
+          <p:nvPr>
+            <p:ph type="title"/>
+          </p:nvPr>
+        </p:nvSpPr>
+        <p:spPr/>
+        <p:txBody>
+          <a:bodyPr/>
+          <a:lstStyle/>
+          <a:p>
+            <a:r>
+              <a:rPr lang="en-GB" dirty="0"/>
+              <a:t>Exercise</a:t>
+            </a:r>
+          </a:p>
+        </p:txBody>
+      </p:sp>
+      <p:sp>
+        <p:nvSpPr>
+          <p:cNvPr id="3" name="Content Placeholder 2">
+            <a:extLst>
+              <a:ext uri="{FF2B5EF4-FFF2-40B4-BE49-F238E27FC236}">
+                <a16:creationId xmlns:a16="http://schemas.microsoft.com/office/drawing/2014/main" id="{7DD30527-AAE8-E285-45B2-52940AC42AC9}"/>
+              </a:ext>
+            </a:extLst>
+          </p:cNvPr>
+          <p:cNvSpPr>
+            <a:spLocks noGrp="1"/>
+          </p:cNvSpPr>
+          <p:nvPr>
+            <p:ph idx="1"/>
+          </p:nvPr>
+        </p:nvSpPr>
+        <p:spPr/>
+        <p:txBody>
+          <a:bodyPr/>
+          <a:lstStyle/>
+          <a:p>
+            <a:r>
+              <a:rPr lang="en-GB" dirty="0"/>
+              <a:t>Use </a:t>
+            </a:r>
+            <a:r>
+              <a:rPr lang="en-GB" dirty="0" err="1"/>
+              <a:t>Mroz.sav</a:t>
+            </a:r>
+            <a:endParaRPr lang="en-GB" dirty="0"/>
+          </a:p>
+          <a:p>
+            <a:r>
+              <a:rPr lang="en-GB" dirty="0"/>
+              <a:t>Predict </a:t>
+            </a:r>
+            <a:r>
+              <a:rPr lang="en-GB" dirty="0" err="1"/>
+              <a:t>Lwage</a:t>
+            </a:r>
+            <a:r>
+              <a:rPr lang="en-GB" dirty="0"/>
+              <a:t> from Educ.</a:t>
+            </a:r>
+          </a:p>
+          <a:p>
+            <a:r>
+              <a:rPr lang="en-GB" dirty="0"/>
+              <a:t>Use </a:t>
+            </a:r>
+            <a:r>
+              <a:rPr lang="en-GB" dirty="0" err="1"/>
+              <a:t>Fatheduc</a:t>
+            </a:r>
+            <a:r>
+              <a:rPr lang="en-GB" dirty="0"/>
+              <a:t> as an instrument</a:t>
+            </a:r>
+          </a:p>
+          <a:p>
+            <a:r>
+              <a:rPr lang="en-GB" dirty="0"/>
+              <a:t>Draw the relationship in a diagram</a:t>
+            </a:r>
+          </a:p>
+          <a:p>
+            <a:r>
+              <a:rPr lang="en-GB" dirty="0"/>
+              <a:t>Inspect your result</a:t>
+            </a:r>
+          </a:p>
+        </p:txBody>
+      </p:sp>
+    </p:spTree>
+    <p:extLst>
+      <p:ext uri="{BB962C8B-B14F-4D97-AF65-F5344CB8AC3E}">
+        <p14:creationId xmlns:p14="http://schemas.microsoft.com/office/powerpoint/2010/main" val="3053267717"/>
+      </p:ext>
+    </p:extLst>
+  </p:cSld>
+  <p:clrMapOvr>
+    <a:masterClrMapping/>
+  </p:clrMapOvr>
+</p:sld>
+</file>
+
+<file path=ppt/slides/slide24.xml><?xml version="1.0" encoding="utf-8"?>
 <p:sld xmlns:a="http://schemas.openxmlformats.org/drawingml/2006/main" xmlns:r="http://schemas.openxmlformats.org/officeDocument/2006/relationships" xmlns:p="http://schemas.openxmlformats.org/presentationml/2006/main">
   <p:cSld>
     <p:spTree>
@@ -8460,7 +9284,7 @@
           <p:cNvPr id="2" name="Title 1">
             <a:extLst>
               <a:ext uri="{FF2B5EF4-FFF2-40B4-BE49-F238E27FC236}">
-                <a16:creationId xmlns:a16="http://schemas.microsoft.com/office/drawing/2014/main" id="{0A70B3C2-29CC-C91A-5D86-1EF239FB97E9}"/>
+                <a16:creationId xmlns:a16="http://schemas.microsoft.com/office/drawing/2014/main" id="{4E192365-EBA3-DCCE-1D55-A3F74708DDF5}"/>
               </a:ext>
             </a:extLst>
           </p:cNvPr>
@@ -8477,12 +9301,8 @@
           <a:lstStyle/>
           <a:p>
             <a:r>
-              <a:rPr lang="en-GB" dirty="0">
-                <a:solidFill>
-                  <a:srgbClr val="FF0000"/>
-                </a:solidFill>
-              </a:rPr>
-              <a:t>Learning Objectives</a:t>
+              <a:rPr lang="en-GB" dirty="0"/>
+              <a:t>To start</a:t>
             </a:r>
           </a:p>
         </p:txBody>
@@ -8492,7 +9312,7 @@
           <p:cNvPr id="3" name="Content Placeholder 2">
             <a:extLst>
               <a:ext uri="{FF2B5EF4-FFF2-40B4-BE49-F238E27FC236}">
-                <a16:creationId xmlns:a16="http://schemas.microsoft.com/office/drawing/2014/main" id="{5D19418C-7952-3130-F386-7FFECDC03060}"/>
+                <a16:creationId xmlns:a16="http://schemas.microsoft.com/office/drawing/2014/main" id="{79B78040-2BB7-69A9-AEC4-1F5B9936AE8A}"/>
               </a:ext>
             </a:extLst>
           </p:cNvPr>
@@ -8510,35 +9330,68 @@
           <a:p>
             <a:r>
               <a:rPr lang="en-GB" dirty="0"/>
-              <a:t>Understand the concept of endogeneity</a:t>
-            </a:r>
-          </a:p>
-          <a:p>
-            <a:pPr marL="0" indent="0">
-              <a:buNone/>
-            </a:pPr>
+              <a:t>Click</a:t>
+            </a:r>
+          </a:p>
+          <a:p>
             <a:endParaRPr lang="en-GB" dirty="0"/>
           </a:p>
           <a:p>
             <a:r>
               <a:rPr lang="en-GB" dirty="0"/>
-              <a:t>Able to use </a:t>
-            </a:r>
-            <a:r>
-              <a:rPr lang="en-GB" dirty="0" err="1"/>
-              <a:t>EndoS</a:t>
-            </a:r>
-            <a:r>
-              <a:rPr lang="en-GB" dirty="0"/>
-              <a:t> macro to address an endogeneity problem</a:t>
-            </a:r>
+              <a:t>Download SPSS macros, datasets, these slides, pdf articles.</a:t>
+            </a:r>
+          </a:p>
+          <a:p>
+            <a:endParaRPr lang="en-GB" dirty="0"/>
+          </a:p>
+        </p:txBody>
+      </p:sp>
+      <p:sp>
+        <p:nvSpPr>
+          <p:cNvPr id="5" name="TextBox 4">
+            <a:extLst>
+              <a:ext uri="{FF2B5EF4-FFF2-40B4-BE49-F238E27FC236}">
+                <a16:creationId xmlns:a16="http://schemas.microsoft.com/office/drawing/2014/main" id="{DBB4753E-11EA-790E-1D88-F2F8B69007AE}"/>
+              </a:ext>
+            </a:extLst>
+          </p:cNvPr>
+          <p:cNvSpPr txBox="1"/>
+          <p:nvPr/>
+        </p:nvSpPr>
+        <p:spPr>
+          <a:xfrm>
+            <a:off x="2122715" y="1825625"/>
+            <a:ext cx="6096000" cy="954107"/>
+          </a:xfrm>
+          <a:prstGeom prst="rect">
+            <a:avLst/>
+          </a:prstGeom>
+          <a:noFill/>
+        </p:spPr>
+        <p:txBody>
+          <a:bodyPr wrap="square">
+            <a:spAutoFit/>
+          </a:bodyPr>
+          <a:lstStyle/>
+          <a:p>
+            <a:r>
+              <a:rPr lang="en-GB" sz="2800" dirty="0">
+                <a:hlinkClick r:id="rId2"/>
+              </a:rPr>
+              <a:t>https://github.com/ahdar1/FIA</a:t>
+            </a:r>
+            <a:endParaRPr lang="en-GB" sz="2800" dirty="0"/>
+          </a:p>
+          <a:p>
+            <a:endParaRPr lang="en-GB" sz="2800" dirty="0"/>
           </a:p>
         </p:txBody>
       </p:sp>
     </p:spTree>
     <p:extLst>
       <p:ext uri="{BB962C8B-B14F-4D97-AF65-F5344CB8AC3E}">
-        <p14:creationId xmlns:p14="http://schemas.microsoft.com/office/powerpoint/2010/main" val="1548693173"/>
+        <p14:creationId xmlns:p14="http://schemas.microsoft.com/office/powerpoint/2010/main" val="2718271772"/>
       </p:ext>
     </p:extLst>
   </p:cSld>
@@ -8570,7 +9423,7 @@
           <p:cNvPr id="2" name="Title 1">
             <a:extLst>
               <a:ext uri="{FF2B5EF4-FFF2-40B4-BE49-F238E27FC236}">
-                <a16:creationId xmlns:a16="http://schemas.microsoft.com/office/drawing/2014/main" id="{5D2F5670-36AF-98B4-1152-1055D4A55A5D}"/>
+                <a16:creationId xmlns:a16="http://schemas.microsoft.com/office/drawing/2014/main" id="{0A70B3C2-29CC-C91A-5D86-1EF239FB97E9}"/>
               </a:ext>
             </a:extLst>
           </p:cNvPr>
@@ -8587,8 +9440,12 @@
           <a:lstStyle/>
           <a:p>
             <a:r>
-              <a:rPr lang="en-GB" dirty="0"/>
-              <a:t>What Is Endogeneity?</a:t>
+              <a:rPr lang="en-GB" dirty="0">
+                <a:solidFill>
+                  <a:srgbClr val="FF0000"/>
+                </a:solidFill>
+              </a:rPr>
+              <a:t>Learning Objectives</a:t>
             </a:r>
           </a:p>
         </p:txBody>
@@ -8598,7 +9455,7 @@
           <p:cNvPr id="3" name="Content Placeholder 2">
             <a:extLst>
               <a:ext uri="{FF2B5EF4-FFF2-40B4-BE49-F238E27FC236}">
-                <a16:creationId xmlns:a16="http://schemas.microsoft.com/office/drawing/2014/main" id="{9265C932-5597-9BA5-4F33-3E1E41CD7F52}"/>
+                <a16:creationId xmlns:a16="http://schemas.microsoft.com/office/drawing/2014/main" id="{5D19418C-7952-3130-F386-7FFECDC03060}"/>
               </a:ext>
             </a:extLst>
           </p:cNvPr>
@@ -8616,80 +9473,35 @@
           <a:p>
             <a:r>
               <a:rPr lang="en-GB" dirty="0"/>
-              <a:t>Consider this modelling situation:</a:t>
-            </a:r>
-          </a:p>
-          <a:p>
-            <a:r>
-              <a:rPr lang="en-GB" b="0" i="0" u="none" strike="noStrike" dirty="0">
-                <a:solidFill>
-                  <a:srgbClr val="000000"/>
-                </a:solidFill>
-                <a:effectLst/>
-                <a:latin typeface="Source Sans Pro" panose="020B0503030403020204" pitchFamily="34" charset="0"/>
-              </a:rPr>
-              <a:t>I want to examine the influence of the background music in a barbershop on customers’ revisit intentions to their first-time visit barbershop.</a:t>
-            </a:r>
-          </a:p>
-          <a:p>
-            <a:r>
-              <a:rPr lang="en-GB" b="0" i="0" u="none" strike="noStrike" dirty="0">
-                <a:solidFill>
-                  <a:srgbClr val="000000"/>
-                </a:solidFill>
-                <a:effectLst/>
-                <a:latin typeface="Source Sans Pro" panose="020B0503030403020204" pitchFamily="34" charset="0"/>
-              </a:rPr>
-              <a:t>Item to measure revisit intention: Will you visit the same barbershop in the future? (1 = very unlikely, 5 = highly likely). </a:t>
-            </a:r>
-          </a:p>
-          <a:p>
-            <a:r>
-              <a:rPr lang="en-GB" dirty="0">
-                <a:solidFill>
-                  <a:srgbClr val="000000"/>
-                </a:solidFill>
-                <a:latin typeface="Source Sans Pro" panose="020B0503030403020204" pitchFamily="34" charset="0"/>
-              </a:rPr>
-              <a:t>Item to measure </a:t>
-            </a:r>
-            <a:r>
-              <a:rPr lang="en-GB" b="0" i="0" u="none" strike="noStrike" dirty="0">
-                <a:solidFill>
-                  <a:srgbClr val="000000"/>
-                </a:solidFill>
-                <a:effectLst/>
-                <a:latin typeface="Source Sans Pro" panose="020B0503030403020204" pitchFamily="34" charset="0"/>
-              </a:rPr>
-              <a:t>customers’ attitude toward the background music: How do you lik</a:t>
-            </a:r>
-            <a:r>
-              <a:rPr lang="en-GB" dirty="0">
-                <a:solidFill>
-                  <a:srgbClr val="000000"/>
-                </a:solidFill>
-                <a:latin typeface="Source Sans Pro" panose="020B0503030403020204" pitchFamily="34" charset="0"/>
-              </a:rPr>
-              <a:t>e the background music played in the barbershop?</a:t>
-            </a:r>
-            <a:r>
-              <a:rPr lang="en-GB" b="0" i="0" u="none" strike="noStrike" dirty="0">
-                <a:solidFill>
-                  <a:srgbClr val="000000"/>
-                </a:solidFill>
-                <a:effectLst/>
-                <a:latin typeface="Source Sans Pro" panose="020B0503030403020204" pitchFamily="34" charset="0"/>
-              </a:rPr>
-              <a:t> (1 = extremely dislike; 7 = like it very much). </a:t>
-            </a:r>
+              <a:t>Understand the concept of endogeneity</a:t>
+            </a:r>
+          </a:p>
+          <a:p>
+            <a:pPr marL="0" indent="0">
+              <a:buNone/>
+            </a:pPr>
             <a:endParaRPr lang="en-GB" dirty="0"/>
+          </a:p>
+          <a:p>
+            <a:r>
+              <a:rPr lang="en-GB" dirty="0"/>
+              <a:t>Able to use </a:t>
+            </a:r>
+            <a:r>
+              <a:rPr lang="en-GB" dirty="0" err="1"/>
+              <a:t>EndoS</a:t>
+            </a:r>
+            <a:r>
+              <a:rPr lang="en-GB" dirty="0"/>
+              <a:t> macro to address an endogeneity problem</a:t>
+            </a:r>
           </a:p>
         </p:txBody>
       </p:sp>
     </p:spTree>
     <p:extLst>
       <p:ext uri="{BB962C8B-B14F-4D97-AF65-F5344CB8AC3E}">
-        <p14:creationId xmlns:p14="http://schemas.microsoft.com/office/powerpoint/2010/main" val="3440443713"/>
+        <p14:creationId xmlns:p14="http://schemas.microsoft.com/office/powerpoint/2010/main" val="1548693173"/>
       </p:ext>
     </p:extLst>
   </p:cSld>
@@ -8716,222 +9528,131 @@
           <a:chExt cx="0" cy="0"/>
         </a:xfrm>
       </p:grpSpPr>
-      <p:pic>
-        <p:nvPicPr>
-          <p:cNvPr id="10" name="Picture 9">
-            <a:extLst>
-              <a:ext uri="{FF2B5EF4-FFF2-40B4-BE49-F238E27FC236}">
-                <a16:creationId xmlns:a16="http://schemas.microsoft.com/office/drawing/2014/main" id="{24F9C827-A770-9AB5-8926-E50DC14AAE5A}"/>
-              </a:ext>
-            </a:extLst>
-          </p:cNvPr>
-          <p:cNvPicPr>
-            <a:picLocks noChangeAspect="1"/>
-          </p:cNvPicPr>
-          <p:nvPr/>
-        </p:nvPicPr>
-        <p:blipFill>
-          <a:blip r:embed="rId2"/>
-          <a:stretch>
-            <a:fillRect/>
-          </a:stretch>
-        </p:blipFill>
-        <p:spPr>
-          <a:xfrm>
-            <a:off x="2921000" y="1542455"/>
-            <a:ext cx="3759200" cy="571500"/>
-          </a:xfrm>
-          <a:prstGeom prst="rect">
-            <a:avLst/>
-          </a:prstGeom>
-        </p:spPr>
-      </p:pic>
-      <p:sp>
-        <p:nvSpPr>
-          <p:cNvPr id="11" name="TextBox 10">
-            <a:extLst>
-              <a:ext uri="{FF2B5EF4-FFF2-40B4-BE49-F238E27FC236}">
-                <a16:creationId xmlns:a16="http://schemas.microsoft.com/office/drawing/2014/main" id="{1B9A8D3A-5F47-00BB-3617-0EC2EE536284}"/>
-              </a:ext>
-            </a:extLst>
-          </p:cNvPr>
-          <p:cNvSpPr txBox="1"/>
-          <p:nvPr/>
-        </p:nvSpPr>
-        <p:spPr>
-          <a:xfrm>
-            <a:off x="1358900" y="812800"/>
-            <a:ext cx="6578600" cy="461665"/>
-          </a:xfrm>
-          <a:prstGeom prst="rect">
-            <a:avLst/>
-          </a:prstGeom>
-          <a:noFill/>
-        </p:spPr>
-        <p:txBody>
-          <a:bodyPr wrap="square" rtlCol="0">
-            <a:spAutoFit/>
-          </a:bodyPr>
+      <p:sp>
+        <p:nvSpPr>
+          <p:cNvPr id="2" name="Title 1">
+            <a:extLst>
+              <a:ext uri="{FF2B5EF4-FFF2-40B4-BE49-F238E27FC236}">
+                <a16:creationId xmlns:a16="http://schemas.microsoft.com/office/drawing/2014/main" id="{5D2F5670-36AF-98B4-1152-1055D4A55A5D}"/>
+              </a:ext>
+            </a:extLst>
+          </p:cNvPr>
+          <p:cNvSpPr>
+            <a:spLocks noGrp="1"/>
+          </p:cNvSpPr>
+          <p:nvPr>
+            <p:ph type="title"/>
+          </p:nvPr>
+        </p:nvSpPr>
+        <p:spPr/>
+        <p:txBody>
+          <a:bodyPr/>
           <a:lstStyle/>
           <a:p>
             <a:r>
-              <a:rPr lang="en-GB" sz="2400" dirty="0"/>
-              <a:t>I come up with the following simple linear model</a:t>
-            </a:r>
-          </a:p>
-        </p:txBody>
-      </p:sp>
-      <p:pic>
-        <p:nvPicPr>
-          <p:cNvPr id="12" name="Picture 11">
-            <a:extLst>
-              <a:ext uri="{FF2B5EF4-FFF2-40B4-BE49-F238E27FC236}">
-                <a16:creationId xmlns:a16="http://schemas.microsoft.com/office/drawing/2014/main" id="{34700D0D-28C0-35A6-A660-D8D742A279A1}"/>
-              </a:ext>
-            </a:extLst>
-          </p:cNvPr>
-          <p:cNvPicPr>
-            <a:picLocks noChangeAspect="1"/>
-          </p:cNvPicPr>
-          <p:nvPr/>
-        </p:nvPicPr>
-        <p:blipFill>
-          <a:blip r:embed="rId3"/>
-          <a:stretch>
-            <a:fillRect/>
-          </a:stretch>
-        </p:blipFill>
-        <p:spPr>
-          <a:xfrm>
-            <a:off x="2819400" y="2959100"/>
-            <a:ext cx="5118100" cy="482600"/>
-          </a:xfrm>
-          <a:prstGeom prst="rect">
-            <a:avLst/>
-          </a:prstGeom>
-        </p:spPr>
-      </p:pic>
-      <p:sp>
-        <p:nvSpPr>
-          <p:cNvPr id="13" name="TextBox 12">
-            <a:extLst>
-              <a:ext uri="{FF2B5EF4-FFF2-40B4-BE49-F238E27FC236}">
-                <a16:creationId xmlns:a16="http://schemas.microsoft.com/office/drawing/2014/main" id="{5E283726-0880-FA95-1AA7-DA2432FE3BF1}"/>
-              </a:ext>
-            </a:extLst>
-          </p:cNvPr>
-          <p:cNvSpPr txBox="1"/>
-          <p:nvPr/>
-        </p:nvSpPr>
-        <p:spPr>
-          <a:xfrm>
-            <a:off x="1193800" y="2360315"/>
-            <a:ext cx="6578600" cy="461665"/>
-          </a:xfrm>
-          <a:prstGeom prst="rect">
-            <a:avLst/>
-          </a:prstGeom>
-          <a:noFill/>
-        </p:spPr>
-        <p:txBody>
-          <a:bodyPr wrap="square" rtlCol="0">
-            <a:spAutoFit/>
-          </a:bodyPr>
+              <a:rPr lang="en-GB" dirty="0"/>
+              <a:t>What Is Endogeneity?</a:t>
+            </a:r>
+          </a:p>
+        </p:txBody>
+      </p:sp>
+      <p:sp>
+        <p:nvSpPr>
+          <p:cNvPr id="3" name="Content Placeholder 2">
+            <a:extLst>
+              <a:ext uri="{FF2B5EF4-FFF2-40B4-BE49-F238E27FC236}">
+                <a16:creationId xmlns:a16="http://schemas.microsoft.com/office/drawing/2014/main" id="{9265C932-5597-9BA5-4F33-3E1E41CD7F52}"/>
+              </a:ext>
+            </a:extLst>
+          </p:cNvPr>
+          <p:cNvSpPr>
+            <a:spLocks noGrp="1"/>
+          </p:cNvSpPr>
+          <p:nvPr>
+            <p:ph idx="1"/>
+          </p:nvPr>
+        </p:nvSpPr>
+        <p:spPr/>
+        <p:txBody>
+          <a:bodyPr/>
           <a:lstStyle/>
           <a:p>
             <a:r>
-              <a:rPr lang="en-GB" sz="2400" dirty="0"/>
-              <a:t>However, the true model is: </a:t>
-            </a:r>
-          </a:p>
-        </p:txBody>
-      </p:sp>
-      <p:sp>
-        <p:nvSpPr>
-          <p:cNvPr id="14" name="TextBox 13">
-            <a:extLst>
-              <a:ext uri="{FF2B5EF4-FFF2-40B4-BE49-F238E27FC236}">
-                <a16:creationId xmlns:a16="http://schemas.microsoft.com/office/drawing/2014/main" id="{739DF835-3FA3-817A-9623-64FF210597DC}"/>
-              </a:ext>
-            </a:extLst>
-          </p:cNvPr>
-          <p:cNvSpPr txBox="1"/>
-          <p:nvPr/>
-        </p:nvSpPr>
-        <p:spPr>
-          <a:xfrm>
-            <a:off x="914400" y="3675618"/>
-            <a:ext cx="11036300" cy="830997"/>
-          </a:xfrm>
-          <a:prstGeom prst="rect">
-            <a:avLst/>
-          </a:prstGeom>
-          <a:noFill/>
-        </p:spPr>
-        <p:txBody>
-          <a:bodyPr wrap="square" rtlCol="0">
-            <a:spAutoFit/>
-          </a:bodyPr>
-          <a:lstStyle/>
-          <a:p>
-            <a:r>
-              <a:rPr lang="en-GB" sz="2400" dirty="0"/>
-              <a:t>Where BARBER = How do you like the barber </a:t>
-            </a:r>
-          </a:p>
-          <a:p>
-            <a:r>
-              <a:rPr lang="en-GB" sz="2400" dirty="0"/>
-              <a:t>(1 = extremely dislike, 7= like very much</a:t>
-            </a:r>
-          </a:p>
-        </p:txBody>
-      </p:sp>
-      <p:sp>
-        <p:nvSpPr>
-          <p:cNvPr id="15" name="TextBox 14">
-            <a:extLst>
-              <a:ext uri="{FF2B5EF4-FFF2-40B4-BE49-F238E27FC236}">
-                <a16:creationId xmlns:a16="http://schemas.microsoft.com/office/drawing/2014/main" id="{1EE00A6A-8AF2-A757-BD75-A49735A39F7E}"/>
-              </a:ext>
-            </a:extLst>
-          </p:cNvPr>
-          <p:cNvSpPr txBox="1"/>
-          <p:nvPr/>
-        </p:nvSpPr>
-        <p:spPr>
-          <a:xfrm>
-            <a:off x="1079500" y="5016500"/>
-            <a:ext cx="9740900" cy="923330"/>
-          </a:xfrm>
-          <a:prstGeom prst="rect">
-            <a:avLst/>
-          </a:prstGeom>
-          <a:noFill/>
-        </p:spPr>
-        <p:txBody>
-          <a:bodyPr wrap="square" rtlCol="0">
-            <a:spAutoFit/>
-          </a:bodyPr>
-          <a:lstStyle/>
-          <a:p>
-            <a:r>
               <a:rPr lang="en-GB" dirty="0"/>
-              <a:t>Because BARBER and MUSIC may be correlated, </a:t>
-            </a:r>
-          </a:p>
-          <a:p>
-            <a:r>
-              <a:rPr lang="en-GB" dirty="0"/>
-              <a:t>omitting BARBER from the first model will lead to a biased in the coefficient estimate for MUSIC (endogeneity problem)</a:t>
-            </a:r>
+              <a:t>Consider this modelling situation:</a:t>
+            </a:r>
+          </a:p>
+          <a:p>
+            <a:r>
+              <a:rPr lang="en-GB" b="0" i="0" u="none" strike="noStrike" dirty="0">
+                <a:solidFill>
+                  <a:srgbClr val="000000"/>
+                </a:solidFill>
+                <a:effectLst/>
+                <a:latin typeface="Source Sans Pro" panose="020B0503030403020204" pitchFamily="34" charset="0"/>
+              </a:rPr>
+              <a:t>I want to examine the influence of the background music in a barbershop on customers’ revisit intentions to their first-time visit barbershop.</a:t>
+            </a:r>
+          </a:p>
+          <a:p>
+            <a:r>
+              <a:rPr lang="en-GB" b="0" i="0" u="none" strike="noStrike" dirty="0">
+                <a:solidFill>
+                  <a:srgbClr val="000000"/>
+                </a:solidFill>
+                <a:effectLst/>
+                <a:latin typeface="Source Sans Pro" panose="020B0503030403020204" pitchFamily="34" charset="0"/>
+              </a:rPr>
+              <a:t>Item to measure revisit intention: Will you visit the same barbershop in the future? (1 = very unlikely, 5 = highly likely). </a:t>
+            </a:r>
+          </a:p>
+          <a:p>
+            <a:r>
+              <a:rPr lang="en-GB" dirty="0">
+                <a:solidFill>
+                  <a:srgbClr val="000000"/>
+                </a:solidFill>
+                <a:latin typeface="Source Sans Pro" panose="020B0503030403020204" pitchFamily="34" charset="0"/>
+              </a:rPr>
+              <a:t>Item to measure </a:t>
+            </a:r>
+            <a:r>
+              <a:rPr lang="en-GB" b="0" i="0" u="none" strike="noStrike" dirty="0">
+                <a:solidFill>
+                  <a:srgbClr val="000000"/>
+                </a:solidFill>
+                <a:effectLst/>
+                <a:latin typeface="Source Sans Pro" panose="020B0503030403020204" pitchFamily="34" charset="0"/>
+              </a:rPr>
+              <a:t>customers’ attitude toward the background music: How do you lik</a:t>
+            </a:r>
+            <a:r>
+              <a:rPr lang="en-GB" dirty="0">
+                <a:solidFill>
+                  <a:srgbClr val="000000"/>
+                </a:solidFill>
+                <a:latin typeface="Source Sans Pro" panose="020B0503030403020204" pitchFamily="34" charset="0"/>
+              </a:rPr>
+              <a:t>e the background music played in the barbershop?</a:t>
+            </a:r>
+            <a:r>
+              <a:rPr lang="en-GB" b="0" i="0" u="none" strike="noStrike" dirty="0">
+                <a:solidFill>
+                  <a:srgbClr val="000000"/>
+                </a:solidFill>
+                <a:effectLst/>
+                <a:latin typeface="Source Sans Pro" panose="020B0503030403020204" pitchFamily="34" charset="0"/>
+              </a:rPr>
+              <a:t> (1 = extremely dislike; 7 = like it very much). </a:t>
+            </a:r>
+            <a:endParaRPr lang="en-GB" dirty="0"/>
           </a:p>
         </p:txBody>
       </p:sp>
     </p:spTree>
     <p:extLst>
       <p:ext uri="{BB962C8B-B14F-4D97-AF65-F5344CB8AC3E}">
-        <p14:creationId xmlns:p14="http://schemas.microsoft.com/office/powerpoint/2010/main" val="1505892709"/>
+        <p14:creationId xmlns:p14="http://schemas.microsoft.com/office/powerpoint/2010/main" val="3440443713"/>
       </p:ext>
     </p:extLst>
   </p:cSld>
@@ -8958,105 +9679,222 @@
           <a:chExt cx="0" cy="0"/>
         </a:xfrm>
       </p:grpSpPr>
-      <p:sp>
-        <p:nvSpPr>
-          <p:cNvPr id="4" name="Title 3">
-            <a:extLst>
-              <a:ext uri="{FF2B5EF4-FFF2-40B4-BE49-F238E27FC236}">
-                <a16:creationId xmlns:a16="http://schemas.microsoft.com/office/drawing/2014/main" id="{F9996468-F3EB-2B1E-52C1-308FC0551E2B}"/>
-              </a:ext>
-            </a:extLst>
-          </p:cNvPr>
-          <p:cNvSpPr>
-            <a:spLocks noGrp="1"/>
-          </p:cNvSpPr>
-          <p:nvPr>
-            <p:ph type="title"/>
-          </p:nvPr>
-        </p:nvSpPr>
-        <p:spPr/>
-        <p:txBody>
-          <a:bodyPr/>
+      <p:pic>
+        <p:nvPicPr>
+          <p:cNvPr id="10" name="Picture 9">
+            <a:extLst>
+              <a:ext uri="{FF2B5EF4-FFF2-40B4-BE49-F238E27FC236}">
+                <a16:creationId xmlns:a16="http://schemas.microsoft.com/office/drawing/2014/main" id="{24F9C827-A770-9AB5-8926-E50DC14AAE5A}"/>
+              </a:ext>
+            </a:extLst>
+          </p:cNvPr>
+          <p:cNvPicPr>
+            <a:picLocks noChangeAspect="1"/>
+          </p:cNvPicPr>
+          <p:nvPr/>
+        </p:nvPicPr>
+        <p:blipFill>
+          <a:blip r:embed="rId2"/>
+          <a:stretch>
+            <a:fillRect/>
+          </a:stretch>
+        </p:blipFill>
+        <p:spPr>
+          <a:xfrm>
+            <a:off x="2921000" y="1542455"/>
+            <a:ext cx="3759200" cy="571500"/>
+          </a:xfrm>
+          <a:prstGeom prst="rect">
+            <a:avLst/>
+          </a:prstGeom>
+        </p:spPr>
+      </p:pic>
+      <p:sp>
+        <p:nvSpPr>
+          <p:cNvPr id="11" name="TextBox 10">
+            <a:extLst>
+              <a:ext uri="{FF2B5EF4-FFF2-40B4-BE49-F238E27FC236}">
+                <a16:creationId xmlns:a16="http://schemas.microsoft.com/office/drawing/2014/main" id="{1B9A8D3A-5F47-00BB-3617-0EC2EE536284}"/>
+              </a:ext>
+            </a:extLst>
+          </p:cNvPr>
+          <p:cNvSpPr txBox="1"/>
+          <p:nvPr/>
+        </p:nvSpPr>
+        <p:spPr>
+          <a:xfrm>
+            <a:off x="1358900" y="812800"/>
+            <a:ext cx="6578600" cy="461665"/>
+          </a:xfrm>
+          <a:prstGeom prst="rect">
+            <a:avLst/>
+          </a:prstGeom>
+          <a:noFill/>
+        </p:spPr>
+        <p:txBody>
+          <a:bodyPr wrap="square" rtlCol="0">
+            <a:spAutoFit/>
+          </a:bodyPr>
           <a:lstStyle/>
           <a:p>
             <a:r>
+              <a:rPr lang="en-GB" sz="2400" dirty="0"/>
+              <a:t>I come up with the following simple linear model</a:t>
+            </a:r>
+          </a:p>
+        </p:txBody>
+      </p:sp>
+      <p:pic>
+        <p:nvPicPr>
+          <p:cNvPr id="12" name="Picture 11">
+            <a:extLst>
+              <a:ext uri="{FF2B5EF4-FFF2-40B4-BE49-F238E27FC236}">
+                <a16:creationId xmlns:a16="http://schemas.microsoft.com/office/drawing/2014/main" id="{34700D0D-28C0-35A6-A660-D8D742A279A1}"/>
+              </a:ext>
+            </a:extLst>
+          </p:cNvPr>
+          <p:cNvPicPr>
+            <a:picLocks noChangeAspect="1"/>
+          </p:cNvPicPr>
+          <p:nvPr/>
+        </p:nvPicPr>
+        <p:blipFill>
+          <a:blip r:embed="rId3"/>
+          <a:stretch>
+            <a:fillRect/>
+          </a:stretch>
+        </p:blipFill>
+        <p:spPr>
+          <a:xfrm>
+            <a:off x="2819400" y="2959100"/>
+            <a:ext cx="5118100" cy="482600"/>
+          </a:xfrm>
+          <a:prstGeom prst="rect">
+            <a:avLst/>
+          </a:prstGeom>
+        </p:spPr>
+      </p:pic>
+      <p:sp>
+        <p:nvSpPr>
+          <p:cNvPr id="13" name="TextBox 12">
+            <a:extLst>
+              <a:ext uri="{FF2B5EF4-FFF2-40B4-BE49-F238E27FC236}">
+                <a16:creationId xmlns:a16="http://schemas.microsoft.com/office/drawing/2014/main" id="{5E283726-0880-FA95-1AA7-DA2432FE3BF1}"/>
+              </a:ext>
+            </a:extLst>
+          </p:cNvPr>
+          <p:cNvSpPr txBox="1"/>
+          <p:nvPr/>
+        </p:nvSpPr>
+        <p:spPr>
+          <a:xfrm>
+            <a:off x="1193800" y="2360315"/>
+            <a:ext cx="6578600" cy="461665"/>
+          </a:xfrm>
+          <a:prstGeom prst="rect">
+            <a:avLst/>
+          </a:prstGeom>
+          <a:noFill/>
+        </p:spPr>
+        <p:txBody>
+          <a:bodyPr wrap="square" rtlCol="0">
+            <a:spAutoFit/>
+          </a:bodyPr>
+          <a:lstStyle/>
+          <a:p>
+            <a:r>
+              <a:rPr lang="en-GB" sz="2400" dirty="0"/>
+              <a:t>However, the true model is: </a:t>
+            </a:r>
+          </a:p>
+        </p:txBody>
+      </p:sp>
+      <p:sp>
+        <p:nvSpPr>
+          <p:cNvPr id="14" name="TextBox 13">
+            <a:extLst>
+              <a:ext uri="{FF2B5EF4-FFF2-40B4-BE49-F238E27FC236}">
+                <a16:creationId xmlns:a16="http://schemas.microsoft.com/office/drawing/2014/main" id="{739DF835-3FA3-817A-9623-64FF210597DC}"/>
+              </a:ext>
+            </a:extLst>
+          </p:cNvPr>
+          <p:cNvSpPr txBox="1"/>
+          <p:nvPr/>
+        </p:nvSpPr>
+        <p:spPr>
+          <a:xfrm>
+            <a:off x="914400" y="3675618"/>
+            <a:ext cx="11036300" cy="830997"/>
+          </a:xfrm>
+          <a:prstGeom prst="rect">
+            <a:avLst/>
+          </a:prstGeom>
+          <a:noFill/>
+        </p:spPr>
+        <p:txBody>
+          <a:bodyPr wrap="square" rtlCol="0">
+            <a:spAutoFit/>
+          </a:bodyPr>
+          <a:lstStyle/>
+          <a:p>
+            <a:r>
+              <a:rPr lang="en-GB" sz="2400" dirty="0"/>
+              <a:t>Where BARBER = How do you like the barber </a:t>
+            </a:r>
+          </a:p>
+          <a:p>
+            <a:r>
+              <a:rPr lang="en-GB" sz="2400" dirty="0"/>
+              <a:t>(1 = extremely dislike, 7= like very much</a:t>
+            </a:r>
+          </a:p>
+        </p:txBody>
+      </p:sp>
+      <p:sp>
+        <p:nvSpPr>
+          <p:cNvPr id="15" name="TextBox 14">
+            <a:extLst>
+              <a:ext uri="{FF2B5EF4-FFF2-40B4-BE49-F238E27FC236}">
+                <a16:creationId xmlns:a16="http://schemas.microsoft.com/office/drawing/2014/main" id="{1EE00A6A-8AF2-A757-BD75-A49735A39F7E}"/>
+              </a:ext>
+            </a:extLst>
+          </p:cNvPr>
+          <p:cNvSpPr txBox="1"/>
+          <p:nvPr/>
+        </p:nvSpPr>
+        <p:spPr>
+          <a:xfrm>
+            <a:off x="1079500" y="5016500"/>
+            <a:ext cx="9740900" cy="923330"/>
+          </a:xfrm>
+          <a:prstGeom prst="rect">
+            <a:avLst/>
+          </a:prstGeom>
+          <a:noFill/>
+        </p:spPr>
+        <p:txBody>
+          <a:bodyPr wrap="square" rtlCol="0">
+            <a:spAutoFit/>
+          </a:bodyPr>
+          <a:lstStyle/>
+          <a:p>
+            <a:r>
               <a:rPr lang="en-GB" dirty="0"/>
-              <a:t>Formal Definition</a:t>
-            </a:r>
-          </a:p>
-        </p:txBody>
-      </p:sp>
-      <p:sp>
-        <p:nvSpPr>
-          <p:cNvPr id="5" name="Content Placeholder 4">
-            <a:extLst>
-              <a:ext uri="{FF2B5EF4-FFF2-40B4-BE49-F238E27FC236}">
-                <a16:creationId xmlns:a16="http://schemas.microsoft.com/office/drawing/2014/main" id="{F5960EB8-C612-1370-9B02-EF82A1BE560F}"/>
-              </a:ext>
-            </a:extLst>
-          </p:cNvPr>
-          <p:cNvSpPr>
-            <a:spLocks noGrp="1"/>
-          </p:cNvSpPr>
-          <p:nvPr>
-            <p:ph idx="1"/>
-          </p:nvPr>
-        </p:nvSpPr>
-        <p:spPr/>
-        <p:txBody>
-          <a:bodyPr/>
-          <a:lstStyle/>
-          <a:p>
-            <a:r>
-              <a:rPr lang="en-GB" b="0" i="0" u="none" strike="noStrike" dirty="0">
-                <a:solidFill>
-                  <a:srgbClr val="000000"/>
-                </a:solidFill>
-                <a:effectLst/>
-                <a:latin typeface="Source Sans Pro" panose="020B0503030403020204" pitchFamily="34" charset="0"/>
-              </a:rPr>
-              <a:t>The modelling situation where a predictor is correlated to an error term is termed as an </a:t>
-            </a:r>
-            <a:r>
-              <a:rPr lang="en-GB" b="1" i="0" u="none" strike="noStrike" dirty="0">
-                <a:solidFill>
-                  <a:srgbClr val="000000"/>
-                </a:solidFill>
-                <a:effectLst/>
-                <a:latin typeface="Source Sans Pro" panose="020B0503030403020204" pitchFamily="34" charset="0"/>
-              </a:rPr>
-              <a:t>endogeneity</a:t>
-            </a:r>
-            <a:r>
-              <a:rPr lang="en-GB" b="0" i="0" u="none" strike="noStrike" dirty="0">
-                <a:solidFill>
-                  <a:srgbClr val="000000"/>
-                </a:solidFill>
-                <a:effectLst/>
-                <a:latin typeface="Source Sans Pro" panose="020B0503030403020204" pitchFamily="34" charset="0"/>
-              </a:rPr>
-              <a:t> problem.</a:t>
-            </a:r>
-          </a:p>
-          <a:p>
-            <a:r>
-              <a:rPr lang="en-GB" b="0" i="0" u="none" strike="noStrike" dirty="0">
-                <a:solidFill>
-                  <a:srgbClr val="000000"/>
-                </a:solidFill>
-                <a:effectLst/>
-                <a:latin typeface="Source Sans Pro" panose="020B0503030403020204" pitchFamily="34" charset="0"/>
-              </a:rPr>
-              <a:t>Omitting an important variable from a model is not the only cause of an endogeneity problem. Endogeneity can also arise when (1) variables are measured with errors, (2) the causal effects run both from X → Y and from Y → X, known in the regression literature as simultaneity. </a:t>
-            </a:r>
-            <a:endParaRPr lang="en-GB" dirty="0"/>
+              <a:t>Because BARBER and MUSIC may be correlated, </a:t>
+            </a:r>
+          </a:p>
+          <a:p>
+            <a:r>
+              <a:rPr lang="en-GB" dirty="0"/>
+              <a:t>omitting BARBER from the first model will lead to a biased in the coefficient estimate for MUSIC (endogeneity problem)</a:t>
+            </a:r>
           </a:p>
         </p:txBody>
       </p:sp>
     </p:spTree>
     <p:extLst>
       <p:ext uri="{BB962C8B-B14F-4D97-AF65-F5344CB8AC3E}">
-        <p14:creationId xmlns:p14="http://schemas.microsoft.com/office/powerpoint/2010/main" val="3827519063"/>
+        <p14:creationId xmlns:p14="http://schemas.microsoft.com/office/powerpoint/2010/main" val="1505892709"/>
       </p:ext>
     </p:extLst>
   </p:cSld>
@@ -9085,10 +9923,10 @@
       </p:grpSpPr>
       <p:sp>
         <p:nvSpPr>
-          <p:cNvPr id="2" name="Title 1">
-            <a:extLst>
-              <a:ext uri="{FF2B5EF4-FFF2-40B4-BE49-F238E27FC236}">
-                <a16:creationId xmlns:a16="http://schemas.microsoft.com/office/drawing/2014/main" id="{DE22779C-7A4F-4D12-AC9F-93DA6A5ACA9C}"/>
+          <p:cNvPr id="4" name="Title 3">
+            <a:extLst>
+              <a:ext uri="{FF2B5EF4-FFF2-40B4-BE49-F238E27FC236}">
+                <a16:creationId xmlns:a16="http://schemas.microsoft.com/office/drawing/2014/main" id="{F9996468-F3EB-2B1E-52C1-308FC0551E2B}"/>
               </a:ext>
             </a:extLst>
           </p:cNvPr>
@@ -9106,17 +9944,17 @@
           <a:p>
             <a:r>
               <a:rPr lang="en-GB" dirty="0"/>
-              <a:t>Two-Stage Least Square (TSLS)</a:t>
-            </a:r>
-          </a:p>
-        </p:txBody>
-      </p:sp>
-      <p:sp>
-        <p:nvSpPr>
-          <p:cNvPr id="3" name="Content Placeholder 2">
-            <a:extLst>
-              <a:ext uri="{FF2B5EF4-FFF2-40B4-BE49-F238E27FC236}">
-                <a16:creationId xmlns:a16="http://schemas.microsoft.com/office/drawing/2014/main" id="{4A82785C-360A-6DC4-24A1-32561C0E9424}"/>
+              <a:t>Formal Definition</a:t>
+            </a:r>
+          </a:p>
+        </p:txBody>
+      </p:sp>
+      <p:sp>
+        <p:nvSpPr>
+          <p:cNvPr id="5" name="Content Placeholder 4">
+            <a:extLst>
+              <a:ext uri="{FF2B5EF4-FFF2-40B4-BE49-F238E27FC236}">
+                <a16:creationId xmlns:a16="http://schemas.microsoft.com/office/drawing/2014/main" id="{F5960EB8-C612-1370-9B02-EF82A1BE560F}"/>
               </a:ext>
             </a:extLst>
           </p:cNvPr>
@@ -9140,10 +9978,18 @@
                 <a:effectLst/>
                 <a:latin typeface="Source Sans Pro" panose="020B0503030403020204" pitchFamily="34" charset="0"/>
               </a:rPr>
-              <a:t>One of the techniques to deal with an endogeneity problem is the two-stage least squares (TSLS). </a:t>
-            </a:r>
-          </a:p>
-          <a:p>
+              <a:t>The modelling situation where a predictor is correlated to an error term is termed as an </a:t>
+            </a:r>
+            <a:r>
+              <a:rPr lang="en-GB" b="1" i="0" u="none" strike="noStrike" dirty="0">
+                <a:solidFill>
+                  <a:srgbClr val="000000"/>
+                </a:solidFill>
+                <a:effectLst/>
+                <a:latin typeface="Source Sans Pro" panose="020B0503030403020204" pitchFamily="34" charset="0"/>
+              </a:rPr>
+              <a:t>endogeneity</a:t>
+            </a:r>
             <a:r>
               <a:rPr lang="en-GB" b="0" i="0" u="none" strike="noStrike" dirty="0">
                 <a:solidFill>
@@ -9152,7 +9998,19 @@
                 <a:effectLst/>
                 <a:latin typeface="Source Sans Pro" panose="020B0503030403020204" pitchFamily="34" charset="0"/>
               </a:rPr>
-              <a:t>TSLS requires us to find a variable known as an instrumental variable or instrument, for short, often denoted by Z.</a:t>
+              <a:t> problem.</a:t>
+            </a:r>
+          </a:p>
+          <a:p>
+            <a:r>
+              <a:rPr lang="en-GB" b="0" i="0" u="none" strike="noStrike" dirty="0">
+                <a:solidFill>
+                  <a:srgbClr val="000000"/>
+                </a:solidFill>
+                <a:effectLst/>
+                <a:latin typeface="Source Sans Pro" panose="020B0503030403020204" pitchFamily="34" charset="0"/>
+              </a:rPr>
+              <a:t>Omitting an important variable from a model is not the only cause of an endogeneity problem. Endogeneity can also arise when (1) variables are measured with errors, (2) the causal effects run both from X → Y and from Y → X, known in the regression literature as simultaneity. </a:t>
             </a:r>
             <a:endParaRPr lang="en-GB" dirty="0"/>
           </a:p>
@@ -9161,7 +10019,7 @@
     </p:spTree>
     <p:extLst>
       <p:ext uri="{BB962C8B-B14F-4D97-AF65-F5344CB8AC3E}">
-        <p14:creationId xmlns:p14="http://schemas.microsoft.com/office/powerpoint/2010/main" val="2160574541"/>
+        <p14:creationId xmlns:p14="http://schemas.microsoft.com/office/powerpoint/2010/main" val="3827519063"/>
       </p:ext>
     </p:extLst>
   </p:cSld>
@@ -9193,7 +10051,7 @@
           <p:cNvPr id="2" name="Title 1">
             <a:extLst>
               <a:ext uri="{FF2B5EF4-FFF2-40B4-BE49-F238E27FC236}">
-                <a16:creationId xmlns:a16="http://schemas.microsoft.com/office/drawing/2014/main" id="{88D77FEC-CBB7-1004-ACC4-A77928502874}"/>
+                <a16:creationId xmlns:a16="http://schemas.microsoft.com/office/drawing/2014/main" id="{DE22779C-7A4F-4D12-AC9F-93DA6A5ACA9C}"/>
               </a:ext>
             </a:extLst>
           </p:cNvPr>
@@ -9211,7 +10069,7 @@
           <a:p>
             <a:r>
               <a:rPr lang="en-GB" dirty="0"/>
-              <a:t>Instrumental Variable (Z)</a:t>
+              <a:t>Two-Stage Least Square (TSLS)</a:t>
             </a:r>
           </a:p>
         </p:txBody>
@@ -9221,7 +10079,7 @@
           <p:cNvPr id="3" name="Content Placeholder 2">
             <a:extLst>
               <a:ext uri="{FF2B5EF4-FFF2-40B4-BE49-F238E27FC236}">
-                <a16:creationId xmlns:a16="http://schemas.microsoft.com/office/drawing/2014/main" id="{742E7FD7-1F6A-9ED6-65B6-BD7678E29444}"/>
+                <a16:creationId xmlns:a16="http://schemas.microsoft.com/office/drawing/2014/main" id="{4A82785C-360A-6DC4-24A1-32561C0E9424}"/>
               </a:ext>
             </a:extLst>
           </p:cNvPr>
@@ -9245,14 +10103,10 @@
                 <a:effectLst/>
                 <a:latin typeface="Source Sans Pro" panose="020B0503030403020204" pitchFamily="34" charset="0"/>
               </a:rPr>
-              <a:t>Any variable that acts as a Z must satisfy the following assumptions:</a:t>
-            </a:r>
-          </a:p>
-          <a:p>
-            <a:pPr marL="971550" lvl="1" indent="-514350">
-              <a:buFont typeface="+mj-lt"/>
-              <a:buAutoNum type="arabicPeriod"/>
-            </a:pPr>
+              <a:t>One of the techniques to deal with an endogeneity problem is the two-stage least squares (TSLS). </a:t>
+            </a:r>
+          </a:p>
+          <a:p>
             <a:r>
               <a:rPr lang="en-GB" b="0" i="0" u="none" strike="noStrike" dirty="0">
                 <a:solidFill>
@@ -9261,59 +10115,8 @@
                 <a:effectLst/>
                 <a:latin typeface="Source Sans Pro" panose="020B0503030403020204" pitchFamily="34" charset="0"/>
               </a:rPr>
-              <a:t>It must be correlated with MUSIC. This is referred to as a relevance assumption.</a:t>
-            </a:r>
-          </a:p>
-          <a:p>
-            <a:pPr marL="971550" lvl="1" indent="-514350">
-              <a:buFont typeface="+mj-lt"/>
-              <a:buAutoNum type="arabicPeriod"/>
-            </a:pPr>
-            <a:r>
-              <a:rPr lang="en-GB" b="0" i="0" u="none" strike="noStrike" dirty="0">
-                <a:solidFill>
-                  <a:srgbClr val="000000"/>
-                </a:solidFill>
-                <a:effectLst/>
-                <a:latin typeface="Source Sans Pro" panose="020B0503030403020204" pitchFamily="34" charset="0"/>
-              </a:rPr>
-              <a:t>It should not be correlated with the error term O. This is referred to as an exogeneity assumption.</a:t>
-            </a:r>
-          </a:p>
-          <a:p>
-            <a:pPr marL="971550" lvl="1" indent="-514350">
-              <a:buFont typeface="+mj-lt"/>
-              <a:buAutoNum type="arabicPeriod"/>
-            </a:pPr>
-            <a:r>
-              <a:rPr lang="en-GB" b="0" i="0" u="none" strike="noStrike" dirty="0">
-                <a:solidFill>
-                  <a:srgbClr val="000000"/>
-                </a:solidFill>
-                <a:effectLst/>
-                <a:latin typeface="Source Sans Pro" panose="020B0503030403020204" pitchFamily="34" charset="0"/>
-              </a:rPr>
-              <a:t>It affects REVISIT only via MUSIC. This is referred to as an exclusion restriction assumption.</a:t>
-            </a:r>
-          </a:p>
-          <a:p>
-            <a:pPr marL="971550" lvl="1" indent="-514350">
-              <a:buFont typeface="+mj-lt"/>
-              <a:buAutoNum type="arabicPeriod"/>
-            </a:pPr>
-            <a:endParaRPr lang="en-GB" b="0" i="0" u="none" strike="noStrike" dirty="0">
-              <a:solidFill>
-                <a:srgbClr val="000000"/>
-              </a:solidFill>
-              <a:effectLst/>
-              <a:latin typeface="Source Sans Pro" panose="020B0503030403020204" pitchFamily="34" charset="0"/>
-            </a:endParaRPr>
-          </a:p>
-          <a:p>
-            <a:pPr marL="514350" indent="-514350">
-              <a:buFont typeface="+mj-lt"/>
-              <a:buAutoNum type="arabicPeriod"/>
-            </a:pPr>
+              <a:t>TSLS requires us to find a variable known as an instrumental variable or instrument, for short, often denoted by Z.</a:t>
+            </a:r>
             <a:endParaRPr lang="en-GB" dirty="0"/>
           </a:p>
         </p:txBody>
@@ -9321,7 +10124,7 @@
     </p:spTree>
     <p:extLst>
       <p:ext uri="{BB962C8B-B14F-4D97-AF65-F5344CB8AC3E}">
-        <p14:creationId xmlns:p14="http://schemas.microsoft.com/office/powerpoint/2010/main" val="3210662713"/>
+        <p14:creationId xmlns:p14="http://schemas.microsoft.com/office/powerpoint/2010/main" val="2160574541"/>
       </p:ext>
     </p:extLst>
   </p:cSld>
@@ -9348,682 +10151,140 @@
           <a:chExt cx="0" cy="0"/>
         </a:xfrm>
       </p:grpSpPr>
-      <p:grpSp>
-        <p:nvGrpSpPr>
-          <p:cNvPr id="2" name="Group 1">
-            <a:extLst>
-              <a:ext uri="{FF2B5EF4-FFF2-40B4-BE49-F238E27FC236}">
-                <a16:creationId xmlns:a16="http://schemas.microsoft.com/office/drawing/2014/main" id="{E85888ED-213D-4394-718C-1E0564CA40B4}"/>
-              </a:ext>
-            </a:extLst>
-          </p:cNvPr>
-          <p:cNvGrpSpPr/>
-          <p:nvPr/>
-        </p:nvGrpSpPr>
-        <p:grpSpPr>
-          <a:xfrm>
-            <a:off x="1498282" y="2062480"/>
-            <a:ext cx="9195435" cy="3903345"/>
-            <a:chOff x="1557338" y="182880"/>
-            <a:chExt cx="9195435" cy="3903345"/>
-          </a:xfrm>
-        </p:grpSpPr>
-        <p:sp>
-          <p:nvSpPr>
-            <p:cNvPr id="4" name="Rectangle 3">
-              <a:extLst>
-                <a:ext uri="{FF2B5EF4-FFF2-40B4-BE49-F238E27FC236}">
-                  <a16:creationId xmlns:a16="http://schemas.microsoft.com/office/drawing/2014/main" id="{7AA97629-8B6C-CB4C-9900-3C784E492AA4}"/>
-                </a:ext>
-              </a:extLst>
-            </p:cNvPr>
-            <p:cNvSpPr/>
-            <p:nvPr/>
-          </p:nvSpPr>
-          <p:spPr>
-            <a:xfrm>
-              <a:off x="1557338" y="2728913"/>
-              <a:ext cx="1571625" cy="1314450"/>
-            </a:xfrm>
-            <a:prstGeom prst="rect">
-              <a:avLst/>
-            </a:prstGeom>
-            <a:noFill/>
-            <a:ln w="25400">
+      <p:sp>
+        <p:nvSpPr>
+          <p:cNvPr id="2" name="Title 1">
+            <a:extLst>
+              <a:ext uri="{FF2B5EF4-FFF2-40B4-BE49-F238E27FC236}">
+                <a16:creationId xmlns:a16="http://schemas.microsoft.com/office/drawing/2014/main" id="{88D77FEC-CBB7-1004-ACC4-A77928502874}"/>
+              </a:ext>
+            </a:extLst>
+          </p:cNvPr>
+          <p:cNvSpPr>
+            <a:spLocks noGrp="1"/>
+          </p:cNvSpPr>
+          <p:nvPr>
+            <p:ph type="title"/>
+          </p:nvPr>
+        </p:nvSpPr>
+        <p:spPr/>
+        <p:txBody>
+          <a:bodyPr/>
+          <a:lstStyle/>
+          <a:p>
+            <a:r>
+              <a:rPr lang="en-GB" dirty="0"/>
+              <a:t>Instrumental Variable (Z)</a:t>
+            </a:r>
+          </a:p>
+        </p:txBody>
+      </p:sp>
+      <p:sp>
+        <p:nvSpPr>
+          <p:cNvPr id="3" name="Content Placeholder 2">
+            <a:extLst>
+              <a:ext uri="{FF2B5EF4-FFF2-40B4-BE49-F238E27FC236}">
+                <a16:creationId xmlns:a16="http://schemas.microsoft.com/office/drawing/2014/main" id="{742E7FD7-1F6A-9ED6-65B6-BD7678E29444}"/>
+              </a:ext>
+            </a:extLst>
+          </p:cNvPr>
+          <p:cNvSpPr>
+            <a:spLocks noGrp="1"/>
+          </p:cNvSpPr>
+          <p:nvPr>
+            <p:ph idx="1"/>
+          </p:nvPr>
+        </p:nvSpPr>
+        <p:spPr/>
+        <p:txBody>
+          <a:bodyPr/>
+          <a:lstStyle/>
+          <a:p>
+            <a:r>
+              <a:rPr lang="en-GB" b="0" i="0" u="none" strike="noStrike" dirty="0">
+                <a:solidFill>
+                  <a:srgbClr val="000000"/>
+                </a:solidFill>
+                <a:effectLst/>
+                <a:latin typeface="Source Sans Pro" panose="020B0503030403020204" pitchFamily="34" charset="0"/>
+              </a:rPr>
+              <a:t>Any variable that acts as a Z must satisfy the following assumptions:</a:t>
+            </a:r>
+          </a:p>
+          <a:p>
+            <a:pPr marL="971550" lvl="1" indent="-514350">
+              <a:buFont typeface="+mj-lt"/>
+              <a:buAutoNum type="arabicPeriod"/>
+            </a:pPr>
+            <a:r>
+              <a:rPr lang="en-GB" b="0" i="0" u="none" strike="noStrike" dirty="0">
+                <a:solidFill>
+                  <a:srgbClr val="000000"/>
+                </a:solidFill>
+                <a:effectLst/>
+                <a:latin typeface="Source Sans Pro" panose="020B0503030403020204" pitchFamily="34" charset="0"/>
+              </a:rPr>
+              <a:t>It must be correlated with MUSIC. This is referred to as a relevance assumption.</a:t>
+            </a:r>
+          </a:p>
+          <a:p>
+            <a:pPr marL="971550" lvl="1" indent="-514350">
+              <a:buFont typeface="+mj-lt"/>
+              <a:buAutoNum type="arabicPeriod"/>
+            </a:pPr>
+            <a:r>
+              <a:rPr lang="en-GB" b="0" i="0" u="none" strike="noStrike" dirty="0">
+                <a:solidFill>
+                  <a:srgbClr val="000000"/>
+                </a:solidFill>
+                <a:effectLst/>
+                <a:latin typeface="Source Sans Pro" panose="020B0503030403020204" pitchFamily="34" charset="0"/>
+              </a:rPr>
+              <a:t>It should not be correlated with the error term O. This is referred to as an exogeneity assumption.</a:t>
+            </a:r>
+          </a:p>
+          <a:p>
+            <a:pPr marL="971550" lvl="1" indent="-514350">
+              <a:buFont typeface="+mj-lt"/>
+              <a:buAutoNum type="arabicPeriod"/>
+            </a:pPr>
+            <a:r>
+              <a:rPr lang="en-GB" b="0" i="0" u="none" strike="noStrike" dirty="0">
+                <a:solidFill>
+                  <a:srgbClr val="000000"/>
+                </a:solidFill>
+                <a:effectLst/>
+                <a:latin typeface="Source Sans Pro" panose="020B0503030403020204" pitchFamily="34" charset="0"/>
+              </a:rPr>
+              <a:t>It affects REVISIT only via MUSIC. This is referred to as an exclusion restriction assumption.</a:t>
+            </a:r>
+          </a:p>
+          <a:p>
+            <a:pPr marL="971550" lvl="1" indent="-514350">
+              <a:buFont typeface="+mj-lt"/>
+              <a:buAutoNum type="arabicPeriod"/>
+            </a:pPr>
+            <a:endParaRPr lang="en-GB" b="0" i="0" u="none" strike="noStrike" dirty="0">
               <a:solidFill>
-                <a:schemeClr val="tx1">
-                  <a:lumMod val="85000"/>
-                  <a:lumOff val="15000"/>
-                </a:schemeClr>
+                <a:srgbClr val="000000"/>
               </a:solidFill>
-            </a:ln>
-          </p:spPr>
-          <p:style>
-            <a:lnRef idx="2">
-              <a:schemeClr val="accent1">
-                <a:shade val="50000"/>
-              </a:schemeClr>
-            </a:lnRef>
-            <a:fillRef idx="1">
-              <a:schemeClr val="accent1"/>
-            </a:fillRef>
-            <a:effectRef idx="0">
-              <a:schemeClr val="accent1"/>
-            </a:effectRef>
-            <a:fontRef idx="minor">
-              <a:schemeClr val="lt1"/>
-            </a:fontRef>
-          </p:style>
-          <p:txBody>
-            <a:bodyPr rtlCol="0" anchor="ctr"/>
-            <a:lstStyle/>
-            <a:p>
-              <a:pPr algn="ctr"/>
-              <a:r>
-                <a:rPr lang="en-US" sz="3600">
-                  <a:solidFill>
-                    <a:schemeClr val="tx1"/>
-                  </a:solidFill>
-                </a:rPr>
-                <a:t>Z</a:t>
-              </a:r>
-              <a:endParaRPr lang="en-US" sz="3600" dirty="0">
-                <a:solidFill>
-                  <a:schemeClr val="tx1"/>
-                </a:solidFill>
-              </a:endParaRPr>
-            </a:p>
-          </p:txBody>
-        </p:sp>
-        <p:sp>
-          <p:nvSpPr>
-            <p:cNvPr id="5" name="Rectangle 4">
-              <a:extLst>
-                <a:ext uri="{FF2B5EF4-FFF2-40B4-BE49-F238E27FC236}">
-                  <a16:creationId xmlns:a16="http://schemas.microsoft.com/office/drawing/2014/main" id="{66AB836B-2141-C943-AAF9-2E90F904989A}"/>
-                </a:ext>
-              </a:extLst>
-            </p:cNvPr>
-            <p:cNvSpPr/>
-            <p:nvPr/>
-          </p:nvSpPr>
-          <p:spPr>
-            <a:xfrm>
-              <a:off x="5310187" y="2728913"/>
-              <a:ext cx="1571625" cy="1314450"/>
-            </a:xfrm>
-            <a:prstGeom prst="rect">
-              <a:avLst/>
-            </a:prstGeom>
-            <a:noFill/>
-            <a:ln w="25400">
-              <a:solidFill>
-                <a:schemeClr val="tx1">
-                  <a:lumMod val="85000"/>
-                  <a:lumOff val="15000"/>
-                </a:schemeClr>
-              </a:solidFill>
-            </a:ln>
-          </p:spPr>
-          <p:style>
-            <a:lnRef idx="2">
-              <a:schemeClr val="accent1">
-                <a:shade val="50000"/>
-              </a:schemeClr>
-            </a:lnRef>
-            <a:fillRef idx="1">
-              <a:schemeClr val="accent1"/>
-            </a:fillRef>
-            <a:effectRef idx="0">
-              <a:schemeClr val="accent1"/>
-            </a:effectRef>
-            <a:fontRef idx="minor">
-              <a:schemeClr val="lt1"/>
-            </a:fontRef>
-          </p:style>
-          <p:txBody>
-            <a:bodyPr rtlCol="0" anchor="ctr"/>
-            <a:lstStyle/>
-            <a:p>
-              <a:pPr algn="ctr"/>
-              <a:r>
-                <a:rPr lang="en-US" sz="3600" dirty="0">
-                  <a:solidFill>
-                    <a:schemeClr val="tx1"/>
-                  </a:solidFill>
-                </a:rPr>
-                <a:t>MUSIC</a:t>
-              </a:r>
-              <a:endParaRPr lang="en-US" dirty="0">
-                <a:solidFill>
-                  <a:schemeClr val="tx1"/>
-                </a:solidFill>
-              </a:endParaRPr>
-            </a:p>
-          </p:txBody>
-        </p:sp>
-        <p:sp>
-          <p:nvSpPr>
-            <p:cNvPr id="6" name="Rectangle 5">
-              <a:extLst>
-                <a:ext uri="{FF2B5EF4-FFF2-40B4-BE49-F238E27FC236}">
-                  <a16:creationId xmlns:a16="http://schemas.microsoft.com/office/drawing/2014/main" id="{D9411C71-BF7C-DD4A-B916-4C38202AB8FA}"/>
-                </a:ext>
-              </a:extLst>
-            </p:cNvPr>
-            <p:cNvSpPr/>
-            <p:nvPr/>
-          </p:nvSpPr>
-          <p:spPr>
-            <a:xfrm>
-              <a:off x="9063036" y="2771775"/>
-              <a:ext cx="1689737" cy="1314450"/>
-            </a:xfrm>
-            <a:prstGeom prst="rect">
-              <a:avLst/>
-            </a:prstGeom>
-            <a:noFill/>
-            <a:ln w="25400">
-              <a:solidFill>
-                <a:schemeClr val="tx1">
-                  <a:lumMod val="85000"/>
-                  <a:lumOff val="15000"/>
-                </a:schemeClr>
-              </a:solidFill>
-            </a:ln>
-          </p:spPr>
-          <p:style>
-            <a:lnRef idx="2">
-              <a:schemeClr val="accent1">
-                <a:shade val="50000"/>
-              </a:schemeClr>
-            </a:lnRef>
-            <a:fillRef idx="1">
-              <a:schemeClr val="accent1"/>
-            </a:fillRef>
-            <a:effectRef idx="0">
-              <a:schemeClr val="accent1"/>
-            </a:effectRef>
-            <a:fontRef idx="minor">
-              <a:schemeClr val="lt1"/>
-            </a:fontRef>
-          </p:style>
-          <p:txBody>
-            <a:bodyPr rtlCol="0" anchor="ctr"/>
-            <a:lstStyle/>
-            <a:p>
-              <a:pPr algn="ctr"/>
-              <a:r>
-                <a:rPr lang="en-US" sz="3600">
-                  <a:solidFill>
-                    <a:schemeClr val="tx1"/>
-                  </a:solidFill>
-                </a:rPr>
-                <a:t>REVISIT</a:t>
-              </a:r>
-              <a:endParaRPr lang="en-US" sz="3600" dirty="0">
-                <a:solidFill>
-                  <a:schemeClr val="tx1"/>
-                </a:solidFill>
-              </a:endParaRPr>
-            </a:p>
-          </p:txBody>
-        </p:sp>
-        <p:cxnSp>
-          <p:nvCxnSpPr>
-            <p:cNvPr id="8" name="Straight Arrow Connector 7">
-              <a:extLst>
-                <a:ext uri="{FF2B5EF4-FFF2-40B4-BE49-F238E27FC236}">
-                  <a16:creationId xmlns:a16="http://schemas.microsoft.com/office/drawing/2014/main" id="{0C2CE18C-971F-804F-89DC-8A025FF1164E}"/>
-                </a:ext>
-              </a:extLst>
-            </p:cNvPr>
-            <p:cNvCxnSpPr>
-              <a:stCxn id="4" idx="3"/>
-              <a:endCxn id="5" idx="1"/>
-            </p:cNvCxnSpPr>
-            <p:nvPr/>
-          </p:nvCxnSpPr>
-          <p:spPr>
-            <a:xfrm>
-              <a:off x="3128963" y="3386138"/>
-              <a:ext cx="2181224" cy="0"/>
-            </a:xfrm>
-            <a:prstGeom prst="straightConnector1">
-              <a:avLst/>
-            </a:prstGeom>
-            <a:ln w="25400">
-              <a:solidFill>
-                <a:schemeClr val="tx1">
-                  <a:lumMod val="75000"/>
-                  <a:lumOff val="25000"/>
-                </a:schemeClr>
-              </a:solidFill>
-              <a:tailEnd type="triangle"/>
-            </a:ln>
-          </p:spPr>
-          <p:style>
-            <a:lnRef idx="1">
-              <a:schemeClr val="accent1"/>
-            </a:lnRef>
-            <a:fillRef idx="0">
-              <a:schemeClr val="accent1"/>
-            </a:fillRef>
-            <a:effectRef idx="0">
-              <a:schemeClr val="accent1"/>
-            </a:effectRef>
-            <a:fontRef idx="minor">
-              <a:schemeClr val="tx1"/>
-            </a:fontRef>
-          </p:style>
-        </p:cxnSp>
-        <p:cxnSp>
-          <p:nvCxnSpPr>
-            <p:cNvPr id="9" name="Straight Arrow Connector 8">
-              <a:extLst>
-                <a:ext uri="{FF2B5EF4-FFF2-40B4-BE49-F238E27FC236}">
-                  <a16:creationId xmlns:a16="http://schemas.microsoft.com/office/drawing/2014/main" id="{986302C4-9685-7D41-AF06-37D70D366D2D}"/>
-                </a:ext>
-              </a:extLst>
-            </p:cNvPr>
-            <p:cNvCxnSpPr/>
-            <p:nvPr/>
-          </p:nvCxnSpPr>
-          <p:spPr>
-            <a:xfrm>
-              <a:off x="6881812" y="3401378"/>
-              <a:ext cx="2181224" cy="0"/>
-            </a:xfrm>
-            <a:prstGeom prst="straightConnector1">
-              <a:avLst/>
-            </a:prstGeom>
-            <a:ln w="25400">
-              <a:solidFill>
-                <a:schemeClr val="tx1">
-                  <a:lumMod val="75000"/>
-                  <a:lumOff val="25000"/>
-                </a:schemeClr>
-              </a:solidFill>
-              <a:tailEnd type="triangle"/>
-            </a:ln>
-          </p:spPr>
-          <p:style>
-            <a:lnRef idx="1">
-              <a:schemeClr val="accent1"/>
-            </a:lnRef>
-            <a:fillRef idx="0">
-              <a:schemeClr val="accent1"/>
-            </a:fillRef>
-            <a:effectRef idx="0">
-              <a:schemeClr val="accent1"/>
-            </a:effectRef>
-            <a:fontRef idx="minor">
-              <a:schemeClr val="tx1"/>
-            </a:fontRef>
-          </p:style>
-        </p:cxnSp>
-        <p:sp>
-          <p:nvSpPr>
-            <p:cNvPr id="10" name="Rectangle 9">
-              <a:extLst>
-                <a:ext uri="{FF2B5EF4-FFF2-40B4-BE49-F238E27FC236}">
-                  <a16:creationId xmlns:a16="http://schemas.microsoft.com/office/drawing/2014/main" id="{2BC16C0C-0507-9945-857C-389491722944}"/>
-                </a:ext>
-              </a:extLst>
-            </p:cNvPr>
-            <p:cNvSpPr/>
-            <p:nvPr/>
-          </p:nvSpPr>
-          <p:spPr>
-            <a:xfrm>
-              <a:off x="7186611" y="572453"/>
-              <a:ext cx="1571625" cy="1314450"/>
-            </a:xfrm>
-            <a:prstGeom prst="rect">
-              <a:avLst/>
-            </a:prstGeom>
-            <a:noFill/>
-            <a:ln w="25400">
-              <a:solidFill>
-                <a:schemeClr val="tx1">
-                  <a:lumMod val="85000"/>
-                  <a:lumOff val="15000"/>
-                </a:schemeClr>
-              </a:solidFill>
-            </a:ln>
-          </p:spPr>
-          <p:style>
-            <a:lnRef idx="2">
-              <a:schemeClr val="accent1">
-                <a:shade val="50000"/>
-              </a:schemeClr>
-            </a:lnRef>
-            <a:fillRef idx="1">
-              <a:schemeClr val="accent1"/>
-            </a:fillRef>
-            <a:effectRef idx="0">
-              <a:schemeClr val="accent1"/>
-            </a:effectRef>
-            <a:fontRef idx="minor">
-              <a:schemeClr val="lt1"/>
-            </a:fontRef>
-          </p:style>
-          <p:txBody>
-            <a:bodyPr rtlCol="0" anchor="ctr"/>
-            <a:lstStyle/>
-            <a:p>
-              <a:pPr algn="ctr"/>
-              <a:r>
-                <a:rPr lang="en-US" sz="3600" dirty="0">
-                  <a:solidFill>
-                    <a:schemeClr val="tx1"/>
-                  </a:solidFill>
-                </a:rPr>
-                <a:t>O</a:t>
-              </a:r>
-            </a:p>
-          </p:txBody>
-        </p:sp>
-        <p:cxnSp>
-          <p:nvCxnSpPr>
-            <p:cNvPr id="11" name="Straight Arrow Connector 10">
-              <a:extLst>
-                <a:ext uri="{FF2B5EF4-FFF2-40B4-BE49-F238E27FC236}">
-                  <a16:creationId xmlns:a16="http://schemas.microsoft.com/office/drawing/2014/main" id="{1A7A49E6-6517-7E40-ADFE-51908E8CA48D}"/>
-                </a:ext>
-              </a:extLst>
-            </p:cNvPr>
-            <p:cNvCxnSpPr>
-              <a:cxnSpLocks/>
-              <a:stCxn id="10" idx="2"/>
-              <a:endCxn id="5" idx="0"/>
-            </p:cNvCxnSpPr>
-            <p:nvPr/>
-          </p:nvCxnSpPr>
-          <p:spPr>
-            <a:xfrm flipH="1">
-              <a:off x="6096000" y="1886903"/>
-              <a:ext cx="1876424" cy="842010"/>
-            </a:xfrm>
-            <a:prstGeom prst="straightConnector1">
-              <a:avLst/>
-            </a:prstGeom>
-            <a:ln w="25400">
-              <a:solidFill>
-                <a:schemeClr val="tx1">
-                  <a:lumMod val="75000"/>
-                  <a:lumOff val="25000"/>
-                </a:schemeClr>
-              </a:solidFill>
-              <a:tailEnd type="triangle"/>
-            </a:ln>
-          </p:spPr>
-          <p:style>
-            <a:lnRef idx="1">
-              <a:schemeClr val="accent1"/>
-            </a:lnRef>
-            <a:fillRef idx="0">
-              <a:schemeClr val="accent1"/>
-            </a:fillRef>
-            <a:effectRef idx="0">
-              <a:schemeClr val="accent1"/>
-            </a:effectRef>
-            <a:fontRef idx="minor">
-              <a:schemeClr val="tx1"/>
-            </a:fontRef>
-          </p:style>
-        </p:cxnSp>
-        <p:cxnSp>
-          <p:nvCxnSpPr>
-            <p:cNvPr id="14" name="Straight Arrow Connector 13">
-              <a:extLst>
-                <a:ext uri="{FF2B5EF4-FFF2-40B4-BE49-F238E27FC236}">
-                  <a16:creationId xmlns:a16="http://schemas.microsoft.com/office/drawing/2014/main" id="{699CD9EE-8EF4-A74D-B6E5-732A9E76A310}"/>
-                </a:ext>
-              </a:extLst>
-            </p:cNvPr>
-            <p:cNvCxnSpPr>
-              <a:cxnSpLocks/>
-              <a:stCxn id="10" idx="2"/>
-            </p:cNvCxnSpPr>
-            <p:nvPr/>
-          </p:nvCxnSpPr>
-          <p:spPr>
-            <a:xfrm>
-              <a:off x="7972424" y="1886903"/>
-              <a:ext cx="1994536" cy="884872"/>
-            </a:xfrm>
-            <a:prstGeom prst="straightConnector1">
-              <a:avLst/>
-            </a:prstGeom>
-            <a:ln w="25400">
-              <a:solidFill>
-                <a:schemeClr val="tx1">
-                  <a:lumMod val="75000"/>
-                  <a:lumOff val="25000"/>
-                </a:schemeClr>
-              </a:solidFill>
-              <a:tailEnd type="triangle"/>
-            </a:ln>
-          </p:spPr>
-          <p:style>
-            <a:lnRef idx="1">
-              <a:schemeClr val="accent1"/>
-            </a:lnRef>
-            <a:fillRef idx="0">
-              <a:schemeClr val="accent1"/>
-            </a:fillRef>
-            <a:effectRef idx="0">
-              <a:schemeClr val="accent1"/>
-            </a:effectRef>
-            <a:fontRef idx="minor">
-              <a:schemeClr val="tx1"/>
-            </a:fontRef>
-          </p:style>
-        </p:cxnSp>
-        <p:sp>
-          <p:nvSpPr>
-            <p:cNvPr id="17" name="Oval 16">
-              <a:extLst>
-                <a:ext uri="{FF2B5EF4-FFF2-40B4-BE49-F238E27FC236}">
-                  <a16:creationId xmlns:a16="http://schemas.microsoft.com/office/drawing/2014/main" id="{493B321D-DEC4-E748-AB34-3280A9551BCE}"/>
-                </a:ext>
-              </a:extLst>
-            </p:cNvPr>
-            <p:cNvSpPr/>
-            <p:nvPr/>
-          </p:nvSpPr>
-          <p:spPr>
-            <a:xfrm>
-              <a:off x="6095999" y="182880"/>
-              <a:ext cx="3771900" cy="1931670"/>
-            </a:xfrm>
-            <a:prstGeom prst="ellipse">
-              <a:avLst/>
-            </a:prstGeom>
-            <a:ln w="25400">
-              <a:solidFill>
-                <a:schemeClr val="tx1">
-                  <a:lumMod val="75000"/>
-                  <a:lumOff val="25000"/>
-                </a:schemeClr>
-              </a:solidFill>
-              <a:tailEnd type="triangle"/>
-            </a:ln>
-          </p:spPr>
-          <p:style>
-            <a:lnRef idx="1">
-              <a:schemeClr val="accent1"/>
-            </a:lnRef>
-            <a:fillRef idx="0">
-              <a:schemeClr val="accent1"/>
-            </a:fillRef>
-            <a:effectRef idx="0">
-              <a:schemeClr val="accent1"/>
-            </a:effectRef>
-            <a:fontRef idx="minor">
-              <a:schemeClr val="tx1"/>
-            </a:fontRef>
-          </p:style>
-          <p:txBody>
-            <a:bodyPr rtlCol="0" anchor="ctr"/>
-            <a:lstStyle/>
-            <a:p>
-              <a:pPr algn="ctr"/>
-              <a:endParaRPr lang="en-US"/>
-            </a:p>
-          </p:txBody>
-        </p:sp>
-        <mc:AlternateContent xmlns:mc="http://schemas.openxmlformats.org/markup-compatibility/2006" xmlns:a14="http://schemas.microsoft.com/office/drawing/2010/main">
-          <mc:Choice Requires="a14">
-            <p:sp>
-              <p:nvSpPr>
-                <p:cNvPr id="18" name="TextBox 17">
-                  <a:extLst>
-                    <a:ext uri="{FF2B5EF4-FFF2-40B4-BE49-F238E27FC236}">
-                      <a16:creationId xmlns:a16="http://schemas.microsoft.com/office/drawing/2014/main" id="{740BB39A-A8AD-1F4B-B638-6BD43DB4D5DB}"/>
-                    </a:ext>
-                  </a:extLst>
-                </p:cNvPr>
-                <p:cNvSpPr txBox="1"/>
-                <p:nvPr/>
-              </p:nvSpPr>
-              <p:spPr>
-                <a:xfrm>
-                  <a:off x="9064057" y="814180"/>
-                  <a:ext cx="525713" cy="615553"/>
-                </a:xfrm>
-                <a:prstGeom prst="rect">
-                  <a:avLst/>
-                </a:prstGeom>
-                <a:noFill/>
-              </p:spPr>
-              <p:txBody>
-                <a:bodyPr wrap="square" lIns="0" tIns="0" rIns="0" bIns="0" rtlCol="0">
-                  <a:spAutoFit/>
-                </a:bodyPr>
-                <a:lstStyle/>
-                <a:p>
-                  <a:pPr/>
-                  <a14:m>
-                    <m:oMathPara xmlns:m="http://schemas.openxmlformats.org/officeDocument/2006/math">
-                      <m:oMath>
-                        <m:r>
-                          <a:rPr lang="en-US" sz="4000" i="1" smtClean="0">
-                            <a:latin typeface="Cambria Math" panose="02040503050406030204" pitchFamily="18" charset="0"/>
-                            <a:ea typeface="Cambria Math" panose="02040503050406030204" pitchFamily="18" charset="0"/>
-                          </a:rPr>
-                          <m:t>𝜀</m:t>
-                        </m:r>
-                      </m:oMath>
-                    </m:oMathPara>
-                  </a14:m>
-                  <a:endParaRPr lang="en-US" sz="4000" dirty="0"/>
-                </a:p>
-              </p:txBody>
-            </p:sp>
-          </mc:Choice>
-          <mc:Fallback xmlns="">
-            <p:sp>
-              <p:nvSpPr>
-                <p:cNvPr id="18" name="TextBox 17">
-                  <a:extLst>
-                    <a:ext uri="{FF2B5EF4-FFF2-40B4-BE49-F238E27FC236}">
-                      <a16:creationId xmlns:a16="http://schemas.microsoft.com/office/drawing/2014/main" id="{740BB39A-A8AD-1F4B-B638-6BD43DB4D5DB}"/>
-                    </a:ext>
-                  </a:extLst>
-                </p:cNvPr>
-                <p:cNvSpPr txBox="1">
-                  <a:spLocks noRot="1" noChangeAspect="1" noMove="1" noResize="1" noEditPoints="1" noAdjustHandles="1" noChangeArrowheads="1" noChangeShapeType="1" noTextEdit="1"/>
-                </p:cNvSpPr>
-                <p:nvPr/>
-              </p:nvSpPr>
-              <p:spPr>
-                <a:xfrm>
-                  <a:off x="9064057" y="814180"/>
-                  <a:ext cx="525713" cy="615553"/>
-                </a:xfrm>
-                <a:prstGeom prst="rect">
-                  <a:avLst/>
-                </a:prstGeom>
-                <a:blipFill>
-                  <a:blip r:embed="rId2"/>
-                  <a:stretch>
-                    <a:fillRect/>
-                  </a:stretch>
-                </a:blipFill>
-              </p:spPr>
-              <p:txBody>
-                <a:bodyPr/>
-                <a:lstStyle/>
-                <a:p>
-                  <a:r>
-                    <a:rPr lang="en-GB">
-                      <a:noFill/>
-                    </a:rPr>
-                    <a:t> </a:t>
-                  </a:r>
-                </a:p>
-              </p:txBody>
-            </p:sp>
-          </mc:Fallback>
-        </mc:AlternateContent>
-      </p:grpSp>
-      <p:sp>
-        <p:nvSpPr>
-          <p:cNvPr id="7" name="TextBox 6">
-            <a:extLst>
-              <a:ext uri="{FF2B5EF4-FFF2-40B4-BE49-F238E27FC236}">
-                <a16:creationId xmlns:a16="http://schemas.microsoft.com/office/drawing/2014/main" id="{E508EAD4-68E1-F15C-F167-E2893283D8A2}"/>
-              </a:ext>
-            </a:extLst>
-          </p:cNvPr>
-          <p:cNvSpPr txBox="1"/>
-          <p:nvPr/>
-        </p:nvSpPr>
-        <p:spPr>
-          <a:xfrm>
-            <a:off x="847880" y="696714"/>
-            <a:ext cx="10378126" cy="1815882"/>
-          </a:xfrm>
-          <a:prstGeom prst="rect">
-            <a:avLst/>
-          </a:prstGeom>
-          <a:noFill/>
-        </p:spPr>
-        <p:txBody>
-          <a:bodyPr wrap="square">
-            <a:spAutoFit/>
-          </a:bodyPr>
-          <a:lstStyle/>
-          <a:p>
-            <a:r>
-              <a:rPr lang="en-GB" sz="2800" dirty="0"/>
-              <a:t>The </a:t>
-            </a:r>
-            <a:r>
-              <a:rPr lang="en-GB" sz="2800" dirty="0">
-                <a:effectLst/>
-              </a:rPr>
-              <a:t>relationship between the instrument Z, the endogenous variable X, and the dependent variable Y.</a:t>
-            </a:r>
-          </a:p>
-          <a:p>
-            <a:br>
-              <a:rPr lang="en-GB" sz="2800" dirty="0">
-                <a:effectLst/>
-              </a:rPr>
-            </a:br>
-            <a:endParaRPr lang="en-GB" sz="2800" dirty="0">
               <a:effectLst/>
+              <a:latin typeface="Source Sans Pro" panose="020B0503030403020204" pitchFamily="34" charset="0"/>
             </a:endParaRPr>
+          </a:p>
+          <a:p>
+            <a:pPr marL="514350" indent="-514350">
+              <a:buFont typeface="+mj-lt"/>
+              <a:buAutoNum type="arabicPeriod"/>
+            </a:pPr>
+            <a:endParaRPr lang="en-GB" dirty="0"/>
           </a:p>
         </p:txBody>
       </p:sp>
     </p:spTree>
     <p:extLst>
       <p:ext uri="{BB962C8B-B14F-4D97-AF65-F5344CB8AC3E}">
-        <p14:creationId xmlns:p14="http://schemas.microsoft.com/office/powerpoint/2010/main" val="351993274"/>
+        <p14:creationId xmlns:p14="http://schemas.microsoft.com/office/powerpoint/2010/main" val="3210662713"/>
       </p:ext>
     </p:extLst>
   </p:cSld>

--- a/Endogeneity.pptx
+++ b/Endogeneity.pptx
@@ -17,18 +17,20 @@
     <p:sldId id="256" r:id="rId11"/>
     <p:sldId id="281" r:id="rId12"/>
     <p:sldId id="282" r:id="rId13"/>
-    <p:sldId id="283" r:id="rId14"/>
-    <p:sldId id="257" r:id="rId15"/>
-    <p:sldId id="258" r:id="rId16"/>
-    <p:sldId id="260" r:id="rId17"/>
-    <p:sldId id="261" r:id="rId18"/>
-    <p:sldId id="272" r:id="rId19"/>
-    <p:sldId id="262" r:id="rId20"/>
-    <p:sldId id="263" r:id="rId21"/>
-    <p:sldId id="273" r:id="rId22"/>
-    <p:sldId id="274" r:id="rId23"/>
-    <p:sldId id="466" r:id="rId24"/>
-    <p:sldId id="284" r:id="rId25"/>
+    <p:sldId id="467" r:id="rId14"/>
+    <p:sldId id="468" r:id="rId15"/>
+    <p:sldId id="283" r:id="rId16"/>
+    <p:sldId id="257" r:id="rId17"/>
+    <p:sldId id="258" r:id="rId18"/>
+    <p:sldId id="260" r:id="rId19"/>
+    <p:sldId id="261" r:id="rId20"/>
+    <p:sldId id="272" r:id="rId21"/>
+    <p:sldId id="262" r:id="rId22"/>
+    <p:sldId id="263" r:id="rId23"/>
+    <p:sldId id="273" r:id="rId24"/>
+    <p:sldId id="274" r:id="rId25"/>
+    <p:sldId id="466" r:id="rId26"/>
+    <p:sldId id="284" r:id="rId27"/>
   </p:sldIdLst>
   <p:sldSz cx="12192000" cy="6858000"/>
   <p:notesSz cx="6858000" cy="9144000"/>
@@ -138,7 +140,7 @@
 <file path=ppt/revisionInfo.xml><?xml version="1.0" encoding="utf-8"?>
 <p1510:revInfo xmlns:a="http://schemas.openxmlformats.org/drawingml/2006/main" xmlns:r="http://schemas.openxmlformats.org/officeDocument/2006/relationships" xmlns:p1510="http://schemas.microsoft.com/office/powerpoint/2015/10/main">
   <p1510:revLst>
-    <p1510:client id="{69BBADDF-7ED2-49C9-9491-7A5646CCA949}" v="3" dt="2026-09-07T02:45:22.304"/>
+    <p1510:client id="{69BBADDF-7ED2-49C9-9491-7A5646CCA949}" v="46" dt="2026-09-08T07:47:21.325"/>
   </p1510:revLst>
 </p1510:revInfo>
 </file>
@@ -148,7 +150,7 @@
   <pc:docChgLst>
     <pc:chgData name="Daryanto, Ahmad" userId="61940c2a-8427-4576-9f17-0c8fab086415" providerId="ADAL" clId="{7843BEE4-BB9E-47EA-A812-8FBB036213D7}"/>
     <pc:docChg chg="custSel addSld delSld modSld sldOrd">
-      <pc:chgData name="Daryanto, Ahmad" userId="61940c2a-8427-4576-9f17-0c8fab086415" providerId="ADAL" clId="{7843BEE4-BB9E-47EA-A812-8FBB036213D7}" dt="2026-09-07T02:52:00.858" v="158" actId="20577"/>
+      <pc:chgData name="Daryanto, Ahmad" userId="61940c2a-8427-4576-9f17-0c8fab086415" providerId="ADAL" clId="{7843BEE4-BB9E-47EA-A812-8FBB036213D7}" dt="2026-09-08T07:49:38.247" v="644" actId="20577"/>
       <pc:docMkLst>
         <pc:docMk/>
       </pc:docMkLst>
@@ -172,6 +174,51 @@
             <pc:docMk/>
             <pc:sldMk cId="2087706263" sldId="275"/>
             <ac:spMk id="4" creationId="{6DFB1F7E-E43C-2278-7983-D22247A2C1B5}"/>
+          </ac:spMkLst>
+        </pc:spChg>
+      </pc:sldChg>
+      <pc:sldChg chg="modSp mod">
+        <pc:chgData name="Daryanto, Ahmad" userId="61940c2a-8427-4576-9f17-0c8fab086415" providerId="ADAL" clId="{7843BEE4-BB9E-47EA-A812-8FBB036213D7}" dt="2026-09-08T07:44:51.602" v="451" actId="20577"/>
+        <pc:sldMkLst>
+          <pc:docMk/>
+          <pc:sldMk cId="3210662713" sldId="280"/>
+        </pc:sldMkLst>
+        <pc:spChg chg="mod">
+          <ac:chgData name="Daryanto, Ahmad" userId="61940c2a-8427-4576-9f17-0c8fab086415" providerId="ADAL" clId="{7843BEE4-BB9E-47EA-A812-8FBB036213D7}" dt="2026-09-08T07:44:51.602" v="451" actId="20577"/>
+          <ac:spMkLst>
+            <pc:docMk/>
+            <pc:sldMk cId="3210662713" sldId="280"/>
+            <ac:spMk id="3" creationId="{742E7FD7-1F6A-9ED6-65B6-BD7678E29444}"/>
+          </ac:spMkLst>
+        </pc:spChg>
+      </pc:sldChg>
+      <pc:sldChg chg="modSp mod">
+        <pc:chgData name="Daryanto, Ahmad" userId="61940c2a-8427-4576-9f17-0c8fab086415" providerId="ADAL" clId="{7843BEE4-BB9E-47EA-A812-8FBB036213D7}" dt="2026-09-08T07:30:58.744" v="205" actId="6549"/>
+        <pc:sldMkLst>
+          <pc:docMk/>
+          <pc:sldMk cId="4248009383" sldId="281"/>
+        </pc:sldMkLst>
+        <pc:spChg chg="mod">
+          <ac:chgData name="Daryanto, Ahmad" userId="61940c2a-8427-4576-9f17-0c8fab086415" providerId="ADAL" clId="{7843BEE4-BB9E-47EA-A812-8FBB036213D7}" dt="2026-09-08T07:30:58.744" v="205" actId="6549"/>
+          <ac:spMkLst>
+            <pc:docMk/>
+            <pc:sldMk cId="4248009383" sldId="281"/>
+            <ac:spMk id="3" creationId="{EA5930FF-5551-9FB4-EDEA-30A0EF6386F1}"/>
+          </ac:spMkLst>
+        </pc:spChg>
+      </pc:sldChg>
+      <pc:sldChg chg="modSp">
+        <pc:chgData name="Daryanto, Ahmad" userId="61940c2a-8427-4576-9f17-0c8fab086415" providerId="ADAL" clId="{7843BEE4-BB9E-47EA-A812-8FBB036213D7}" dt="2026-09-08T07:36:44.275" v="250" actId="20577"/>
+        <pc:sldMkLst>
+          <pc:docMk/>
+          <pc:sldMk cId="1914927599" sldId="282"/>
+        </pc:sldMkLst>
+        <pc:spChg chg="mod">
+          <ac:chgData name="Daryanto, Ahmad" userId="61940c2a-8427-4576-9f17-0c8fab086415" providerId="ADAL" clId="{7843BEE4-BB9E-47EA-A812-8FBB036213D7}" dt="2026-09-08T07:36:44.275" v="250" actId="20577"/>
+          <ac:spMkLst>
+            <pc:docMk/>
+            <pc:sldMk cId="1914927599" sldId="282"/>
+            <ac:spMk id="3" creationId="{48825D17-972C-6CC3-5491-0315F6062A59}"/>
           </ac:spMkLst>
         </pc:spChg>
       </pc:sldChg>
@@ -220,6 +267,52 @@
           </ac:spMkLst>
         </pc:spChg>
       </pc:sldChg>
+      <pc:sldChg chg="modSp new mod">
+        <pc:chgData name="Daryanto, Ahmad" userId="61940c2a-8427-4576-9f17-0c8fab086415" providerId="ADAL" clId="{7843BEE4-BB9E-47EA-A812-8FBB036213D7}" dt="2026-09-08T07:40:12.603" v="408" actId="207"/>
+        <pc:sldMkLst>
+          <pc:docMk/>
+          <pc:sldMk cId="1500387184" sldId="467"/>
+        </pc:sldMkLst>
+        <pc:spChg chg="mod">
+          <ac:chgData name="Daryanto, Ahmad" userId="61940c2a-8427-4576-9f17-0c8fab086415" providerId="ADAL" clId="{7843BEE4-BB9E-47EA-A812-8FBB036213D7}" dt="2026-09-08T07:37:34.677" v="265" actId="20577"/>
+          <ac:spMkLst>
+            <pc:docMk/>
+            <pc:sldMk cId="1500387184" sldId="467"/>
+            <ac:spMk id="2" creationId="{39FFEA41-326F-8CB5-EA90-BE67747FB0C4}"/>
+          </ac:spMkLst>
+        </pc:spChg>
+        <pc:spChg chg="mod">
+          <ac:chgData name="Daryanto, Ahmad" userId="61940c2a-8427-4576-9f17-0c8fab086415" providerId="ADAL" clId="{7843BEE4-BB9E-47EA-A812-8FBB036213D7}" dt="2026-09-08T07:40:12.603" v="408" actId="207"/>
+          <ac:spMkLst>
+            <pc:docMk/>
+            <pc:sldMk cId="1500387184" sldId="467"/>
+            <ac:spMk id="3" creationId="{1B7CD825-0414-F580-15F4-3653502C40AB}"/>
+          </ac:spMkLst>
+        </pc:spChg>
+      </pc:sldChg>
+      <pc:sldChg chg="modSp new mod">
+        <pc:chgData name="Daryanto, Ahmad" userId="61940c2a-8427-4576-9f17-0c8fab086415" providerId="ADAL" clId="{7843BEE4-BB9E-47EA-A812-8FBB036213D7}" dt="2026-09-08T07:49:38.247" v="644" actId="20577"/>
+        <pc:sldMkLst>
+          <pc:docMk/>
+          <pc:sldMk cId="3086180913" sldId="468"/>
+        </pc:sldMkLst>
+        <pc:spChg chg="mod">
+          <ac:chgData name="Daryanto, Ahmad" userId="61940c2a-8427-4576-9f17-0c8fab086415" providerId="ADAL" clId="{7843BEE4-BB9E-47EA-A812-8FBB036213D7}" dt="2026-09-08T07:47:57.662" v="464" actId="20577"/>
+          <ac:spMkLst>
+            <pc:docMk/>
+            <pc:sldMk cId="3086180913" sldId="468"/>
+            <ac:spMk id="2" creationId="{7942BDB8-2374-4A3E-E1FB-6A119EE4617B}"/>
+          </ac:spMkLst>
+        </pc:spChg>
+        <pc:spChg chg="mod">
+          <ac:chgData name="Daryanto, Ahmad" userId="61940c2a-8427-4576-9f17-0c8fab086415" providerId="ADAL" clId="{7843BEE4-BB9E-47EA-A812-8FBB036213D7}" dt="2026-09-08T07:49:38.247" v="644" actId="20577"/>
+          <ac:spMkLst>
+            <pc:docMk/>
+            <pc:sldMk cId="3086180913" sldId="468"/>
+            <ac:spMk id="3" creationId="{0DA49F17-5DD3-22B7-963D-64E0936DA65D}"/>
+          </ac:spMkLst>
+        </pc:spChg>
+      </pc:sldChg>
     </pc:docChg>
   </pc:docChgLst>
 </pc:chgInfo>
@@ -374,7 +467,7 @@
           <a:p>
             <a:fld id="{F5DCFBB3-2397-5441-8DD5-BDF2C45F759B}" type="datetimeFigureOut">
               <a:rPr lang="en-US" smtClean="0"/>
-              <a:t>9/7/2026</a:t>
+              <a:t>9/8/2026</a:t>
             </a:fld>
             <a:endParaRPr lang="en-US"/>
           </a:p>
@@ -574,7 +667,7 @@
           <a:p>
             <a:fld id="{F5DCFBB3-2397-5441-8DD5-BDF2C45F759B}" type="datetimeFigureOut">
               <a:rPr lang="en-US" smtClean="0"/>
-              <a:t>9/7/2026</a:t>
+              <a:t>9/8/2026</a:t>
             </a:fld>
             <a:endParaRPr lang="en-US"/>
           </a:p>
@@ -784,7 +877,7 @@
           <a:p>
             <a:fld id="{F5DCFBB3-2397-5441-8DD5-BDF2C45F759B}" type="datetimeFigureOut">
               <a:rPr lang="en-US" smtClean="0"/>
-              <a:t>9/7/2026</a:t>
+              <a:t>9/8/2026</a:t>
             </a:fld>
             <a:endParaRPr lang="en-US"/>
           </a:p>
@@ -984,7 +1077,7 @@
           <a:p>
             <a:fld id="{F5DCFBB3-2397-5441-8DD5-BDF2C45F759B}" type="datetimeFigureOut">
               <a:rPr lang="en-US" smtClean="0"/>
-              <a:t>9/7/2026</a:t>
+              <a:t>9/8/2026</a:t>
             </a:fld>
             <a:endParaRPr lang="en-US"/>
           </a:p>
@@ -1260,7 +1353,7 @@
           <a:p>
             <a:fld id="{F5DCFBB3-2397-5441-8DD5-BDF2C45F759B}" type="datetimeFigureOut">
               <a:rPr lang="en-US" smtClean="0"/>
-              <a:t>9/7/2026</a:t>
+              <a:t>9/8/2026</a:t>
             </a:fld>
             <a:endParaRPr lang="en-US"/>
           </a:p>
@@ -1528,7 +1621,7 @@
           <a:p>
             <a:fld id="{F5DCFBB3-2397-5441-8DD5-BDF2C45F759B}" type="datetimeFigureOut">
               <a:rPr lang="en-US" smtClean="0"/>
-              <a:t>9/7/2026</a:t>
+              <a:t>9/8/2026</a:t>
             </a:fld>
             <a:endParaRPr lang="en-US"/>
           </a:p>
@@ -1943,7 +2036,7 @@
           <a:p>
             <a:fld id="{F5DCFBB3-2397-5441-8DD5-BDF2C45F759B}" type="datetimeFigureOut">
               <a:rPr lang="en-US" smtClean="0"/>
-              <a:t>9/7/2026</a:t>
+              <a:t>9/8/2026</a:t>
             </a:fld>
             <a:endParaRPr lang="en-US"/>
           </a:p>
@@ -2085,7 +2178,7 @@
           <a:p>
             <a:fld id="{F5DCFBB3-2397-5441-8DD5-BDF2C45F759B}" type="datetimeFigureOut">
               <a:rPr lang="en-US" smtClean="0"/>
-              <a:t>9/7/2026</a:t>
+              <a:t>9/8/2026</a:t>
             </a:fld>
             <a:endParaRPr lang="en-US"/>
           </a:p>
@@ -2198,7 +2291,7 @@
           <a:p>
             <a:fld id="{F5DCFBB3-2397-5441-8DD5-BDF2C45F759B}" type="datetimeFigureOut">
               <a:rPr lang="en-US" smtClean="0"/>
-              <a:t>9/7/2026</a:t>
+              <a:t>9/8/2026</a:t>
             </a:fld>
             <a:endParaRPr lang="en-US"/>
           </a:p>
@@ -2511,7 +2604,7 @@
           <a:p>
             <a:fld id="{F5DCFBB3-2397-5441-8DD5-BDF2C45F759B}" type="datetimeFigureOut">
               <a:rPr lang="en-US" smtClean="0"/>
-              <a:t>9/7/2026</a:t>
+              <a:t>9/8/2026</a:t>
             </a:fld>
             <a:endParaRPr lang="en-US"/>
           </a:p>
@@ -2800,7 +2893,7 @@
           <a:p>
             <a:fld id="{F5DCFBB3-2397-5441-8DD5-BDF2C45F759B}" type="datetimeFigureOut">
               <a:rPr lang="en-US" smtClean="0"/>
-              <a:t>9/7/2026</a:t>
+              <a:t>9/8/2026</a:t>
             </a:fld>
             <a:endParaRPr lang="en-US"/>
           </a:p>
@@ -3043,7 +3136,7 @@
           <a:p>
             <a:fld id="{F5DCFBB3-2397-5441-8DD5-BDF2C45F759B}" type="datetimeFigureOut">
               <a:rPr lang="en-US" smtClean="0"/>
-              <a:t>9/7/2026</a:t>
+              <a:t>9/8/2026</a:t>
             </a:fld>
             <a:endParaRPr lang="en-US"/>
           </a:p>
@@ -4441,7 +4534,7 @@
                 </a:solidFill>
                 <a:latin typeface="Source Sans Pro" panose="020B0503030403020204" pitchFamily="34" charset="0"/>
               </a:rPr>
-              <a:t>Z is the hard to find in practice.</a:t>
+              <a:t>Z is challenging to find.</a:t>
             </a:r>
             <a:br>
               <a:rPr lang="en-GB" dirty="0"/>
@@ -4508,8 +4601,8 @@
           </a:p>
         </p:txBody>
       </p:sp>
-      <mc:AlternateContent xmlns:mc="http://schemas.openxmlformats.org/markup-compatibility/2006" xmlns:a14="http://schemas.microsoft.com/office/drawing/2010/main">
-        <mc:Choice Requires="a14">
+      <mc:AlternateContent xmlns:mc="http://schemas.openxmlformats.org/markup-compatibility/2006">
+        <mc:Choice xmlns:a14="http://schemas.microsoft.com/office/drawing/2010/main" Requires="a14">
           <p:sp>
             <p:nvSpPr>
               <p:cNvPr id="3" name="Content Placeholder 2">
@@ -4561,7 +4654,7 @@
                     <a:effectLst/>
                     <a:latin typeface="Source Sans Pro" panose="020B0503030403020204" pitchFamily="34" charset="0"/>
                   </a:rPr>
-                  <a:t>Stage 1: Z is regressed on </a:t>
+                  <a:t>Stage 1: </a:t>
                 </a:r>
                 <a:r>
                   <a:rPr lang="en-GB" b="0" i="1" u="none" strike="noStrike" dirty="0">
@@ -4571,7 +4664,7 @@
                     <a:effectLst/>
                     <a:latin typeface="Source Sans Pro" panose="020B0503030403020204" pitchFamily="34" charset="0"/>
                   </a:rPr>
-                  <a:t>MUSIC</a:t>
+                  <a:t>MUSIC is regressed on Z</a:t>
                 </a:r>
                 <a:r>
                   <a:rPr lang="en-GB" b="0" i="0" u="none" strike="noStrike" dirty="0">
@@ -4663,7 +4756,7 @@
                     <a:effectLst/>
                     <a:latin typeface="Source Sans Pro" panose="020B0503030403020204" pitchFamily="34" charset="0"/>
                   </a:rPr>
-                  <a:t> is regression on </a:t>
+                  <a:t> is regressed on </a:t>
                 </a:r>
                 <a14:m>
                   <m:oMath xmlns:m="http://schemas.openxmlformats.org/officeDocument/2006/math">
@@ -4841,7 +4934,7 @@
             </p:txBody>
           </p:sp>
         </mc:Choice>
-        <mc:Fallback xmlns="">
+        <mc:Fallback>
           <p:sp>
             <p:nvSpPr>
               <p:cNvPr id="3" name="Content Placeholder 2">
@@ -4862,7 +4955,7 @@
               <a:blipFill>
                 <a:blip r:embed="rId2"/>
                 <a:stretch>
-                  <a:fillRect l="-1086" t="-2326"/>
+                  <a:fillRect l="-1043" t="-2381"/>
                 </a:stretch>
               </a:blipFill>
             </p:spPr>
@@ -4895,6 +4988,220 @@
 </file>
 
 <file path=ppt/slides/slide13.xml><?xml version="1.0" encoding="utf-8"?>
+<p:sld xmlns:a="http://schemas.openxmlformats.org/drawingml/2006/main" xmlns:r="http://schemas.openxmlformats.org/officeDocument/2006/relationships" xmlns:p="http://schemas.openxmlformats.org/presentationml/2006/main">
+  <p:cSld>
+    <p:spTree>
+      <p:nvGrpSpPr>
+        <p:cNvPr id="1" name=""/>
+        <p:cNvGrpSpPr/>
+        <p:nvPr/>
+      </p:nvGrpSpPr>
+      <p:grpSpPr>
+        <a:xfrm>
+          <a:off x="0" y="0"/>
+          <a:ext cx="0" cy="0"/>
+          <a:chOff x="0" y="0"/>
+          <a:chExt cx="0" cy="0"/>
+        </a:xfrm>
+      </p:grpSpPr>
+      <p:sp>
+        <p:nvSpPr>
+          <p:cNvPr id="2" name="Title 1">
+            <a:extLst>
+              <a:ext uri="{FF2B5EF4-FFF2-40B4-BE49-F238E27FC236}">
+                <a16:creationId xmlns:a16="http://schemas.microsoft.com/office/drawing/2014/main" id="{39FFEA41-326F-8CB5-EA90-BE67747FB0C4}"/>
+              </a:ext>
+            </a:extLst>
+          </p:cNvPr>
+          <p:cNvSpPr>
+            <a:spLocks noGrp="1"/>
+          </p:cNvSpPr>
+          <p:nvPr>
+            <p:ph type="title"/>
+          </p:nvPr>
+        </p:nvSpPr>
+        <p:spPr/>
+        <p:txBody>
+          <a:bodyPr/>
+          <a:lstStyle/>
+          <a:p>
+            <a:r>
+              <a:rPr lang="en-GB" dirty="0"/>
+              <a:t>What is our Z?</a:t>
+            </a:r>
+          </a:p>
+        </p:txBody>
+      </p:sp>
+      <p:sp>
+        <p:nvSpPr>
+          <p:cNvPr id="3" name="Content Placeholder 2">
+            <a:extLst>
+              <a:ext uri="{FF2B5EF4-FFF2-40B4-BE49-F238E27FC236}">
+                <a16:creationId xmlns:a16="http://schemas.microsoft.com/office/drawing/2014/main" id="{1B7CD825-0414-F580-15F4-3653502C40AB}"/>
+              </a:ext>
+            </a:extLst>
+          </p:cNvPr>
+          <p:cNvSpPr>
+            <a:spLocks noGrp="1"/>
+          </p:cNvSpPr>
+          <p:nvPr>
+            <p:ph idx="1"/>
+          </p:nvPr>
+        </p:nvSpPr>
+        <p:spPr/>
+        <p:txBody>
+          <a:bodyPr/>
+          <a:lstStyle/>
+          <a:p>
+            <a:r>
+              <a:rPr lang="en-GB" dirty="0"/>
+              <a:t>The number of CDs owned by an individual</a:t>
+            </a:r>
+          </a:p>
+          <a:p>
+            <a:r>
+              <a:rPr lang="en-GB" dirty="0">
+                <a:solidFill>
+                  <a:srgbClr val="FF0000"/>
+                </a:solidFill>
+              </a:rPr>
+              <a:t>Does it satisfy the relevance and exclusion restriction assumption?</a:t>
+            </a:r>
+          </a:p>
+        </p:txBody>
+      </p:sp>
+    </p:spTree>
+    <p:extLst>
+      <p:ext uri="{BB962C8B-B14F-4D97-AF65-F5344CB8AC3E}">
+        <p14:creationId xmlns:p14="http://schemas.microsoft.com/office/powerpoint/2010/main" val="1500387184"/>
+      </p:ext>
+    </p:extLst>
+  </p:cSld>
+  <p:clrMapOvr>
+    <a:masterClrMapping/>
+  </p:clrMapOvr>
+</p:sld>
+</file>
+
+<file path=ppt/slides/slide14.xml><?xml version="1.0" encoding="utf-8"?>
+<p:sld xmlns:a="http://schemas.openxmlformats.org/drawingml/2006/main" xmlns:r="http://schemas.openxmlformats.org/officeDocument/2006/relationships" xmlns:p="http://schemas.openxmlformats.org/presentationml/2006/main">
+  <p:cSld>
+    <p:spTree>
+      <p:nvGrpSpPr>
+        <p:cNvPr id="1" name=""/>
+        <p:cNvGrpSpPr/>
+        <p:nvPr/>
+      </p:nvGrpSpPr>
+      <p:grpSpPr>
+        <a:xfrm>
+          <a:off x="0" y="0"/>
+          <a:ext cx="0" cy="0"/>
+          <a:chOff x="0" y="0"/>
+          <a:chExt cx="0" cy="0"/>
+        </a:xfrm>
+      </p:grpSpPr>
+      <p:sp>
+        <p:nvSpPr>
+          <p:cNvPr id="2" name="Title 1">
+            <a:extLst>
+              <a:ext uri="{FF2B5EF4-FFF2-40B4-BE49-F238E27FC236}">
+                <a16:creationId xmlns:a16="http://schemas.microsoft.com/office/drawing/2014/main" id="{7942BDB8-2374-4A3E-E1FB-6A119EE4617B}"/>
+              </a:ext>
+            </a:extLst>
+          </p:cNvPr>
+          <p:cNvSpPr>
+            <a:spLocks noGrp="1"/>
+          </p:cNvSpPr>
+          <p:nvPr>
+            <p:ph type="title"/>
+          </p:nvPr>
+        </p:nvSpPr>
+        <p:spPr/>
+        <p:txBody>
+          <a:bodyPr/>
+          <a:lstStyle/>
+          <a:p>
+            <a:r>
+              <a:rPr lang="en-GB" dirty="0"/>
+              <a:t>Arguments</a:t>
+            </a:r>
+          </a:p>
+        </p:txBody>
+      </p:sp>
+      <p:sp>
+        <p:nvSpPr>
+          <p:cNvPr id="3" name="Content Placeholder 2">
+            <a:extLst>
+              <a:ext uri="{FF2B5EF4-FFF2-40B4-BE49-F238E27FC236}">
+                <a16:creationId xmlns:a16="http://schemas.microsoft.com/office/drawing/2014/main" id="{0DA49F17-5DD3-22B7-963D-64E0936DA65D}"/>
+              </a:ext>
+            </a:extLst>
+          </p:cNvPr>
+          <p:cNvSpPr>
+            <a:spLocks noGrp="1"/>
+          </p:cNvSpPr>
+          <p:nvPr>
+            <p:ph idx="1"/>
+          </p:nvPr>
+        </p:nvSpPr>
+        <p:spPr/>
+        <p:txBody>
+          <a:bodyPr>
+            <a:normAutofit lnSpcReduction="10000"/>
+          </a:bodyPr>
+          <a:lstStyle/>
+          <a:p>
+            <a:pPr marL="342900" lvl="0" indent="-342900" fontAlgn="t"/>
+            <a:r>
+              <a:rPr lang="en-GB" b="1" dirty="0"/>
+              <a:t>Relevance:</a:t>
+            </a:r>
+            <a:r>
+              <a:rPr lang="en-GB" dirty="0"/>
+              <a:t> Individuals who own more CDs are more involved with music and therefore likely to have stronger attitudes toward the barbershop's background music.</a:t>
+            </a:r>
+          </a:p>
+          <a:p>
+            <a:pPr marL="342900" lvl="0" indent="-342900" fontAlgn="t"/>
+            <a:r>
+              <a:rPr lang="en-GB" b="1" dirty="0"/>
+              <a:t>Exclusion restriction:</a:t>
+            </a:r>
+            <a:r>
+              <a:rPr lang="en-GB" dirty="0"/>
+              <a:t> CD ownership influences revisit intentions only through customers' evaluations of the background music and has no independent effect on barbershop choice.</a:t>
+            </a:r>
+          </a:p>
+          <a:p>
+            <a:pPr marL="342900" lvl="0" indent="-342900" fontAlgn="t"/>
+            <a:r>
+              <a:rPr lang="en-GB" b="1" dirty="0"/>
+              <a:t>Caveat:</a:t>
+            </a:r>
+            <a:r>
+              <a:rPr lang="en-GB" dirty="0"/>
+              <a:t> CD may be a weak instrument, which does not fully support the exclusion restriction. This is because CD ownership may be a proxy for broader music-related lifestyles and atmosphere preferences that directly affect revisit intentions. Consequently, CD is a plausible but not a strong instrument.</a:t>
+            </a:r>
+          </a:p>
+          <a:p>
+            <a:endParaRPr lang="en-GB" dirty="0"/>
+          </a:p>
+        </p:txBody>
+      </p:sp>
+    </p:spTree>
+    <p:extLst>
+      <p:ext uri="{BB962C8B-B14F-4D97-AF65-F5344CB8AC3E}">
+        <p14:creationId xmlns:p14="http://schemas.microsoft.com/office/powerpoint/2010/main" val="3086180913"/>
+      </p:ext>
+    </p:extLst>
+  </p:cSld>
+  <p:clrMapOvr>
+    <a:masterClrMapping/>
+  </p:clrMapOvr>
+</p:sld>
+</file>
+
+<file path=ppt/slides/slide15.xml><?xml version="1.0" encoding="utf-8"?>
 <p:sld xmlns:a="http://schemas.openxmlformats.org/drawingml/2006/main" xmlns:r="http://schemas.openxmlformats.org/officeDocument/2006/relationships" xmlns:p="http://schemas.openxmlformats.org/presentationml/2006/main">
   <p:cSld>
     <p:spTree>
@@ -5762,7 +6069,7 @@
 </p:sld>
 </file>
 
-<file path=ppt/slides/slide14.xml><?xml version="1.0" encoding="utf-8"?>
+<file path=ppt/slides/slide16.xml><?xml version="1.0" encoding="utf-8"?>
 <p:sld xmlns:a="http://schemas.openxmlformats.org/drawingml/2006/main" xmlns:r="http://schemas.openxmlformats.org/officeDocument/2006/relationships" xmlns:p="http://schemas.openxmlformats.org/presentationml/2006/main">
   <p:cSld>
     <p:spTree>
@@ -5920,7 +6227,7 @@
 </p:sld>
 </file>
 
-<file path=ppt/slides/slide15.xml><?xml version="1.0" encoding="utf-8"?>
+<file path=ppt/slides/slide17.xml><?xml version="1.0" encoding="utf-8"?>
 <p:sld xmlns:a="http://schemas.openxmlformats.org/drawingml/2006/main" xmlns:r="http://schemas.openxmlformats.org/officeDocument/2006/relationships" xmlns:p="http://schemas.openxmlformats.org/presentationml/2006/main">
   <p:cSld>
     <p:spTree>
@@ -6292,7 +6599,7 @@
 </p:sld>
 </file>
 
-<file path=ppt/slides/slide16.xml><?xml version="1.0" encoding="utf-8"?>
+<file path=ppt/slides/slide18.xml><?xml version="1.0" encoding="utf-8"?>
 <p:sld xmlns:a="http://schemas.openxmlformats.org/drawingml/2006/main" xmlns:r="http://schemas.openxmlformats.org/officeDocument/2006/relationships" xmlns:p="http://schemas.openxmlformats.org/presentationml/2006/main">
   <p:cSld>
     <p:spTree>
@@ -6378,416 +6685,6 @@
     <p:extLst>
       <p:ext uri="{BB962C8B-B14F-4D97-AF65-F5344CB8AC3E}">
         <p14:creationId xmlns:p14="http://schemas.microsoft.com/office/powerpoint/2010/main" val="2167213104"/>
-      </p:ext>
-    </p:extLst>
-  </p:cSld>
-  <p:clrMapOvr>
-    <a:masterClrMapping/>
-  </p:clrMapOvr>
-</p:sld>
-</file>
-
-<file path=ppt/slides/slide17.xml><?xml version="1.0" encoding="utf-8"?>
-<p:sld xmlns:a="http://schemas.openxmlformats.org/drawingml/2006/main" xmlns:r="http://schemas.openxmlformats.org/officeDocument/2006/relationships" xmlns:p="http://schemas.openxmlformats.org/presentationml/2006/main">
-  <p:cSld>
-    <p:spTree>
-      <p:nvGrpSpPr>
-        <p:cNvPr id="1" name=""/>
-        <p:cNvGrpSpPr/>
-        <p:nvPr/>
-      </p:nvGrpSpPr>
-      <p:grpSpPr>
-        <a:xfrm>
-          <a:off x="0" y="0"/>
-          <a:ext cx="0" cy="0"/>
-          <a:chOff x="0" y="0"/>
-          <a:chExt cx="0" cy="0"/>
-        </a:xfrm>
-      </p:grpSpPr>
-      <p:pic>
-        <p:nvPicPr>
-          <p:cNvPr id="3" name="Picture 2">
-            <a:extLst>
-              <a:ext uri="{FF2B5EF4-FFF2-40B4-BE49-F238E27FC236}">
-                <a16:creationId xmlns:a16="http://schemas.microsoft.com/office/drawing/2014/main" id="{C28292AB-F74E-A409-FF5F-E5A230AD921E}"/>
-              </a:ext>
-            </a:extLst>
-          </p:cNvPr>
-          <p:cNvPicPr>
-            <a:picLocks noChangeAspect="1"/>
-          </p:cNvPicPr>
-          <p:nvPr/>
-        </p:nvPicPr>
-        <p:blipFill>
-          <a:blip r:embed="rId2"/>
-          <a:stretch>
-            <a:fillRect/>
-          </a:stretch>
-        </p:blipFill>
-        <p:spPr>
-          <a:xfrm>
-            <a:off x="753631" y="88900"/>
-            <a:ext cx="6823937" cy="6858000"/>
-          </a:xfrm>
-          <a:prstGeom prst="rect">
-            <a:avLst/>
-          </a:prstGeom>
-        </p:spPr>
-      </p:pic>
-      <p:sp>
-        <p:nvSpPr>
-          <p:cNvPr id="2" name="TextBox 1">
-            <a:extLst>
-              <a:ext uri="{FF2B5EF4-FFF2-40B4-BE49-F238E27FC236}">
-                <a16:creationId xmlns:a16="http://schemas.microsoft.com/office/drawing/2014/main" id="{18BCA09F-47AC-4C21-2D98-75BFE570103F}"/>
-              </a:ext>
-            </a:extLst>
-          </p:cNvPr>
-          <p:cNvSpPr txBox="1"/>
-          <p:nvPr/>
-        </p:nvSpPr>
-        <p:spPr>
-          <a:xfrm>
-            <a:off x="6096000" y="2184400"/>
-            <a:ext cx="4635500" cy="369332"/>
-          </a:xfrm>
-          <a:prstGeom prst="rect">
-            <a:avLst/>
-          </a:prstGeom>
-          <a:noFill/>
-        </p:spPr>
-        <p:txBody>
-          <a:bodyPr wrap="square" rtlCol="0">
-            <a:spAutoFit/>
-          </a:bodyPr>
-          <a:lstStyle/>
-          <a:p>
-            <a:r>
-              <a:rPr lang="en-GB" dirty="0"/>
-              <a:t>With TSLS, MUSIC is no longer significant</a:t>
-            </a:r>
-          </a:p>
-        </p:txBody>
-      </p:sp>
-    </p:spTree>
-    <p:extLst>
-      <p:ext uri="{BB962C8B-B14F-4D97-AF65-F5344CB8AC3E}">
-        <p14:creationId xmlns:p14="http://schemas.microsoft.com/office/powerpoint/2010/main" val="686734705"/>
-      </p:ext>
-    </p:extLst>
-  </p:cSld>
-  <p:clrMapOvr>
-    <a:masterClrMapping/>
-  </p:clrMapOvr>
-</p:sld>
-</file>
-
-<file path=ppt/slides/slide18.xml><?xml version="1.0" encoding="utf-8"?>
-<p:sld xmlns:a="http://schemas.openxmlformats.org/drawingml/2006/main" xmlns:r="http://schemas.openxmlformats.org/officeDocument/2006/relationships" xmlns:p="http://schemas.openxmlformats.org/presentationml/2006/main">
-  <p:cSld>
-    <p:spTree>
-      <p:nvGrpSpPr>
-        <p:cNvPr id="1" name=""/>
-        <p:cNvGrpSpPr/>
-        <p:nvPr/>
-      </p:nvGrpSpPr>
-      <p:grpSpPr>
-        <a:xfrm>
-          <a:off x="0" y="0"/>
-          <a:ext cx="0" cy="0"/>
-          <a:chOff x="0" y="0"/>
-          <a:chExt cx="0" cy="0"/>
-        </a:xfrm>
-      </p:grpSpPr>
-      <p:pic>
-        <p:nvPicPr>
-          <p:cNvPr id="2" name="Picture 1">
-            <a:extLst>
-              <a:ext uri="{FF2B5EF4-FFF2-40B4-BE49-F238E27FC236}">
-                <a16:creationId xmlns:a16="http://schemas.microsoft.com/office/drawing/2014/main" id="{96AAE875-152E-B615-650C-60DE87FDD285}"/>
-              </a:ext>
-            </a:extLst>
-          </p:cNvPr>
-          <p:cNvPicPr>
-            <a:picLocks noChangeAspect="1"/>
-          </p:cNvPicPr>
-          <p:nvPr/>
-        </p:nvPicPr>
-        <p:blipFill>
-          <a:blip r:embed="rId2"/>
-          <a:stretch>
-            <a:fillRect/>
-          </a:stretch>
-        </p:blipFill>
-        <p:spPr>
-          <a:xfrm>
-            <a:off x="6096000" y="1562100"/>
-            <a:ext cx="5945383" cy="4400172"/>
-          </a:xfrm>
-          <a:prstGeom prst="rect">
-            <a:avLst/>
-          </a:prstGeom>
-        </p:spPr>
-      </p:pic>
-      <p:sp>
-        <p:nvSpPr>
-          <p:cNvPr id="3" name="Title 2">
-            <a:extLst>
-              <a:ext uri="{FF2B5EF4-FFF2-40B4-BE49-F238E27FC236}">
-                <a16:creationId xmlns:a16="http://schemas.microsoft.com/office/drawing/2014/main" id="{24C58AAE-1855-DCC1-AF7E-28334C392CEC}"/>
-              </a:ext>
-            </a:extLst>
-          </p:cNvPr>
-          <p:cNvSpPr>
-            <a:spLocks noGrp="1"/>
-          </p:cNvSpPr>
-          <p:nvPr>
-            <p:ph type="title"/>
-          </p:nvPr>
-        </p:nvSpPr>
-        <p:spPr/>
-        <p:txBody>
-          <a:bodyPr/>
-          <a:lstStyle/>
-          <a:p>
-            <a:r>
-              <a:rPr lang="en-GB" b="1" i="0" u="none" strike="noStrike" dirty="0">
-                <a:solidFill>
-                  <a:srgbClr val="000000"/>
-                </a:solidFill>
-                <a:effectLst/>
-                <a:latin typeface="Source Sans Pro" panose="020B0503030403020204" pitchFamily="34" charset="0"/>
-              </a:rPr>
-              <a:t>Hausman’s specification test</a:t>
-            </a:r>
-            <a:br>
-              <a:rPr lang="en-GB" b="1" i="0" u="none" strike="noStrike" dirty="0">
-                <a:solidFill>
-                  <a:srgbClr val="000000"/>
-                </a:solidFill>
-                <a:effectLst/>
-                <a:latin typeface="Source Sans Pro" panose="020B0503030403020204" pitchFamily="34" charset="0"/>
-              </a:rPr>
-            </a:br>
-            <a:endParaRPr lang="en-GB" dirty="0"/>
-          </a:p>
-        </p:txBody>
-      </p:sp>
-      <p:sp>
-        <p:nvSpPr>
-          <p:cNvPr id="6" name="TextBox 5">
-            <a:extLst>
-              <a:ext uri="{FF2B5EF4-FFF2-40B4-BE49-F238E27FC236}">
-                <a16:creationId xmlns:a16="http://schemas.microsoft.com/office/drawing/2014/main" id="{889FA254-1DA0-89F0-CD9E-8E3DC314F270}"/>
-              </a:ext>
-            </a:extLst>
-          </p:cNvPr>
-          <p:cNvSpPr txBox="1"/>
-          <p:nvPr/>
-        </p:nvSpPr>
-        <p:spPr>
-          <a:xfrm>
-            <a:off x="342900" y="1690688"/>
-            <a:ext cx="6096000" cy="923330"/>
-          </a:xfrm>
-          <a:prstGeom prst="rect">
-            <a:avLst/>
-          </a:prstGeom>
-          <a:noFill/>
-        </p:spPr>
-        <p:txBody>
-          <a:bodyPr wrap="square">
-            <a:spAutoFit/>
-          </a:bodyPr>
-          <a:lstStyle/>
-          <a:p>
-            <a:pPr algn="l"/>
-            <a:r>
-              <a:rPr lang="en-GB" b="0" i="0" u="none" strike="noStrike" dirty="0">
-                <a:solidFill>
-                  <a:srgbClr val="000000"/>
-                </a:solidFill>
-                <a:effectLst/>
-                <a:latin typeface="Source Sans Pro" panose="020B0503030403020204" pitchFamily="34" charset="0"/>
-              </a:rPr>
-              <a:t>H0: MUSIC is an exogenous variable (OLS is better)</a:t>
-            </a:r>
-          </a:p>
-          <a:p>
-            <a:pPr algn="l"/>
-            <a:r>
-              <a:rPr lang="en-GB" b="0" i="0" u="none" strike="noStrike" dirty="0">
-                <a:solidFill>
-                  <a:srgbClr val="000000"/>
-                </a:solidFill>
-                <a:effectLst/>
-                <a:latin typeface="Source Sans Pro" panose="020B0503030403020204" pitchFamily="34" charset="0"/>
-              </a:rPr>
-              <a:t>H1: MUSIC is an endogenous variable </a:t>
-            </a:r>
-          </a:p>
-          <a:p>
-            <a:pPr algn="l"/>
-            <a:r>
-              <a:rPr lang="en-GB" b="0" i="0" u="none" strike="noStrike" dirty="0">
-                <a:solidFill>
-                  <a:srgbClr val="000000"/>
-                </a:solidFill>
-                <a:effectLst/>
-                <a:latin typeface="Source Sans Pro" panose="020B0503030403020204" pitchFamily="34" charset="0"/>
-              </a:rPr>
-              <a:t>(TSLS is better than OLS)</a:t>
-            </a:r>
-          </a:p>
-        </p:txBody>
-      </p:sp>
-      <p:sp>
-        <p:nvSpPr>
-          <p:cNvPr id="8" name="TextBox 7">
-            <a:extLst>
-              <a:ext uri="{FF2B5EF4-FFF2-40B4-BE49-F238E27FC236}">
-                <a16:creationId xmlns:a16="http://schemas.microsoft.com/office/drawing/2014/main" id="{E8C1FB43-672A-C4FB-ACD7-EBA485F72719}"/>
-              </a:ext>
-            </a:extLst>
-          </p:cNvPr>
-          <p:cNvSpPr txBox="1"/>
-          <p:nvPr/>
-        </p:nvSpPr>
-        <p:spPr>
-          <a:xfrm>
-            <a:off x="558800" y="3006537"/>
-            <a:ext cx="6096000" cy="646331"/>
-          </a:xfrm>
-          <a:prstGeom prst="rect">
-            <a:avLst/>
-          </a:prstGeom>
-          <a:noFill/>
-        </p:spPr>
-        <p:txBody>
-          <a:bodyPr wrap="square">
-            <a:spAutoFit/>
-          </a:bodyPr>
-          <a:lstStyle/>
-          <a:p>
-            <a:r>
-              <a:rPr lang="en-GB" b="0" i="0" u="none" strike="noStrike" dirty="0">
-                <a:solidFill>
-                  <a:srgbClr val="000000"/>
-                </a:solidFill>
-                <a:effectLst/>
-                <a:latin typeface="Source Sans Pro" panose="020B0503030403020204" pitchFamily="34" charset="0"/>
-              </a:rPr>
-              <a:t>To assess the significance of H1. You need to look at the significance of the ‘</a:t>
-            </a:r>
-            <a:r>
-              <a:rPr lang="en-GB" b="0" i="0" u="none" strike="noStrike" dirty="0" err="1">
-                <a:solidFill>
-                  <a:srgbClr val="000000"/>
-                </a:solidFill>
-                <a:effectLst/>
-                <a:latin typeface="Source Sans Pro" panose="020B0503030403020204" pitchFamily="34" charset="0"/>
-              </a:rPr>
-              <a:t>resid</a:t>
-            </a:r>
-            <a:r>
-              <a:rPr lang="en-GB" b="0" i="0" u="none" strike="noStrike" dirty="0">
-                <a:solidFill>
-                  <a:srgbClr val="000000"/>
-                </a:solidFill>
-                <a:effectLst/>
-                <a:latin typeface="Source Sans Pro" panose="020B0503030403020204" pitchFamily="34" charset="0"/>
-              </a:rPr>
-              <a:t>’ variable (i.e., resid1).</a:t>
-            </a:r>
-            <a:endParaRPr lang="en-GB" dirty="0"/>
-          </a:p>
-        </p:txBody>
-      </p:sp>
-      <p:sp>
-        <p:nvSpPr>
-          <p:cNvPr id="10" name="TextBox 9">
-            <a:extLst>
-              <a:ext uri="{FF2B5EF4-FFF2-40B4-BE49-F238E27FC236}">
-                <a16:creationId xmlns:a16="http://schemas.microsoft.com/office/drawing/2014/main" id="{9A40B538-CB72-59BD-C506-2EA7FCA85769}"/>
-              </a:ext>
-            </a:extLst>
-          </p:cNvPr>
-          <p:cNvSpPr txBox="1"/>
-          <p:nvPr/>
-        </p:nvSpPr>
-        <p:spPr>
-          <a:xfrm>
-            <a:off x="558800" y="4253572"/>
-            <a:ext cx="6096000" cy="923330"/>
-          </a:xfrm>
-          <a:prstGeom prst="rect">
-            <a:avLst/>
-          </a:prstGeom>
-          <a:noFill/>
-        </p:spPr>
-        <p:txBody>
-          <a:bodyPr wrap="square">
-            <a:spAutoFit/>
-          </a:bodyPr>
-          <a:lstStyle/>
-          <a:p>
-            <a:r>
-              <a:rPr lang="en-GB" b="0" i="0" u="none" strike="noStrike" dirty="0">
-                <a:solidFill>
-                  <a:srgbClr val="000000"/>
-                </a:solidFill>
-                <a:effectLst/>
-                <a:latin typeface="Source Sans Pro" panose="020B0503030403020204" pitchFamily="34" charset="0"/>
-              </a:rPr>
-              <a:t> H0 is rejected because resid1 is significant. </a:t>
-            </a:r>
-          </a:p>
-          <a:p>
-            <a:endParaRPr lang="en-GB" dirty="0">
-              <a:solidFill>
-                <a:srgbClr val="000000"/>
-              </a:solidFill>
-              <a:latin typeface="Source Sans Pro" panose="020B0503030403020204" pitchFamily="34" charset="0"/>
-            </a:endParaRPr>
-          </a:p>
-          <a:p>
-            <a:r>
-              <a:rPr lang="en-GB" b="0" i="0" u="none" strike="noStrike" dirty="0">
-                <a:solidFill>
-                  <a:srgbClr val="000000"/>
-                </a:solidFill>
-                <a:effectLst/>
-                <a:latin typeface="Source Sans Pro" panose="020B0503030403020204" pitchFamily="34" charset="0"/>
-              </a:rPr>
-              <a:t>Thus, </a:t>
-            </a:r>
-            <a:r>
-              <a:rPr lang="en-GB" dirty="0">
-                <a:solidFill>
-                  <a:srgbClr val="000000"/>
-                </a:solidFill>
-                <a:latin typeface="Source Sans Pro" panose="020B0503030403020204" pitchFamily="34" charset="0"/>
-              </a:rPr>
-              <a:t>MUSIC is endogenous, and </a:t>
-            </a:r>
-            <a:r>
-              <a:rPr lang="en-GB" b="0" i="0" u="none" strike="noStrike" dirty="0">
-                <a:solidFill>
-                  <a:srgbClr val="000000"/>
-                </a:solidFill>
-                <a:effectLst/>
-                <a:latin typeface="Source Sans Pro" panose="020B0503030403020204" pitchFamily="34" charset="0"/>
-              </a:rPr>
-              <a:t>TSLS is justified</a:t>
-            </a:r>
-            <a:endParaRPr lang="en-GB" dirty="0"/>
-          </a:p>
-        </p:txBody>
-      </p:sp>
-    </p:spTree>
-    <p:extLst>
-      <p:ext uri="{BB962C8B-B14F-4D97-AF65-F5344CB8AC3E}">
-        <p14:creationId xmlns:p14="http://schemas.microsoft.com/office/powerpoint/2010/main" val="3212878605"/>
       </p:ext>
     </p:extLst>
   </p:cSld>
@@ -6816,10 +6713,10 @@
       </p:grpSpPr>
       <p:pic>
         <p:nvPicPr>
-          <p:cNvPr id="2" name="Picture 1">
-            <a:extLst>
-              <a:ext uri="{FF2B5EF4-FFF2-40B4-BE49-F238E27FC236}">
-                <a16:creationId xmlns:a16="http://schemas.microsoft.com/office/drawing/2014/main" id="{1DCC5359-718F-5D8B-522E-F7018A5C89A7}"/>
+          <p:cNvPr id="3" name="Picture 2">
+            <a:extLst>
+              <a:ext uri="{FF2B5EF4-FFF2-40B4-BE49-F238E27FC236}">
+                <a16:creationId xmlns:a16="http://schemas.microsoft.com/office/drawing/2014/main" id="{C28292AB-F74E-A409-FF5F-E5A230AD921E}"/>
               </a:ext>
             </a:extLst>
           </p:cNvPr>
@@ -6836,8 +6733,8 @@
         </p:blipFill>
         <p:spPr>
           <a:xfrm>
-            <a:off x="3467100" y="2914650"/>
-            <a:ext cx="8585200" cy="1765300"/>
+            <a:off x="753631" y="88900"/>
+            <a:ext cx="6823937" cy="6858000"/>
           </a:xfrm>
           <a:prstGeom prst="rect">
             <a:avLst/>
@@ -6846,54 +6743,10 @@
       </p:pic>
       <p:sp>
         <p:nvSpPr>
-          <p:cNvPr id="3" name="Title 2">
-            <a:extLst>
-              <a:ext uri="{FF2B5EF4-FFF2-40B4-BE49-F238E27FC236}">
-                <a16:creationId xmlns:a16="http://schemas.microsoft.com/office/drawing/2014/main" id="{231AE72D-DA04-B1FA-1BD4-0DC158608572}"/>
-              </a:ext>
-            </a:extLst>
-          </p:cNvPr>
-          <p:cNvSpPr>
-            <a:spLocks noGrp="1"/>
-          </p:cNvSpPr>
-          <p:nvPr>
-            <p:ph type="title"/>
-          </p:nvPr>
-        </p:nvSpPr>
-        <p:spPr/>
-        <p:txBody>
-          <a:bodyPr/>
-          <a:lstStyle/>
-          <a:p>
-            <a:r>
-              <a:rPr lang="en-GB" b="1" i="0" u="none" strike="noStrike" dirty="0">
-                <a:solidFill>
-                  <a:srgbClr val="000000"/>
-                </a:solidFill>
-                <a:effectLst/>
-                <a:latin typeface="Source Sans Pro" panose="020B0503030403020204" pitchFamily="34" charset="0"/>
-              </a:rPr>
-              <a:t>Overidentifying restriction test</a:t>
-            </a:r>
-            <a:br>
-              <a:rPr lang="en-GB" b="1" i="0" u="none" strike="noStrike" dirty="0">
-                <a:solidFill>
-                  <a:srgbClr val="000000"/>
-                </a:solidFill>
-                <a:effectLst/>
-                <a:latin typeface="Source Sans Pro" panose="020B0503030403020204" pitchFamily="34" charset="0"/>
-              </a:rPr>
-            </a:br>
-            <a:endParaRPr lang="en-GB" dirty="0"/>
-          </a:p>
-        </p:txBody>
-      </p:sp>
-      <p:sp>
-        <p:nvSpPr>
-          <p:cNvPr id="5" name="TextBox 4">
-            <a:extLst>
-              <a:ext uri="{FF2B5EF4-FFF2-40B4-BE49-F238E27FC236}">
-                <a16:creationId xmlns:a16="http://schemas.microsoft.com/office/drawing/2014/main" id="{54416761-5DC7-ABA9-10A1-325C4B8E693B}"/>
+          <p:cNvPr id="2" name="TextBox 1">
+            <a:extLst>
+              <a:ext uri="{FF2B5EF4-FFF2-40B4-BE49-F238E27FC236}">
+                <a16:creationId xmlns:a16="http://schemas.microsoft.com/office/drawing/2014/main" id="{18BCA09F-47AC-4C21-2D98-75BFE570103F}"/>
               </a:ext>
             </a:extLst>
           </p:cNvPr>
@@ -6902,8 +6755,8 @@
         </p:nvSpPr>
         <p:spPr>
           <a:xfrm>
-            <a:off x="1092200" y="1823135"/>
-            <a:ext cx="6096000" cy="646331"/>
+            <a:off x="6096000" y="2184400"/>
+            <a:ext cx="4635500" cy="369332"/>
           </a:xfrm>
           <a:prstGeom prst="rect">
             <a:avLst/>
@@ -6911,71 +6764,22 @@
           <a:noFill/>
         </p:spPr>
         <p:txBody>
-          <a:bodyPr wrap="square">
+          <a:bodyPr wrap="square" rtlCol="0">
             <a:spAutoFit/>
           </a:bodyPr>
           <a:lstStyle/>
           <a:p>
             <a:r>
-              <a:rPr lang="en-GB" b="0" i="0" u="none" strike="noStrike" dirty="0">
-                <a:solidFill>
-                  <a:srgbClr val="000000"/>
-                </a:solidFill>
-                <a:effectLst/>
-                <a:latin typeface="Source Sans Pro" panose="020B0503030403020204" pitchFamily="34" charset="0"/>
-              </a:rPr>
-              <a:t>H0: All instruments are exogenous H1. One of the instrument is endogenous (i.e., related to the error term)</a:t>
-            </a:r>
-            <a:endParaRPr lang="en-GB" dirty="0"/>
-          </a:p>
-        </p:txBody>
-      </p:sp>
-      <p:sp>
-        <p:nvSpPr>
-          <p:cNvPr id="7" name="TextBox 6">
-            <a:extLst>
-              <a:ext uri="{FF2B5EF4-FFF2-40B4-BE49-F238E27FC236}">
-                <a16:creationId xmlns:a16="http://schemas.microsoft.com/office/drawing/2014/main" id="{7191BD04-D057-9653-0810-EA9210B6F515}"/>
-              </a:ext>
-            </a:extLst>
-          </p:cNvPr>
-          <p:cNvSpPr txBox="1"/>
-          <p:nvPr/>
-        </p:nvSpPr>
-        <p:spPr>
-          <a:xfrm>
-            <a:off x="1092200" y="5015547"/>
-            <a:ext cx="6096000" cy="1477328"/>
-          </a:xfrm>
-          <a:prstGeom prst="rect">
-            <a:avLst/>
-          </a:prstGeom>
-          <a:noFill/>
-        </p:spPr>
-        <p:txBody>
-          <a:bodyPr wrap="square">
-            <a:spAutoFit/>
-          </a:bodyPr>
-          <a:lstStyle/>
-          <a:p>
-            <a:r>
-              <a:rPr lang="en-GB" b="0" i="0" u="none" strike="noStrike" dirty="0">
-                <a:solidFill>
-                  <a:srgbClr val="000000"/>
-                </a:solidFill>
-                <a:effectLst/>
-                <a:latin typeface="Source Sans Pro" panose="020B0503030403020204" pitchFamily="34" charset="0"/>
-              </a:rPr>
-              <a:t>As we have only one instrument, therefore, this test is not applicable. For one instrument, the value of the J statistic is printed as zero with p-value is equal to 1. For multiple instruments, if the test is not significant (p-value &lt; 0.05), then all instruments are likely to be exogenous.</a:t>
-            </a:r>
-            <a:endParaRPr lang="en-GB" dirty="0"/>
+              <a:rPr lang="en-GB" dirty="0"/>
+              <a:t>With TSLS, MUSIC is no longer significant</a:t>
+            </a:r>
           </a:p>
         </p:txBody>
       </p:sp>
     </p:spTree>
     <p:extLst>
       <p:ext uri="{BB962C8B-B14F-4D97-AF65-F5344CB8AC3E}">
-        <p14:creationId xmlns:p14="http://schemas.microsoft.com/office/powerpoint/2010/main" val="3462105238"/>
+        <p14:creationId xmlns:p14="http://schemas.microsoft.com/office/powerpoint/2010/main" val="686734705"/>
       </p:ext>
     </p:extLst>
   </p:cSld>
@@ -7109,6 +6913,509 @@
       </p:grpSpPr>
       <p:pic>
         <p:nvPicPr>
+          <p:cNvPr id="2" name="Picture 1">
+            <a:extLst>
+              <a:ext uri="{FF2B5EF4-FFF2-40B4-BE49-F238E27FC236}">
+                <a16:creationId xmlns:a16="http://schemas.microsoft.com/office/drawing/2014/main" id="{96AAE875-152E-B615-650C-60DE87FDD285}"/>
+              </a:ext>
+            </a:extLst>
+          </p:cNvPr>
+          <p:cNvPicPr>
+            <a:picLocks noChangeAspect="1"/>
+          </p:cNvPicPr>
+          <p:nvPr/>
+        </p:nvPicPr>
+        <p:blipFill>
+          <a:blip r:embed="rId2"/>
+          <a:stretch>
+            <a:fillRect/>
+          </a:stretch>
+        </p:blipFill>
+        <p:spPr>
+          <a:xfrm>
+            <a:off x="6096000" y="1562100"/>
+            <a:ext cx="5945383" cy="4400172"/>
+          </a:xfrm>
+          <a:prstGeom prst="rect">
+            <a:avLst/>
+          </a:prstGeom>
+        </p:spPr>
+      </p:pic>
+      <p:sp>
+        <p:nvSpPr>
+          <p:cNvPr id="3" name="Title 2">
+            <a:extLst>
+              <a:ext uri="{FF2B5EF4-FFF2-40B4-BE49-F238E27FC236}">
+                <a16:creationId xmlns:a16="http://schemas.microsoft.com/office/drawing/2014/main" id="{24C58AAE-1855-DCC1-AF7E-28334C392CEC}"/>
+              </a:ext>
+            </a:extLst>
+          </p:cNvPr>
+          <p:cNvSpPr>
+            <a:spLocks noGrp="1"/>
+          </p:cNvSpPr>
+          <p:nvPr>
+            <p:ph type="title"/>
+          </p:nvPr>
+        </p:nvSpPr>
+        <p:spPr/>
+        <p:txBody>
+          <a:bodyPr/>
+          <a:lstStyle/>
+          <a:p>
+            <a:r>
+              <a:rPr lang="en-GB" b="1" i="0" u="none" strike="noStrike" dirty="0">
+                <a:solidFill>
+                  <a:srgbClr val="000000"/>
+                </a:solidFill>
+                <a:effectLst/>
+                <a:latin typeface="Source Sans Pro" panose="020B0503030403020204" pitchFamily="34" charset="0"/>
+              </a:rPr>
+              <a:t>Hausman’s specification test</a:t>
+            </a:r>
+            <a:br>
+              <a:rPr lang="en-GB" b="1" i="0" u="none" strike="noStrike" dirty="0">
+                <a:solidFill>
+                  <a:srgbClr val="000000"/>
+                </a:solidFill>
+                <a:effectLst/>
+                <a:latin typeface="Source Sans Pro" panose="020B0503030403020204" pitchFamily="34" charset="0"/>
+              </a:rPr>
+            </a:br>
+            <a:endParaRPr lang="en-GB" dirty="0"/>
+          </a:p>
+        </p:txBody>
+      </p:sp>
+      <p:sp>
+        <p:nvSpPr>
+          <p:cNvPr id="6" name="TextBox 5">
+            <a:extLst>
+              <a:ext uri="{FF2B5EF4-FFF2-40B4-BE49-F238E27FC236}">
+                <a16:creationId xmlns:a16="http://schemas.microsoft.com/office/drawing/2014/main" id="{889FA254-1DA0-89F0-CD9E-8E3DC314F270}"/>
+              </a:ext>
+            </a:extLst>
+          </p:cNvPr>
+          <p:cNvSpPr txBox="1"/>
+          <p:nvPr/>
+        </p:nvSpPr>
+        <p:spPr>
+          <a:xfrm>
+            <a:off x="342900" y="1690688"/>
+            <a:ext cx="6096000" cy="923330"/>
+          </a:xfrm>
+          <a:prstGeom prst="rect">
+            <a:avLst/>
+          </a:prstGeom>
+          <a:noFill/>
+        </p:spPr>
+        <p:txBody>
+          <a:bodyPr wrap="square">
+            <a:spAutoFit/>
+          </a:bodyPr>
+          <a:lstStyle/>
+          <a:p>
+            <a:pPr algn="l"/>
+            <a:r>
+              <a:rPr lang="en-GB" b="0" i="0" u="none" strike="noStrike" dirty="0">
+                <a:solidFill>
+                  <a:srgbClr val="000000"/>
+                </a:solidFill>
+                <a:effectLst/>
+                <a:latin typeface="Source Sans Pro" panose="020B0503030403020204" pitchFamily="34" charset="0"/>
+              </a:rPr>
+              <a:t>H0: MUSIC is an exogenous variable (OLS is better)</a:t>
+            </a:r>
+          </a:p>
+          <a:p>
+            <a:pPr algn="l"/>
+            <a:r>
+              <a:rPr lang="en-GB" b="0" i="0" u="none" strike="noStrike" dirty="0">
+                <a:solidFill>
+                  <a:srgbClr val="000000"/>
+                </a:solidFill>
+                <a:effectLst/>
+                <a:latin typeface="Source Sans Pro" panose="020B0503030403020204" pitchFamily="34" charset="0"/>
+              </a:rPr>
+              <a:t>H1: MUSIC is an endogenous variable </a:t>
+            </a:r>
+          </a:p>
+          <a:p>
+            <a:pPr algn="l"/>
+            <a:r>
+              <a:rPr lang="en-GB" b="0" i="0" u="none" strike="noStrike" dirty="0">
+                <a:solidFill>
+                  <a:srgbClr val="000000"/>
+                </a:solidFill>
+                <a:effectLst/>
+                <a:latin typeface="Source Sans Pro" panose="020B0503030403020204" pitchFamily="34" charset="0"/>
+              </a:rPr>
+              <a:t>(TSLS is better than OLS)</a:t>
+            </a:r>
+          </a:p>
+        </p:txBody>
+      </p:sp>
+      <p:sp>
+        <p:nvSpPr>
+          <p:cNvPr id="8" name="TextBox 7">
+            <a:extLst>
+              <a:ext uri="{FF2B5EF4-FFF2-40B4-BE49-F238E27FC236}">
+                <a16:creationId xmlns:a16="http://schemas.microsoft.com/office/drawing/2014/main" id="{E8C1FB43-672A-C4FB-ACD7-EBA485F72719}"/>
+              </a:ext>
+            </a:extLst>
+          </p:cNvPr>
+          <p:cNvSpPr txBox="1"/>
+          <p:nvPr/>
+        </p:nvSpPr>
+        <p:spPr>
+          <a:xfrm>
+            <a:off x="558800" y="3006537"/>
+            <a:ext cx="6096000" cy="646331"/>
+          </a:xfrm>
+          <a:prstGeom prst="rect">
+            <a:avLst/>
+          </a:prstGeom>
+          <a:noFill/>
+        </p:spPr>
+        <p:txBody>
+          <a:bodyPr wrap="square">
+            <a:spAutoFit/>
+          </a:bodyPr>
+          <a:lstStyle/>
+          <a:p>
+            <a:r>
+              <a:rPr lang="en-GB" b="0" i="0" u="none" strike="noStrike" dirty="0">
+                <a:solidFill>
+                  <a:srgbClr val="000000"/>
+                </a:solidFill>
+                <a:effectLst/>
+                <a:latin typeface="Source Sans Pro" panose="020B0503030403020204" pitchFamily="34" charset="0"/>
+              </a:rPr>
+              <a:t>To assess the significance of H1. You need to look at the significance of the ‘</a:t>
+            </a:r>
+            <a:r>
+              <a:rPr lang="en-GB" b="0" i="0" u="none" strike="noStrike" dirty="0" err="1">
+                <a:solidFill>
+                  <a:srgbClr val="000000"/>
+                </a:solidFill>
+                <a:effectLst/>
+                <a:latin typeface="Source Sans Pro" panose="020B0503030403020204" pitchFamily="34" charset="0"/>
+              </a:rPr>
+              <a:t>resid</a:t>
+            </a:r>
+            <a:r>
+              <a:rPr lang="en-GB" b="0" i="0" u="none" strike="noStrike" dirty="0">
+                <a:solidFill>
+                  <a:srgbClr val="000000"/>
+                </a:solidFill>
+                <a:effectLst/>
+                <a:latin typeface="Source Sans Pro" panose="020B0503030403020204" pitchFamily="34" charset="0"/>
+              </a:rPr>
+              <a:t>’ variable (i.e., resid1).</a:t>
+            </a:r>
+            <a:endParaRPr lang="en-GB" dirty="0"/>
+          </a:p>
+        </p:txBody>
+      </p:sp>
+      <p:sp>
+        <p:nvSpPr>
+          <p:cNvPr id="10" name="TextBox 9">
+            <a:extLst>
+              <a:ext uri="{FF2B5EF4-FFF2-40B4-BE49-F238E27FC236}">
+                <a16:creationId xmlns:a16="http://schemas.microsoft.com/office/drawing/2014/main" id="{9A40B538-CB72-59BD-C506-2EA7FCA85769}"/>
+              </a:ext>
+            </a:extLst>
+          </p:cNvPr>
+          <p:cNvSpPr txBox="1"/>
+          <p:nvPr/>
+        </p:nvSpPr>
+        <p:spPr>
+          <a:xfrm>
+            <a:off x="558800" y="4253572"/>
+            <a:ext cx="6096000" cy="923330"/>
+          </a:xfrm>
+          <a:prstGeom prst="rect">
+            <a:avLst/>
+          </a:prstGeom>
+          <a:noFill/>
+        </p:spPr>
+        <p:txBody>
+          <a:bodyPr wrap="square">
+            <a:spAutoFit/>
+          </a:bodyPr>
+          <a:lstStyle/>
+          <a:p>
+            <a:r>
+              <a:rPr lang="en-GB" b="0" i="0" u="none" strike="noStrike" dirty="0">
+                <a:solidFill>
+                  <a:srgbClr val="000000"/>
+                </a:solidFill>
+                <a:effectLst/>
+                <a:latin typeface="Source Sans Pro" panose="020B0503030403020204" pitchFamily="34" charset="0"/>
+              </a:rPr>
+              <a:t> H0 is rejected because resid1 is significant. </a:t>
+            </a:r>
+          </a:p>
+          <a:p>
+            <a:endParaRPr lang="en-GB" dirty="0">
+              <a:solidFill>
+                <a:srgbClr val="000000"/>
+              </a:solidFill>
+              <a:latin typeface="Source Sans Pro" panose="020B0503030403020204" pitchFamily="34" charset="0"/>
+            </a:endParaRPr>
+          </a:p>
+          <a:p>
+            <a:r>
+              <a:rPr lang="en-GB" b="0" i="0" u="none" strike="noStrike" dirty="0">
+                <a:solidFill>
+                  <a:srgbClr val="000000"/>
+                </a:solidFill>
+                <a:effectLst/>
+                <a:latin typeface="Source Sans Pro" panose="020B0503030403020204" pitchFamily="34" charset="0"/>
+              </a:rPr>
+              <a:t>Thus, </a:t>
+            </a:r>
+            <a:r>
+              <a:rPr lang="en-GB" dirty="0">
+                <a:solidFill>
+                  <a:srgbClr val="000000"/>
+                </a:solidFill>
+                <a:latin typeface="Source Sans Pro" panose="020B0503030403020204" pitchFamily="34" charset="0"/>
+              </a:rPr>
+              <a:t>MUSIC is endogenous, and </a:t>
+            </a:r>
+            <a:r>
+              <a:rPr lang="en-GB" b="0" i="0" u="none" strike="noStrike" dirty="0">
+                <a:solidFill>
+                  <a:srgbClr val="000000"/>
+                </a:solidFill>
+                <a:effectLst/>
+                <a:latin typeface="Source Sans Pro" panose="020B0503030403020204" pitchFamily="34" charset="0"/>
+              </a:rPr>
+              <a:t>TSLS is justified</a:t>
+            </a:r>
+            <a:endParaRPr lang="en-GB" dirty="0"/>
+          </a:p>
+        </p:txBody>
+      </p:sp>
+    </p:spTree>
+    <p:extLst>
+      <p:ext uri="{BB962C8B-B14F-4D97-AF65-F5344CB8AC3E}">
+        <p14:creationId xmlns:p14="http://schemas.microsoft.com/office/powerpoint/2010/main" val="3212878605"/>
+      </p:ext>
+    </p:extLst>
+  </p:cSld>
+  <p:clrMapOvr>
+    <a:masterClrMapping/>
+  </p:clrMapOvr>
+</p:sld>
+</file>
+
+<file path=ppt/slides/slide21.xml><?xml version="1.0" encoding="utf-8"?>
+<p:sld xmlns:a="http://schemas.openxmlformats.org/drawingml/2006/main" xmlns:r="http://schemas.openxmlformats.org/officeDocument/2006/relationships" xmlns:p="http://schemas.openxmlformats.org/presentationml/2006/main">
+  <p:cSld>
+    <p:spTree>
+      <p:nvGrpSpPr>
+        <p:cNvPr id="1" name=""/>
+        <p:cNvGrpSpPr/>
+        <p:nvPr/>
+      </p:nvGrpSpPr>
+      <p:grpSpPr>
+        <a:xfrm>
+          <a:off x="0" y="0"/>
+          <a:ext cx="0" cy="0"/>
+          <a:chOff x="0" y="0"/>
+          <a:chExt cx="0" cy="0"/>
+        </a:xfrm>
+      </p:grpSpPr>
+      <p:pic>
+        <p:nvPicPr>
+          <p:cNvPr id="2" name="Picture 1">
+            <a:extLst>
+              <a:ext uri="{FF2B5EF4-FFF2-40B4-BE49-F238E27FC236}">
+                <a16:creationId xmlns:a16="http://schemas.microsoft.com/office/drawing/2014/main" id="{1DCC5359-718F-5D8B-522E-F7018A5C89A7}"/>
+              </a:ext>
+            </a:extLst>
+          </p:cNvPr>
+          <p:cNvPicPr>
+            <a:picLocks noChangeAspect="1"/>
+          </p:cNvPicPr>
+          <p:nvPr/>
+        </p:nvPicPr>
+        <p:blipFill>
+          <a:blip r:embed="rId2"/>
+          <a:stretch>
+            <a:fillRect/>
+          </a:stretch>
+        </p:blipFill>
+        <p:spPr>
+          <a:xfrm>
+            <a:off x="3467100" y="2914650"/>
+            <a:ext cx="8585200" cy="1765300"/>
+          </a:xfrm>
+          <a:prstGeom prst="rect">
+            <a:avLst/>
+          </a:prstGeom>
+        </p:spPr>
+      </p:pic>
+      <p:sp>
+        <p:nvSpPr>
+          <p:cNvPr id="3" name="Title 2">
+            <a:extLst>
+              <a:ext uri="{FF2B5EF4-FFF2-40B4-BE49-F238E27FC236}">
+                <a16:creationId xmlns:a16="http://schemas.microsoft.com/office/drawing/2014/main" id="{231AE72D-DA04-B1FA-1BD4-0DC158608572}"/>
+              </a:ext>
+            </a:extLst>
+          </p:cNvPr>
+          <p:cNvSpPr>
+            <a:spLocks noGrp="1"/>
+          </p:cNvSpPr>
+          <p:nvPr>
+            <p:ph type="title"/>
+          </p:nvPr>
+        </p:nvSpPr>
+        <p:spPr/>
+        <p:txBody>
+          <a:bodyPr/>
+          <a:lstStyle/>
+          <a:p>
+            <a:r>
+              <a:rPr lang="en-GB" b="1" i="0" u="none" strike="noStrike" dirty="0">
+                <a:solidFill>
+                  <a:srgbClr val="000000"/>
+                </a:solidFill>
+                <a:effectLst/>
+                <a:latin typeface="Source Sans Pro" panose="020B0503030403020204" pitchFamily="34" charset="0"/>
+              </a:rPr>
+              <a:t>Overidentifying restriction test</a:t>
+            </a:r>
+            <a:br>
+              <a:rPr lang="en-GB" b="1" i="0" u="none" strike="noStrike" dirty="0">
+                <a:solidFill>
+                  <a:srgbClr val="000000"/>
+                </a:solidFill>
+                <a:effectLst/>
+                <a:latin typeface="Source Sans Pro" panose="020B0503030403020204" pitchFamily="34" charset="0"/>
+              </a:rPr>
+            </a:br>
+            <a:endParaRPr lang="en-GB" dirty="0"/>
+          </a:p>
+        </p:txBody>
+      </p:sp>
+      <p:sp>
+        <p:nvSpPr>
+          <p:cNvPr id="5" name="TextBox 4">
+            <a:extLst>
+              <a:ext uri="{FF2B5EF4-FFF2-40B4-BE49-F238E27FC236}">
+                <a16:creationId xmlns:a16="http://schemas.microsoft.com/office/drawing/2014/main" id="{54416761-5DC7-ABA9-10A1-325C4B8E693B}"/>
+              </a:ext>
+            </a:extLst>
+          </p:cNvPr>
+          <p:cNvSpPr txBox="1"/>
+          <p:nvPr/>
+        </p:nvSpPr>
+        <p:spPr>
+          <a:xfrm>
+            <a:off x="1092200" y="1823135"/>
+            <a:ext cx="6096000" cy="646331"/>
+          </a:xfrm>
+          <a:prstGeom prst="rect">
+            <a:avLst/>
+          </a:prstGeom>
+          <a:noFill/>
+        </p:spPr>
+        <p:txBody>
+          <a:bodyPr wrap="square">
+            <a:spAutoFit/>
+          </a:bodyPr>
+          <a:lstStyle/>
+          <a:p>
+            <a:r>
+              <a:rPr lang="en-GB" b="0" i="0" u="none" strike="noStrike" dirty="0">
+                <a:solidFill>
+                  <a:srgbClr val="000000"/>
+                </a:solidFill>
+                <a:effectLst/>
+                <a:latin typeface="Source Sans Pro" panose="020B0503030403020204" pitchFamily="34" charset="0"/>
+              </a:rPr>
+              <a:t>H0: All instruments are exogenous H1. One of the instrument is endogenous (i.e., related to the error term)</a:t>
+            </a:r>
+            <a:endParaRPr lang="en-GB" dirty="0"/>
+          </a:p>
+        </p:txBody>
+      </p:sp>
+      <p:sp>
+        <p:nvSpPr>
+          <p:cNvPr id="7" name="TextBox 6">
+            <a:extLst>
+              <a:ext uri="{FF2B5EF4-FFF2-40B4-BE49-F238E27FC236}">
+                <a16:creationId xmlns:a16="http://schemas.microsoft.com/office/drawing/2014/main" id="{7191BD04-D057-9653-0810-EA9210B6F515}"/>
+              </a:ext>
+            </a:extLst>
+          </p:cNvPr>
+          <p:cNvSpPr txBox="1"/>
+          <p:nvPr/>
+        </p:nvSpPr>
+        <p:spPr>
+          <a:xfrm>
+            <a:off x="1092200" y="5015547"/>
+            <a:ext cx="6096000" cy="1477328"/>
+          </a:xfrm>
+          <a:prstGeom prst="rect">
+            <a:avLst/>
+          </a:prstGeom>
+          <a:noFill/>
+        </p:spPr>
+        <p:txBody>
+          <a:bodyPr wrap="square">
+            <a:spAutoFit/>
+          </a:bodyPr>
+          <a:lstStyle/>
+          <a:p>
+            <a:r>
+              <a:rPr lang="en-GB" b="0" i="0" u="none" strike="noStrike" dirty="0">
+                <a:solidFill>
+                  <a:srgbClr val="000000"/>
+                </a:solidFill>
+                <a:effectLst/>
+                <a:latin typeface="Source Sans Pro" panose="020B0503030403020204" pitchFamily="34" charset="0"/>
+              </a:rPr>
+              <a:t>As we have only one instrument, therefore, this test is not applicable. For one instrument, the value of the J statistic is printed as zero with p-value is equal to 1. For multiple instruments, if the test is not significant (p-value &lt; 0.05), then all instruments are likely to be exogenous.</a:t>
+            </a:r>
+            <a:endParaRPr lang="en-GB" dirty="0"/>
+          </a:p>
+        </p:txBody>
+      </p:sp>
+    </p:spTree>
+    <p:extLst>
+      <p:ext uri="{BB962C8B-B14F-4D97-AF65-F5344CB8AC3E}">
+        <p14:creationId xmlns:p14="http://schemas.microsoft.com/office/powerpoint/2010/main" val="3462105238"/>
+      </p:ext>
+    </p:extLst>
+  </p:cSld>
+  <p:clrMapOvr>
+    <a:masterClrMapping/>
+  </p:clrMapOvr>
+</p:sld>
+</file>
+
+<file path=ppt/slides/slide22.xml><?xml version="1.0" encoding="utf-8"?>
+<p:sld xmlns:a="http://schemas.openxmlformats.org/drawingml/2006/main" xmlns:r="http://schemas.openxmlformats.org/officeDocument/2006/relationships" xmlns:p="http://schemas.openxmlformats.org/presentationml/2006/main">
+  <p:cSld>
+    <p:spTree>
+      <p:nvGrpSpPr>
+        <p:cNvPr id="1" name=""/>
+        <p:cNvGrpSpPr/>
+        <p:nvPr/>
+      </p:nvGrpSpPr>
+      <p:grpSpPr>
+        <a:xfrm>
+          <a:off x="0" y="0"/>
+          <a:ext cx="0" cy="0"/>
+          <a:chOff x="0" y="0"/>
+          <a:chExt cx="0" cy="0"/>
+        </a:xfrm>
+      </p:grpSpPr>
+      <p:pic>
+        <p:nvPicPr>
           <p:cNvPr id="3" name="Picture 2">
             <a:extLst>
               <a:ext uri="{FF2B5EF4-FFF2-40B4-BE49-F238E27FC236}">
@@ -7248,7 +7555,7 @@
 </p:sld>
 </file>
 
-<file path=ppt/slides/slide21.xml><?xml version="1.0" encoding="utf-8"?>
+<file path=ppt/slides/slide23.xml><?xml version="1.0" encoding="utf-8"?>
 <p:sld xmlns:a="http://schemas.openxmlformats.org/drawingml/2006/main" xmlns:r="http://schemas.openxmlformats.org/officeDocument/2006/relationships" xmlns:p="http://schemas.openxmlformats.org/presentationml/2006/main">
   <p:cSld>
     <p:spTree>
@@ -7990,7 +8297,7 @@
 </p:sld>
 </file>
 
-<file path=ppt/slides/slide22.xml><?xml version="1.0" encoding="utf-8"?>
+<file path=ppt/slides/slide24.xml><?xml version="1.0" encoding="utf-8"?>
 <p:sld xmlns:a="http://schemas.openxmlformats.org/drawingml/2006/main" xmlns:r="http://schemas.openxmlformats.org/officeDocument/2006/relationships" xmlns:p="http://schemas.openxmlformats.org/presentationml/2006/main">
   <p:cSld>
     <p:spTree>
@@ -8963,7 +9270,7 @@
 </p:sld>
 </file>
 
-<file path=ppt/slides/slide23.xml><?xml version="1.0" encoding="utf-8"?>
+<file path=ppt/slides/slide25.xml><?xml version="1.0" encoding="utf-8"?>
 <p:sld xmlns:a="http://schemas.openxmlformats.org/drawingml/2006/main" xmlns:r="http://schemas.openxmlformats.org/officeDocument/2006/relationships" xmlns:p="http://schemas.openxmlformats.org/presentationml/2006/main">
   <p:cSld>
     <p:spTree>
@@ -9094,7 +9401,7 @@
 </p:sld>
 </file>
 
-<file path=ppt/slides/slide24.xml><?xml version="1.0" encoding="utf-8"?>
+<file path=ppt/slides/slide26.xml><?xml version="1.0" encoding="utf-8"?>
 <p:sld xmlns:a="http://schemas.openxmlformats.org/drawingml/2006/main" xmlns:r="http://schemas.openxmlformats.org/officeDocument/2006/relationships" xmlns:p="http://schemas.openxmlformats.org/presentationml/2006/main">
   <p:cSld>
     <p:spTree>
@@ -10224,7 +10531,7 @@
                 <a:effectLst/>
                 <a:latin typeface="Source Sans Pro" panose="020B0503030403020204" pitchFamily="34" charset="0"/>
               </a:rPr>
-              <a:t>It must be correlated with MUSIC. This is referred to as a relevance assumption.</a:t>
+              <a:t>It must be correlated with MUSIC. This is referred to as a relevance assumption. Cor(Z, MUSIC) is not zero.</a:t>
             </a:r>
           </a:p>
           <a:p>

--- a/Endogeneity.pptx
+++ b/Endogeneity.pptx
@@ -4,6 +4,9 @@
   <p:sldMasterIdLst>
     <p:sldMasterId id="2147483648" r:id="rId1"/>
   </p:sldMasterIdLst>
+  <p:notesMasterIdLst>
+    <p:notesMasterId r:id="rId34"/>
+  </p:notesMasterIdLst>
   <p:sldIdLst>
     <p:sldId id="463" r:id="rId2"/>
     <p:sldId id="275" r:id="rId3"/>
@@ -30,7 +33,13 @@
     <p:sldId id="273" r:id="rId24"/>
     <p:sldId id="274" r:id="rId25"/>
     <p:sldId id="466" r:id="rId26"/>
-    <p:sldId id="284" r:id="rId27"/>
+    <p:sldId id="470" r:id="rId27"/>
+    <p:sldId id="471" r:id="rId28"/>
+    <p:sldId id="472" r:id="rId29"/>
+    <p:sldId id="259" r:id="rId30"/>
+    <p:sldId id="473" r:id="rId31"/>
+    <p:sldId id="474" r:id="rId32"/>
+    <p:sldId id="284" r:id="rId33"/>
   </p:sldIdLst>
   <p:sldSz cx="12192000" cy="6858000"/>
   <p:notesSz cx="6858000" cy="9144000"/>
@@ -140,7 +149,7 @@
 <file path=ppt/revisionInfo.xml><?xml version="1.0" encoding="utf-8"?>
 <p1510:revInfo xmlns:a="http://schemas.openxmlformats.org/drawingml/2006/main" xmlns:r="http://schemas.openxmlformats.org/officeDocument/2006/relationships" xmlns:p1510="http://schemas.microsoft.com/office/powerpoint/2015/10/main">
   <p1510:revLst>
-    <p1510:client id="{69BBADDF-7ED2-49C9-9491-7A5646CCA949}" v="46" dt="2026-09-08T07:47:21.325"/>
+    <p1510:client id="{69BBADDF-7ED2-49C9-9491-7A5646CCA949}" v="48" dt="2026-09-08T08:02:08.386"/>
   </p1510:revLst>
 </p1510:revInfo>
 </file>
@@ -149,11 +158,34 @@
 <pc:chgInfo xmlns:a="http://schemas.openxmlformats.org/drawingml/2006/main" xmlns:r="http://schemas.openxmlformats.org/officeDocument/2006/relationships" xmlns:ac="http://schemas.microsoft.com/office/drawing/2013/main/command" xmlns:pc="http://schemas.microsoft.com/office/powerpoint/2013/main/command">
   <pc:docChgLst>
     <pc:chgData name="Daryanto, Ahmad" userId="61940c2a-8427-4576-9f17-0c8fab086415" providerId="ADAL" clId="{7843BEE4-BB9E-47EA-A812-8FBB036213D7}"/>
-    <pc:docChg chg="custSel addSld delSld modSld sldOrd">
-      <pc:chgData name="Daryanto, Ahmad" userId="61940c2a-8427-4576-9f17-0c8fab086415" providerId="ADAL" clId="{7843BEE4-BB9E-47EA-A812-8FBB036213D7}" dt="2026-09-08T07:49:38.247" v="644" actId="20577"/>
+    <pc:docChg chg="undo custSel addSld delSld modSld sldOrd">
+      <pc:chgData name="Daryanto, Ahmad" userId="61940c2a-8427-4576-9f17-0c8fab086415" providerId="ADAL" clId="{7843BEE4-BB9E-47EA-A812-8FBB036213D7}" dt="2026-09-08T08:09:28.654" v="784" actId="255"/>
       <pc:docMkLst>
         <pc:docMk/>
       </pc:docMkLst>
+      <pc:sldChg chg="modSp add mod">
+        <pc:chgData name="Daryanto, Ahmad" userId="61940c2a-8427-4576-9f17-0c8fab086415" providerId="ADAL" clId="{7843BEE4-BB9E-47EA-A812-8FBB036213D7}" dt="2026-09-08T08:09:28.654" v="784" actId="255"/>
+        <pc:sldMkLst>
+          <pc:docMk/>
+          <pc:sldMk cId="0" sldId="259"/>
+        </pc:sldMkLst>
+        <pc:spChg chg="mod">
+          <ac:chgData name="Daryanto, Ahmad" userId="61940c2a-8427-4576-9f17-0c8fab086415" providerId="ADAL" clId="{7843BEE4-BB9E-47EA-A812-8FBB036213D7}" dt="2026-09-08T08:09:19.683" v="783" actId="1076"/>
+          <ac:spMkLst>
+            <pc:docMk/>
+            <pc:sldMk cId="0" sldId="259"/>
+            <ac:spMk id="2" creationId="{00000000-0000-0000-0000-000000000000}"/>
+          </ac:spMkLst>
+        </pc:spChg>
+        <pc:spChg chg="mod">
+          <ac:chgData name="Daryanto, Ahmad" userId="61940c2a-8427-4576-9f17-0c8fab086415" providerId="ADAL" clId="{7843BEE4-BB9E-47EA-A812-8FBB036213D7}" dt="2026-09-08T08:09:28.654" v="784" actId="255"/>
+          <ac:spMkLst>
+            <pc:docMk/>
+            <pc:sldMk cId="0" sldId="259"/>
+            <ac:spMk id="3" creationId="{00000000-0000-0000-0000-000000000000}"/>
+          </ac:spMkLst>
+        </pc:spChg>
+      </pc:sldChg>
       <pc:sldChg chg="addSp delSp modSp mod">
         <pc:chgData name="Daryanto, Ahmad" userId="61940c2a-8427-4576-9f17-0c8fab086415" providerId="ADAL" clId="{7843BEE4-BB9E-47EA-A812-8FBB036213D7}" dt="2026-09-07T02:45:28.831" v="13" actId="478"/>
         <pc:sldMkLst>
@@ -313,9 +345,1049 @@
           </ac:spMkLst>
         </pc:spChg>
       </pc:sldChg>
+      <pc:sldChg chg="addSp delSp modSp new del mod modClrScheme chgLayout">
+        <pc:chgData name="Daryanto, Ahmad" userId="61940c2a-8427-4576-9f17-0c8fab086415" providerId="ADAL" clId="{7843BEE4-BB9E-47EA-A812-8FBB036213D7}" dt="2026-09-08T08:07:33.014" v="760" actId="47"/>
+        <pc:sldMkLst>
+          <pc:docMk/>
+          <pc:sldMk cId="1572313394" sldId="469"/>
+        </pc:sldMkLst>
+        <pc:spChg chg="del mod ord">
+          <ac:chgData name="Daryanto, Ahmad" userId="61940c2a-8427-4576-9f17-0c8fab086415" providerId="ADAL" clId="{7843BEE4-BB9E-47EA-A812-8FBB036213D7}" dt="2026-09-08T08:00:48.704" v="662" actId="700"/>
+          <ac:spMkLst>
+            <pc:docMk/>
+            <pc:sldMk cId="1572313394" sldId="469"/>
+            <ac:spMk id="2" creationId="{D2FFC180-DF5F-B6EB-041A-049423C65B67}"/>
+          </ac:spMkLst>
+        </pc:spChg>
+        <pc:spChg chg="del mod ord">
+          <ac:chgData name="Daryanto, Ahmad" userId="61940c2a-8427-4576-9f17-0c8fab086415" providerId="ADAL" clId="{7843BEE4-BB9E-47EA-A812-8FBB036213D7}" dt="2026-09-08T08:00:48.704" v="662" actId="700"/>
+          <ac:spMkLst>
+            <pc:docMk/>
+            <pc:sldMk cId="1572313394" sldId="469"/>
+            <ac:spMk id="3" creationId="{CC195024-B173-CD3C-A164-8C2BC0F7157A}"/>
+          </ac:spMkLst>
+        </pc:spChg>
+        <pc:spChg chg="add mod ord">
+          <ac:chgData name="Daryanto, Ahmad" userId="61940c2a-8427-4576-9f17-0c8fab086415" providerId="ADAL" clId="{7843BEE4-BB9E-47EA-A812-8FBB036213D7}" dt="2026-09-08T08:00:54.882" v="677" actId="20577"/>
+          <ac:spMkLst>
+            <pc:docMk/>
+            <pc:sldMk cId="1572313394" sldId="469"/>
+            <ac:spMk id="4" creationId="{4BC9CD04-5806-689D-6691-49495CE3D0CA}"/>
+          </ac:spMkLst>
+        </pc:spChg>
+        <pc:spChg chg="add mod ord">
+          <ac:chgData name="Daryanto, Ahmad" userId="61940c2a-8427-4576-9f17-0c8fab086415" providerId="ADAL" clId="{7843BEE4-BB9E-47EA-A812-8FBB036213D7}" dt="2026-09-08T08:01:05.096" v="710" actId="20577"/>
+          <ac:spMkLst>
+            <pc:docMk/>
+            <pc:sldMk cId="1572313394" sldId="469"/>
+            <ac:spMk id="5" creationId="{4B79884B-9086-2954-D86A-FE9BA9CA9C2A}"/>
+          </ac:spMkLst>
+        </pc:spChg>
+      </pc:sldChg>
+      <pc:sldChg chg="addSp delSp modSp add mod modClrScheme chgLayout">
+        <pc:chgData name="Daryanto, Ahmad" userId="61940c2a-8427-4576-9f17-0c8fab086415" providerId="ADAL" clId="{7843BEE4-BB9E-47EA-A812-8FBB036213D7}" dt="2026-09-08T08:08:43.136" v="779" actId="255"/>
+        <pc:sldMkLst>
+          <pc:docMk/>
+          <pc:sldMk cId="0" sldId="470"/>
+        </pc:sldMkLst>
+        <pc:spChg chg="mod">
+          <ac:chgData name="Daryanto, Ahmad" userId="61940c2a-8427-4576-9f17-0c8fab086415" providerId="ADAL" clId="{7843BEE4-BB9E-47EA-A812-8FBB036213D7}" dt="2026-09-08T08:07:28.211" v="759" actId="20577"/>
+          <ac:spMkLst>
+            <pc:docMk/>
+            <pc:sldMk cId="0" sldId="470"/>
+            <ac:spMk id="2" creationId="{00000000-0000-0000-0000-000000000000}"/>
+          </ac:spMkLst>
+        </pc:spChg>
+        <pc:spChg chg="del">
+          <ac:chgData name="Daryanto, Ahmad" userId="61940c2a-8427-4576-9f17-0c8fab086415" providerId="ADAL" clId="{7843BEE4-BB9E-47EA-A812-8FBB036213D7}" dt="2026-09-08T08:02:16.503" v="717" actId="478"/>
+          <ac:spMkLst>
+            <pc:docMk/>
+            <pc:sldMk cId="0" sldId="470"/>
+            <ac:spMk id="3" creationId="{00000000-0000-0000-0000-000000000000}"/>
+          </ac:spMkLst>
+        </pc:spChg>
+        <pc:spChg chg="mod">
+          <ac:chgData name="Daryanto, Ahmad" userId="61940c2a-8427-4576-9f17-0c8fab086415" providerId="ADAL" clId="{7843BEE4-BB9E-47EA-A812-8FBB036213D7}" dt="2026-09-08T08:01:57.181" v="714" actId="21"/>
+          <ac:spMkLst>
+            <pc:docMk/>
+            <pc:sldMk cId="0" sldId="470"/>
+            <ac:spMk id="4" creationId="{00000000-0000-0000-0000-000000000000}"/>
+          </ac:spMkLst>
+        </pc:spChg>
+        <pc:spChg chg="add mod ord">
+          <ac:chgData name="Daryanto, Ahmad" userId="61940c2a-8427-4576-9f17-0c8fab086415" providerId="ADAL" clId="{7843BEE4-BB9E-47EA-A812-8FBB036213D7}" dt="2026-09-08T08:08:43.136" v="779" actId="255"/>
+          <ac:spMkLst>
+            <pc:docMk/>
+            <pc:sldMk cId="0" sldId="470"/>
+            <ac:spMk id="5" creationId="{99B161B7-7A53-19C8-127D-F29888A3023E}"/>
+          </ac:spMkLst>
+        </pc:spChg>
+        <pc:spChg chg="add del mod ord">
+          <ac:chgData name="Daryanto, Ahmad" userId="61940c2a-8427-4576-9f17-0c8fab086415" providerId="ADAL" clId="{7843BEE4-BB9E-47EA-A812-8FBB036213D7}" dt="2026-09-08T08:02:20.010" v="718" actId="478"/>
+          <ac:spMkLst>
+            <pc:docMk/>
+            <pc:sldMk cId="0" sldId="470"/>
+            <ac:spMk id="6" creationId="{8B4DA2B7-49F2-B671-CE0E-65484D6E2D67}"/>
+          </ac:spMkLst>
+        </pc:spChg>
+      </pc:sldChg>
+      <pc:sldChg chg="modSp add mod">
+        <pc:chgData name="Daryanto, Ahmad" userId="61940c2a-8427-4576-9f17-0c8fab086415" providerId="ADAL" clId="{7843BEE4-BB9E-47EA-A812-8FBB036213D7}" dt="2026-09-08T08:09:01.476" v="781" actId="1076"/>
+        <pc:sldMkLst>
+          <pc:docMk/>
+          <pc:sldMk cId="0" sldId="471"/>
+        </pc:sldMkLst>
+        <pc:spChg chg="mod">
+          <ac:chgData name="Daryanto, Ahmad" userId="61940c2a-8427-4576-9f17-0c8fab086415" providerId="ADAL" clId="{7843BEE4-BB9E-47EA-A812-8FBB036213D7}" dt="2026-09-08T08:08:57.372" v="780" actId="1076"/>
+          <ac:spMkLst>
+            <pc:docMk/>
+            <pc:sldMk cId="0" sldId="471"/>
+            <ac:spMk id="2" creationId="{00000000-0000-0000-0000-000000000000}"/>
+          </ac:spMkLst>
+        </pc:spChg>
+        <pc:spChg chg="mod">
+          <ac:chgData name="Daryanto, Ahmad" userId="61940c2a-8427-4576-9f17-0c8fab086415" providerId="ADAL" clId="{7843BEE4-BB9E-47EA-A812-8FBB036213D7}" dt="2026-09-08T08:09:01.476" v="781" actId="1076"/>
+          <ac:spMkLst>
+            <pc:docMk/>
+            <pc:sldMk cId="0" sldId="471"/>
+            <ac:spMk id="3" creationId="{00000000-0000-0000-0000-000000000000}"/>
+          </ac:spMkLst>
+        </pc:spChg>
+      </pc:sldChg>
+      <pc:sldChg chg="modSp add mod">
+        <pc:chgData name="Daryanto, Ahmad" userId="61940c2a-8427-4576-9f17-0c8fab086415" providerId="ADAL" clId="{7843BEE4-BB9E-47EA-A812-8FBB036213D7}" dt="2026-09-08T08:06:07.741" v="738" actId="255"/>
+        <pc:sldMkLst>
+          <pc:docMk/>
+          <pc:sldMk cId="0" sldId="472"/>
+        </pc:sldMkLst>
+        <pc:spChg chg="mod">
+          <ac:chgData name="Daryanto, Ahmad" userId="61940c2a-8427-4576-9f17-0c8fab086415" providerId="ADAL" clId="{7843BEE4-BB9E-47EA-A812-8FBB036213D7}" dt="2026-09-08T08:06:07.741" v="738" actId="255"/>
+          <ac:spMkLst>
+            <pc:docMk/>
+            <pc:sldMk cId="0" sldId="472"/>
+            <ac:spMk id="2" creationId="{00000000-0000-0000-0000-000000000000}"/>
+          </ac:spMkLst>
+        </pc:spChg>
+        <pc:spChg chg="mod">
+          <ac:chgData name="Daryanto, Ahmad" userId="61940c2a-8427-4576-9f17-0c8fab086415" providerId="ADAL" clId="{7843BEE4-BB9E-47EA-A812-8FBB036213D7}" dt="2026-09-08T08:04:35.182" v="728" actId="15"/>
+          <ac:spMkLst>
+            <pc:docMk/>
+            <pc:sldMk cId="0" sldId="472"/>
+            <ac:spMk id="3" creationId="{00000000-0000-0000-0000-000000000000}"/>
+          </ac:spMkLst>
+        </pc:spChg>
+        <pc:spChg chg="mod">
+          <ac:chgData name="Daryanto, Ahmad" userId="61940c2a-8427-4576-9f17-0c8fab086415" providerId="ADAL" clId="{7843BEE4-BB9E-47EA-A812-8FBB036213D7}" dt="2026-09-08T08:04:21.883" v="727" actId="14100"/>
+          <ac:spMkLst>
+            <pc:docMk/>
+            <pc:sldMk cId="0" sldId="472"/>
+            <ac:spMk id="4" creationId="{00000000-0000-0000-0000-000000000000}"/>
+          </ac:spMkLst>
+        </pc:spChg>
+      </pc:sldChg>
+      <pc:sldChg chg="modSp add mod">
+        <pc:chgData name="Daryanto, Ahmad" userId="61940c2a-8427-4576-9f17-0c8fab086415" providerId="ADAL" clId="{7843BEE4-BB9E-47EA-A812-8FBB036213D7}" dt="2026-09-08T08:05:46.221" v="735" actId="14100"/>
+        <pc:sldMkLst>
+          <pc:docMk/>
+          <pc:sldMk cId="0" sldId="473"/>
+        </pc:sldMkLst>
+        <pc:spChg chg="mod">
+          <ac:chgData name="Daryanto, Ahmad" userId="61940c2a-8427-4576-9f17-0c8fab086415" providerId="ADAL" clId="{7843BEE4-BB9E-47EA-A812-8FBB036213D7}" dt="2026-09-08T08:05:30.550" v="732" actId="255"/>
+          <ac:spMkLst>
+            <pc:docMk/>
+            <pc:sldMk cId="0" sldId="473"/>
+            <ac:spMk id="2" creationId="{00000000-0000-0000-0000-000000000000}"/>
+          </ac:spMkLst>
+        </pc:spChg>
+        <pc:spChg chg="mod">
+          <ac:chgData name="Daryanto, Ahmad" userId="61940c2a-8427-4576-9f17-0c8fab086415" providerId="ADAL" clId="{7843BEE4-BB9E-47EA-A812-8FBB036213D7}" dt="2026-09-08T08:05:46.221" v="735" actId="14100"/>
+          <ac:spMkLst>
+            <pc:docMk/>
+            <pc:sldMk cId="0" sldId="473"/>
+            <ac:spMk id="3" creationId="{00000000-0000-0000-0000-000000000000}"/>
+          </ac:spMkLst>
+        </pc:spChg>
+      </pc:sldChg>
+      <pc:sldChg chg="modSp add mod">
+        <pc:chgData name="Daryanto, Ahmad" userId="61940c2a-8427-4576-9f17-0c8fab086415" providerId="ADAL" clId="{7843BEE4-BB9E-47EA-A812-8FBB036213D7}" dt="2026-09-08T08:06:45.212" v="743" actId="255"/>
+        <pc:sldMkLst>
+          <pc:docMk/>
+          <pc:sldMk cId="0" sldId="474"/>
+        </pc:sldMkLst>
+        <pc:spChg chg="mod">
+          <ac:chgData name="Daryanto, Ahmad" userId="61940c2a-8427-4576-9f17-0c8fab086415" providerId="ADAL" clId="{7843BEE4-BB9E-47EA-A812-8FBB036213D7}" dt="2026-09-08T08:06:37.028" v="742" actId="255"/>
+          <ac:spMkLst>
+            <pc:docMk/>
+            <pc:sldMk cId="0" sldId="474"/>
+            <ac:spMk id="2" creationId="{00000000-0000-0000-0000-000000000000}"/>
+          </ac:spMkLst>
+        </pc:spChg>
+        <pc:spChg chg="mod">
+          <ac:chgData name="Daryanto, Ahmad" userId="61940c2a-8427-4576-9f17-0c8fab086415" providerId="ADAL" clId="{7843BEE4-BB9E-47EA-A812-8FBB036213D7}" dt="2026-09-08T08:06:45.212" v="743" actId="255"/>
+          <ac:spMkLst>
+            <pc:docMk/>
+            <pc:sldMk cId="0" sldId="474"/>
+            <ac:spMk id="3" creationId="{00000000-0000-0000-0000-000000000000}"/>
+          </ac:spMkLst>
+        </pc:spChg>
+      </pc:sldChg>
     </pc:docChg>
   </pc:docChgLst>
 </pc:chgInfo>
+</file>
+
+<file path=ppt/notesMasters/notesMaster1.xml><?xml version="1.0" encoding="utf-8"?>
+<p:notesMaster xmlns:a="http://schemas.openxmlformats.org/drawingml/2006/main" xmlns:r="http://schemas.openxmlformats.org/officeDocument/2006/relationships" xmlns:p="http://schemas.openxmlformats.org/presentationml/2006/main">
+  <p:cSld>
+    <p:bg>
+      <p:bgRef idx="1001">
+        <a:schemeClr val="bg1"/>
+      </p:bgRef>
+    </p:bg>
+    <p:spTree>
+      <p:nvGrpSpPr>
+        <p:cNvPr id="1" name=""/>
+        <p:cNvGrpSpPr/>
+        <p:nvPr/>
+      </p:nvGrpSpPr>
+      <p:grpSpPr>
+        <a:xfrm>
+          <a:off x="0" y="0"/>
+          <a:ext cx="0" cy="0"/>
+          <a:chOff x="0" y="0"/>
+          <a:chExt cx="0" cy="0"/>
+        </a:xfrm>
+      </p:grpSpPr>
+      <p:sp>
+        <p:nvSpPr>
+          <p:cNvPr id="2" name="Header Placeholder 1"/>
+          <p:cNvSpPr>
+            <a:spLocks noGrp="1"/>
+          </p:cNvSpPr>
+          <p:nvPr>
+            <p:ph type="hdr" sz="quarter"/>
+          </p:nvPr>
+        </p:nvSpPr>
+        <p:spPr>
+          <a:xfrm>
+            <a:off x="0" y="0"/>
+            <a:ext cx="2971800" cy="458788"/>
+          </a:xfrm>
+          <a:prstGeom prst="rect">
+            <a:avLst/>
+          </a:prstGeom>
+        </p:spPr>
+        <p:txBody>
+          <a:bodyPr vert="horz" lIns="91440" tIns="45720" rIns="91440" bIns="45720" rtlCol="0"/>
+          <a:lstStyle>
+            <a:lvl1pPr algn="l">
+              <a:defRPr sz="1200"/>
+            </a:lvl1pPr>
+          </a:lstStyle>
+          <a:p>
+            <a:endParaRPr lang="en-GB"/>
+          </a:p>
+        </p:txBody>
+      </p:sp>
+      <p:sp>
+        <p:nvSpPr>
+          <p:cNvPr id="3" name="Date Placeholder 2"/>
+          <p:cNvSpPr>
+            <a:spLocks noGrp="1"/>
+          </p:cNvSpPr>
+          <p:nvPr>
+            <p:ph type="dt" idx="1"/>
+          </p:nvPr>
+        </p:nvSpPr>
+        <p:spPr>
+          <a:xfrm>
+            <a:off x="3884613" y="0"/>
+            <a:ext cx="2971800" cy="458788"/>
+          </a:xfrm>
+          <a:prstGeom prst="rect">
+            <a:avLst/>
+          </a:prstGeom>
+        </p:spPr>
+        <p:txBody>
+          <a:bodyPr vert="horz" lIns="91440" tIns="45720" rIns="91440" bIns="45720" rtlCol="0"/>
+          <a:lstStyle>
+            <a:lvl1pPr algn="r">
+              <a:defRPr sz="1200"/>
+            </a:lvl1pPr>
+          </a:lstStyle>
+          <a:p>
+            <a:fld id="{3EFD76AC-45F9-4892-B535-0E70D2D91ABD}" type="datetimeFigureOut">
+              <a:rPr lang="en-GB" smtClean="0"/>
+              <a:t>08/09/2026</a:t>
+            </a:fld>
+            <a:endParaRPr lang="en-GB"/>
+          </a:p>
+        </p:txBody>
+      </p:sp>
+      <p:sp>
+        <p:nvSpPr>
+          <p:cNvPr id="4" name="Slide Image Placeholder 3"/>
+          <p:cNvSpPr>
+            <a:spLocks noGrp="1" noRot="1" noChangeAspect="1"/>
+          </p:cNvSpPr>
+          <p:nvPr>
+            <p:ph type="sldImg" idx="2"/>
+          </p:nvPr>
+        </p:nvSpPr>
+        <p:spPr>
+          <a:xfrm>
+            <a:off x="685800" y="1143000"/>
+            <a:ext cx="5486400" cy="3086100"/>
+          </a:xfrm>
+          <a:prstGeom prst="rect">
+            <a:avLst/>
+          </a:prstGeom>
+          <a:noFill/>
+          <a:ln w="12700">
+            <a:solidFill>
+              <a:prstClr val="black"/>
+            </a:solidFill>
+          </a:ln>
+        </p:spPr>
+        <p:txBody>
+          <a:bodyPr vert="horz" lIns="91440" tIns="45720" rIns="91440" bIns="45720" rtlCol="0" anchor="ctr"/>
+          <a:lstStyle/>
+          <a:p>
+            <a:endParaRPr lang="en-GB"/>
+          </a:p>
+        </p:txBody>
+      </p:sp>
+      <p:sp>
+        <p:nvSpPr>
+          <p:cNvPr id="5" name="Notes Placeholder 4"/>
+          <p:cNvSpPr>
+            <a:spLocks noGrp="1"/>
+          </p:cNvSpPr>
+          <p:nvPr>
+            <p:ph type="body" sz="quarter" idx="3"/>
+          </p:nvPr>
+        </p:nvSpPr>
+        <p:spPr>
+          <a:xfrm>
+            <a:off x="685800" y="4400550"/>
+            <a:ext cx="5486400" cy="3600450"/>
+          </a:xfrm>
+          <a:prstGeom prst="rect">
+            <a:avLst/>
+          </a:prstGeom>
+        </p:spPr>
+        <p:txBody>
+          <a:bodyPr vert="horz" lIns="91440" tIns="45720" rIns="91440" bIns="45720" rtlCol="0"/>
+          <a:lstStyle/>
+          <a:p>
+            <a:pPr lvl="0"/>
+            <a:r>
+              <a:rPr lang="en-US"/>
+              <a:t>Click to edit Master text styles</a:t>
+            </a:r>
+          </a:p>
+          <a:p>
+            <a:pPr lvl="1"/>
+            <a:r>
+              <a:rPr lang="en-US"/>
+              <a:t>Second level</a:t>
+            </a:r>
+          </a:p>
+          <a:p>
+            <a:pPr lvl="2"/>
+            <a:r>
+              <a:rPr lang="en-US"/>
+              <a:t>Third level</a:t>
+            </a:r>
+          </a:p>
+          <a:p>
+            <a:pPr lvl="3"/>
+            <a:r>
+              <a:rPr lang="en-US"/>
+              <a:t>Fourth level</a:t>
+            </a:r>
+          </a:p>
+          <a:p>
+            <a:pPr lvl="4"/>
+            <a:r>
+              <a:rPr lang="en-US"/>
+              <a:t>Fifth level</a:t>
+            </a:r>
+            <a:endParaRPr lang="en-GB"/>
+          </a:p>
+        </p:txBody>
+      </p:sp>
+      <p:sp>
+        <p:nvSpPr>
+          <p:cNvPr id="6" name="Footer Placeholder 5"/>
+          <p:cNvSpPr>
+            <a:spLocks noGrp="1"/>
+          </p:cNvSpPr>
+          <p:nvPr>
+            <p:ph type="ftr" sz="quarter" idx="4"/>
+          </p:nvPr>
+        </p:nvSpPr>
+        <p:spPr>
+          <a:xfrm>
+            <a:off x="0" y="8685213"/>
+            <a:ext cx="2971800" cy="458787"/>
+          </a:xfrm>
+          <a:prstGeom prst="rect">
+            <a:avLst/>
+          </a:prstGeom>
+        </p:spPr>
+        <p:txBody>
+          <a:bodyPr vert="horz" lIns="91440" tIns="45720" rIns="91440" bIns="45720" rtlCol="0" anchor="b"/>
+          <a:lstStyle>
+            <a:lvl1pPr algn="l">
+              <a:defRPr sz="1200"/>
+            </a:lvl1pPr>
+          </a:lstStyle>
+          <a:p>
+            <a:endParaRPr lang="en-GB"/>
+          </a:p>
+        </p:txBody>
+      </p:sp>
+      <p:sp>
+        <p:nvSpPr>
+          <p:cNvPr id="7" name="Slide Number Placeholder 6"/>
+          <p:cNvSpPr>
+            <a:spLocks noGrp="1"/>
+          </p:cNvSpPr>
+          <p:nvPr>
+            <p:ph type="sldNum" sz="quarter" idx="5"/>
+          </p:nvPr>
+        </p:nvSpPr>
+        <p:spPr>
+          <a:xfrm>
+            <a:off x="3884613" y="8685213"/>
+            <a:ext cx="2971800" cy="458787"/>
+          </a:xfrm>
+          <a:prstGeom prst="rect">
+            <a:avLst/>
+          </a:prstGeom>
+        </p:spPr>
+        <p:txBody>
+          <a:bodyPr vert="horz" lIns="91440" tIns="45720" rIns="91440" bIns="45720" rtlCol="0" anchor="b"/>
+          <a:lstStyle>
+            <a:lvl1pPr algn="r">
+              <a:defRPr sz="1200"/>
+            </a:lvl1pPr>
+          </a:lstStyle>
+          <a:p>
+            <a:fld id="{E3217CBA-FE40-4069-B690-DABCD4715C7D}" type="slidenum">
+              <a:rPr lang="en-GB" smtClean="0"/>
+              <a:t>‹#›</a:t>
+            </a:fld>
+            <a:endParaRPr lang="en-GB"/>
+          </a:p>
+        </p:txBody>
+      </p:sp>
+    </p:spTree>
+    <p:extLst>
+      <p:ext uri="{BB962C8B-B14F-4D97-AF65-F5344CB8AC3E}">
+        <p14:creationId xmlns:p14="http://schemas.microsoft.com/office/powerpoint/2010/main" val="4055040155"/>
+      </p:ext>
+    </p:extLst>
+  </p:cSld>
+  <p:clrMap bg1="lt1" tx1="dk1" bg2="lt2" tx2="dk2" accent1="accent1" accent2="accent2" accent3="accent3" accent4="accent4" accent5="accent5" accent6="accent6" hlink="hlink" folHlink="folHlink"/>
+  <p:notesStyle>
+    <a:lvl1pPr marL="0" algn="l" defTabSz="914400" rtl="0" eaLnBrk="1" latinLnBrk="0" hangingPunct="1">
+      <a:defRPr sz="1200" kern="1200">
+        <a:solidFill>
+          <a:schemeClr val="tx1"/>
+        </a:solidFill>
+        <a:latin typeface="+mn-lt"/>
+        <a:ea typeface="+mn-ea"/>
+        <a:cs typeface="+mn-cs"/>
+      </a:defRPr>
+    </a:lvl1pPr>
+    <a:lvl2pPr marL="457200" algn="l" defTabSz="914400" rtl="0" eaLnBrk="1" latinLnBrk="0" hangingPunct="1">
+      <a:defRPr sz="1200" kern="1200">
+        <a:solidFill>
+          <a:schemeClr val="tx1"/>
+        </a:solidFill>
+        <a:latin typeface="+mn-lt"/>
+        <a:ea typeface="+mn-ea"/>
+        <a:cs typeface="+mn-cs"/>
+      </a:defRPr>
+    </a:lvl2pPr>
+    <a:lvl3pPr marL="914400" algn="l" defTabSz="914400" rtl="0" eaLnBrk="1" latinLnBrk="0" hangingPunct="1">
+      <a:defRPr sz="1200" kern="1200">
+        <a:solidFill>
+          <a:schemeClr val="tx1"/>
+        </a:solidFill>
+        <a:latin typeface="+mn-lt"/>
+        <a:ea typeface="+mn-ea"/>
+        <a:cs typeface="+mn-cs"/>
+      </a:defRPr>
+    </a:lvl3pPr>
+    <a:lvl4pPr marL="1371600" algn="l" defTabSz="914400" rtl="0" eaLnBrk="1" latinLnBrk="0" hangingPunct="1">
+      <a:defRPr sz="1200" kern="1200">
+        <a:solidFill>
+          <a:schemeClr val="tx1"/>
+        </a:solidFill>
+        <a:latin typeface="+mn-lt"/>
+        <a:ea typeface="+mn-ea"/>
+        <a:cs typeface="+mn-cs"/>
+      </a:defRPr>
+    </a:lvl4pPr>
+    <a:lvl5pPr marL="1828800" algn="l" defTabSz="914400" rtl="0" eaLnBrk="1" latinLnBrk="0" hangingPunct="1">
+      <a:defRPr sz="1200" kern="1200">
+        <a:solidFill>
+          <a:schemeClr val="tx1"/>
+        </a:solidFill>
+        <a:latin typeface="+mn-lt"/>
+        <a:ea typeface="+mn-ea"/>
+        <a:cs typeface="+mn-cs"/>
+      </a:defRPr>
+    </a:lvl5pPr>
+    <a:lvl6pPr marL="2286000" algn="l" defTabSz="914400" rtl="0" eaLnBrk="1" latinLnBrk="0" hangingPunct="1">
+      <a:defRPr sz="1200" kern="1200">
+        <a:solidFill>
+          <a:schemeClr val="tx1"/>
+        </a:solidFill>
+        <a:latin typeface="+mn-lt"/>
+        <a:ea typeface="+mn-ea"/>
+        <a:cs typeface="+mn-cs"/>
+      </a:defRPr>
+    </a:lvl6pPr>
+    <a:lvl7pPr marL="2743200" algn="l" defTabSz="914400" rtl="0" eaLnBrk="1" latinLnBrk="0" hangingPunct="1">
+      <a:defRPr sz="1200" kern="1200">
+        <a:solidFill>
+          <a:schemeClr val="tx1"/>
+        </a:solidFill>
+        <a:latin typeface="+mn-lt"/>
+        <a:ea typeface="+mn-ea"/>
+        <a:cs typeface="+mn-cs"/>
+      </a:defRPr>
+    </a:lvl7pPr>
+    <a:lvl8pPr marL="3200400" algn="l" defTabSz="914400" rtl="0" eaLnBrk="1" latinLnBrk="0" hangingPunct="1">
+      <a:defRPr sz="1200" kern="1200">
+        <a:solidFill>
+          <a:schemeClr val="tx1"/>
+        </a:solidFill>
+        <a:latin typeface="+mn-lt"/>
+        <a:ea typeface="+mn-ea"/>
+        <a:cs typeface="+mn-cs"/>
+      </a:defRPr>
+    </a:lvl8pPr>
+    <a:lvl9pPr marL="3657600" algn="l" defTabSz="914400" rtl="0" eaLnBrk="1" latinLnBrk="0" hangingPunct="1">
+      <a:defRPr sz="1200" kern="1200">
+        <a:solidFill>
+          <a:schemeClr val="tx1"/>
+        </a:solidFill>
+        <a:latin typeface="+mn-lt"/>
+        <a:ea typeface="+mn-ea"/>
+        <a:cs typeface="+mn-cs"/>
+      </a:defRPr>
+    </a:lvl9pPr>
+  </p:notesStyle>
+</p:notesMaster>
+</file>
+
+<file path=ppt/notesSlides/notesSlide1.xml><?xml version="1.0" encoding="utf-8"?>
+<p:notes xmlns:a="http://schemas.openxmlformats.org/drawingml/2006/main" xmlns:r="http://schemas.openxmlformats.org/officeDocument/2006/relationships" xmlns:p="http://schemas.openxmlformats.org/presentationml/2006/main">
+  <p:cSld>
+    <p:spTree>
+      <p:nvGrpSpPr>
+        <p:cNvPr id="1" name=""/>
+        <p:cNvGrpSpPr/>
+        <p:nvPr/>
+      </p:nvGrpSpPr>
+      <p:grpSpPr>
+        <a:xfrm>
+          <a:off x="0" y="0"/>
+          <a:ext cx="0" cy="0"/>
+          <a:chOff x="0" y="0"/>
+          <a:chExt cx="0" cy="0"/>
+        </a:xfrm>
+      </p:grpSpPr>
+      <p:sp>
+        <p:nvSpPr>
+          <p:cNvPr id="2" name="Slide Image Placeholder 1"/>
+          <p:cNvSpPr>
+            <a:spLocks noGrp="1" noRot="1" noChangeAspect="1"/>
+          </p:cNvSpPr>
+          <p:nvPr>
+            <p:ph type="sldImg"/>
+          </p:nvPr>
+        </p:nvSpPr>
+        <p:spPr/>
+      </p:sp>
+      <p:sp>
+        <p:nvSpPr>
+          <p:cNvPr id="3" name="Notes Placeholder 2"/>
+          <p:cNvSpPr>
+            <a:spLocks noGrp="1"/>
+          </p:cNvSpPr>
+          <p:nvPr>
+            <p:ph type="body" idx="1"/>
+          </p:nvPr>
+        </p:nvSpPr>
+        <p:spPr/>
+        <p:txBody>
+          <a:bodyPr/>
+          <a:lstStyle/>
+          <a:p>
+            <a:endParaRPr lang="en-US" dirty="0"/>
+          </a:p>
+        </p:txBody>
+      </p:sp>
+      <p:sp>
+        <p:nvSpPr>
+          <p:cNvPr id="4" name="Slide Number Placeholder 3"/>
+          <p:cNvSpPr>
+            <a:spLocks noGrp="1"/>
+          </p:cNvSpPr>
+          <p:nvPr>
+            <p:ph type="sldNum" sz="quarter" idx="10"/>
+          </p:nvPr>
+        </p:nvSpPr>
+        <p:spPr/>
+        <p:txBody>
+          <a:bodyPr/>
+          <a:lstStyle/>
+          <a:p>
+            <a:fld id="{F7021451-1387-4CA6-816F-3879F97B5CBC}" type="slidenum">
+              <a:rPr lang="en-US"/>
+              <a:t>26</a:t>
+            </a:fld>
+            <a:endParaRPr lang="en-US"/>
+          </a:p>
+        </p:txBody>
+      </p:sp>
+    </p:spTree>
+    <p:extLst>
+      <p:ext uri="{BB962C8B-B14F-4D97-AF65-F5344CB8AC3E}">
+        <p14:creationId xmlns:p14="http://schemas.microsoft.com/office/powerpoint/2010/main" val="1024086991"/>
+      </p:ext>
+    </p:extLst>
+  </p:cSld>
+  <p:clrMapOvr>
+    <a:masterClrMapping/>
+  </p:clrMapOvr>
+</p:notes>
+</file>
+
+<file path=ppt/notesSlides/notesSlide2.xml><?xml version="1.0" encoding="utf-8"?>
+<p:notes xmlns:a="http://schemas.openxmlformats.org/drawingml/2006/main" xmlns:r="http://schemas.openxmlformats.org/officeDocument/2006/relationships" xmlns:p="http://schemas.openxmlformats.org/presentationml/2006/main">
+  <p:cSld>
+    <p:spTree>
+      <p:nvGrpSpPr>
+        <p:cNvPr id="1" name=""/>
+        <p:cNvGrpSpPr/>
+        <p:nvPr/>
+      </p:nvGrpSpPr>
+      <p:grpSpPr>
+        <a:xfrm>
+          <a:off x="0" y="0"/>
+          <a:ext cx="0" cy="0"/>
+          <a:chOff x="0" y="0"/>
+          <a:chExt cx="0" cy="0"/>
+        </a:xfrm>
+      </p:grpSpPr>
+      <p:sp>
+        <p:nvSpPr>
+          <p:cNvPr id="2" name="Slide Image Placeholder 1"/>
+          <p:cNvSpPr>
+            <a:spLocks noGrp="1" noRot="1" noChangeAspect="1"/>
+          </p:cNvSpPr>
+          <p:nvPr>
+            <p:ph type="sldImg"/>
+          </p:nvPr>
+        </p:nvSpPr>
+        <p:spPr/>
+      </p:sp>
+      <p:sp>
+        <p:nvSpPr>
+          <p:cNvPr id="3" name="Notes Placeholder 2"/>
+          <p:cNvSpPr>
+            <a:spLocks noGrp="1"/>
+          </p:cNvSpPr>
+          <p:nvPr>
+            <p:ph type="body" idx="1"/>
+          </p:nvPr>
+        </p:nvSpPr>
+        <p:spPr/>
+        <p:txBody>
+          <a:bodyPr/>
+          <a:lstStyle/>
+          <a:p>
+            <a:endParaRPr lang="en-US" dirty="0"/>
+          </a:p>
+        </p:txBody>
+      </p:sp>
+      <p:sp>
+        <p:nvSpPr>
+          <p:cNvPr id="4" name="Slide Number Placeholder 3"/>
+          <p:cNvSpPr>
+            <a:spLocks noGrp="1"/>
+          </p:cNvSpPr>
+          <p:nvPr>
+            <p:ph type="sldNum" sz="quarter" idx="10"/>
+          </p:nvPr>
+        </p:nvSpPr>
+        <p:spPr/>
+        <p:txBody>
+          <a:bodyPr/>
+          <a:lstStyle/>
+          <a:p>
+            <a:fld id="{F7021451-1387-4CA6-816F-3879F97B5CBC}" type="slidenum">
+              <a:rPr lang="en-US"/>
+              <a:t>27</a:t>
+            </a:fld>
+            <a:endParaRPr lang="en-US"/>
+          </a:p>
+        </p:txBody>
+      </p:sp>
+    </p:spTree>
+    <p:extLst>
+      <p:ext uri="{BB962C8B-B14F-4D97-AF65-F5344CB8AC3E}">
+        <p14:creationId xmlns:p14="http://schemas.microsoft.com/office/powerpoint/2010/main" val="1024086991"/>
+      </p:ext>
+    </p:extLst>
+  </p:cSld>
+  <p:clrMapOvr>
+    <a:masterClrMapping/>
+  </p:clrMapOvr>
+</p:notes>
+</file>
+
+<file path=ppt/notesSlides/notesSlide3.xml><?xml version="1.0" encoding="utf-8"?>
+<p:notes xmlns:a="http://schemas.openxmlformats.org/drawingml/2006/main" xmlns:r="http://schemas.openxmlformats.org/officeDocument/2006/relationships" xmlns:p="http://schemas.openxmlformats.org/presentationml/2006/main">
+  <p:cSld>
+    <p:spTree>
+      <p:nvGrpSpPr>
+        <p:cNvPr id="1" name=""/>
+        <p:cNvGrpSpPr/>
+        <p:nvPr/>
+      </p:nvGrpSpPr>
+      <p:grpSpPr>
+        <a:xfrm>
+          <a:off x="0" y="0"/>
+          <a:ext cx="0" cy="0"/>
+          <a:chOff x="0" y="0"/>
+          <a:chExt cx="0" cy="0"/>
+        </a:xfrm>
+      </p:grpSpPr>
+      <p:sp>
+        <p:nvSpPr>
+          <p:cNvPr id="2" name="Slide Image Placeholder 1"/>
+          <p:cNvSpPr>
+            <a:spLocks noGrp="1" noRot="1" noChangeAspect="1"/>
+          </p:cNvSpPr>
+          <p:nvPr>
+            <p:ph type="sldImg"/>
+          </p:nvPr>
+        </p:nvSpPr>
+        <p:spPr/>
+      </p:sp>
+      <p:sp>
+        <p:nvSpPr>
+          <p:cNvPr id="3" name="Notes Placeholder 2"/>
+          <p:cNvSpPr>
+            <a:spLocks noGrp="1"/>
+          </p:cNvSpPr>
+          <p:nvPr>
+            <p:ph type="body" idx="1"/>
+          </p:nvPr>
+        </p:nvSpPr>
+        <p:spPr/>
+        <p:txBody>
+          <a:bodyPr/>
+          <a:lstStyle/>
+          <a:p>
+            <a:endParaRPr lang="en-US" dirty="0"/>
+          </a:p>
+        </p:txBody>
+      </p:sp>
+      <p:sp>
+        <p:nvSpPr>
+          <p:cNvPr id="4" name="Slide Number Placeholder 3"/>
+          <p:cNvSpPr>
+            <a:spLocks noGrp="1"/>
+          </p:cNvSpPr>
+          <p:nvPr>
+            <p:ph type="sldNum" sz="quarter" idx="10"/>
+          </p:nvPr>
+        </p:nvSpPr>
+        <p:spPr/>
+        <p:txBody>
+          <a:bodyPr/>
+          <a:lstStyle/>
+          <a:p>
+            <a:fld id="{F7021451-1387-4CA6-816F-3879F97B5CBC}" type="slidenum">
+              <a:rPr lang="en-US"/>
+              <a:t>28</a:t>
+            </a:fld>
+            <a:endParaRPr lang="en-US"/>
+          </a:p>
+        </p:txBody>
+      </p:sp>
+    </p:spTree>
+    <p:extLst>
+      <p:ext uri="{BB962C8B-B14F-4D97-AF65-F5344CB8AC3E}">
+        <p14:creationId xmlns:p14="http://schemas.microsoft.com/office/powerpoint/2010/main" val="1024086991"/>
+      </p:ext>
+    </p:extLst>
+  </p:cSld>
+  <p:clrMapOvr>
+    <a:masterClrMapping/>
+  </p:clrMapOvr>
+</p:notes>
+</file>
+
+<file path=ppt/notesSlides/notesSlide4.xml><?xml version="1.0" encoding="utf-8"?>
+<p:notes xmlns:a="http://schemas.openxmlformats.org/drawingml/2006/main" xmlns:r="http://schemas.openxmlformats.org/officeDocument/2006/relationships" xmlns:p="http://schemas.openxmlformats.org/presentationml/2006/main">
+  <p:cSld>
+    <p:spTree>
+      <p:nvGrpSpPr>
+        <p:cNvPr id="1" name=""/>
+        <p:cNvGrpSpPr/>
+        <p:nvPr/>
+      </p:nvGrpSpPr>
+      <p:grpSpPr>
+        <a:xfrm>
+          <a:off x="0" y="0"/>
+          <a:ext cx="0" cy="0"/>
+          <a:chOff x="0" y="0"/>
+          <a:chExt cx="0" cy="0"/>
+        </a:xfrm>
+      </p:grpSpPr>
+      <p:sp>
+        <p:nvSpPr>
+          <p:cNvPr id="2" name="Slide Image Placeholder 1"/>
+          <p:cNvSpPr>
+            <a:spLocks noGrp="1" noRot="1" noChangeAspect="1"/>
+          </p:cNvSpPr>
+          <p:nvPr>
+            <p:ph type="sldImg"/>
+          </p:nvPr>
+        </p:nvSpPr>
+        <p:spPr/>
+      </p:sp>
+      <p:sp>
+        <p:nvSpPr>
+          <p:cNvPr id="3" name="Notes Placeholder 2"/>
+          <p:cNvSpPr>
+            <a:spLocks noGrp="1"/>
+          </p:cNvSpPr>
+          <p:nvPr>
+            <p:ph type="body" idx="1"/>
+          </p:nvPr>
+        </p:nvSpPr>
+        <p:spPr/>
+        <p:txBody>
+          <a:bodyPr/>
+          <a:lstStyle/>
+          <a:p>
+            <a:endParaRPr lang="en-US" dirty="0"/>
+          </a:p>
+        </p:txBody>
+      </p:sp>
+      <p:sp>
+        <p:nvSpPr>
+          <p:cNvPr id="4" name="Slide Number Placeholder 3"/>
+          <p:cNvSpPr>
+            <a:spLocks noGrp="1"/>
+          </p:cNvSpPr>
+          <p:nvPr>
+            <p:ph type="sldNum" sz="quarter" idx="10"/>
+          </p:nvPr>
+        </p:nvSpPr>
+        <p:spPr/>
+        <p:txBody>
+          <a:bodyPr/>
+          <a:lstStyle/>
+          <a:p>
+            <a:fld id="{F7021451-1387-4CA6-816F-3879F97B5CBC}" type="slidenum">
+              <a:rPr lang="en-US"/>
+              <a:t>29</a:t>
+            </a:fld>
+            <a:endParaRPr lang="en-US"/>
+          </a:p>
+        </p:txBody>
+      </p:sp>
+    </p:spTree>
+    <p:extLst>
+      <p:ext uri="{BB962C8B-B14F-4D97-AF65-F5344CB8AC3E}">
+        <p14:creationId xmlns:p14="http://schemas.microsoft.com/office/powerpoint/2010/main" val="1024086991"/>
+      </p:ext>
+    </p:extLst>
+  </p:cSld>
+  <p:clrMapOvr>
+    <a:masterClrMapping/>
+  </p:clrMapOvr>
+</p:notes>
+</file>
+
+<file path=ppt/notesSlides/notesSlide5.xml><?xml version="1.0" encoding="utf-8"?>
+<p:notes xmlns:a="http://schemas.openxmlformats.org/drawingml/2006/main" xmlns:r="http://schemas.openxmlformats.org/officeDocument/2006/relationships" xmlns:p="http://schemas.openxmlformats.org/presentationml/2006/main">
+  <p:cSld>
+    <p:spTree>
+      <p:nvGrpSpPr>
+        <p:cNvPr id="1" name=""/>
+        <p:cNvGrpSpPr/>
+        <p:nvPr/>
+      </p:nvGrpSpPr>
+      <p:grpSpPr>
+        <a:xfrm>
+          <a:off x="0" y="0"/>
+          <a:ext cx="0" cy="0"/>
+          <a:chOff x="0" y="0"/>
+          <a:chExt cx="0" cy="0"/>
+        </a:xfrm>
+      </p:grpSpPr>
+      <p:sp>
+        <p:nvSpPr>
+          <p:cNvPr id="2" name="Slide Image Placeholder 1"/>
+          <p:cNvSpPr>
+            <a:spLocks noGrp="1" noRot="1" noChangeAspect="1"/>
+          </p:cNvSpPr>
+          <p:nvPr>
+            <p:ph type="sldImg"/>
+          </p:nvPr>
+        </p:nvSpPr>
+        <p:spPr/>
+      </p:sp>
+      <p:sp>
+        <p:nvSpPr>
+          <p:cNvPr id="3" name="Notes Placeholder 2"/>
+          <p:cNvSpPr>
+            <a:spLocks noGrp="1"/>
+          </p:cNvSpPr>
+          <p:nvPr>
+            <p:ph type="body" idx="1"/>
+          </p:nvPr>
+        </p:nvSpPr>
+        <p:spPr/>
+        <p:txBody>
+          <a:bodyPr/>
+          <a:lstStyle/>
+          <a:p>
+            <a:endParaRPr lang="en-US" dirty="0"/>
+          </a:p>
+        </p:txBody>
+      </p:sp>
+      <p:sp>
+        <p:nvSpPr>
+          <p:cNvPr id="4" name="Slide Number Placeholder 3"/>
+          <p:cNvSpPr>
+            <a:spLocks noGrp="1"/>
+          </p:cNvSpPr>
+          <p:nvPr>
+            <p:ph type="sldNum" sz="quarter" idx="10"/>
+          </p:nvPr>
+        </p:nvSpPr>
+        <p:spPr/>
+        <p:txBody>
+          <a:bodyPr/>
+          <a:lstStyle/>
+          <a:p>
+            <a:fld id="{F7021451-1387-4CA6-816F-3879F97B5CBC}" type="slidenum">
+              <a:rPr lang="en-US"/>
+              <a:t>30</a:t>
+            </a:fld>
+            <a:endParaRPr lang="en-US"/>
+          </a:p>
+        </p:txBody>
+      </p:sp>
+    </p:spTree>
+    <p:extLst>
+      <p:ext uri="{BB962C8B-B14F-4D97-AF65-F5344CB8AC3E}">
+        <p14:creationId xmlns:p14="http://schemas.microsoft.com/office/powerpoint/2010/main" val="1024086991"/>
+      </p:ext>
+    </p:extLst>
+  </p:cSld>
+  <p:clrMapOvr>
+    <a:masterClrMapping/>
+  </p:clrMapOvr>
+</p:notes>
+</file>
+
+<file path=ppt/notesSlides/notesSlide6.xml><?xml version="1.0" encoding="utf-8"?>
+<p:notes xmlns:a="http://schemas.openxmlformats.org/drawingml/2006/main" xmlns:r="http://schemas.openxmlformats.org/officeDocument/2006/relationships" xmlns:p="http://schemas.openxmlformats.org/presentationml/2006/main">
+  <p:cSld>
+    <p:spTree>
+      <p:nvGrpSpPr>
+        <p:cNvPr id="1" name=""/>
+        <p:cNvGrpSpPr/>
+        <p:nvPr/>
+      </p:nvGrpSpPr>
+      <p:grpSpPr>
+        <a:xfrm>
+          <a:off x="0" y="0"/>
+          <a:ext cx="0" cy="0"/>
+          <a:chOff x="0" y="0"/>
+          <a:chExt cx="0" cy="0"/>
+        </a:xfrm>
+      </p:grpSpPr>
+      <p:sp>
+        <p:nvSpPr>
+          <p:cNvPr id="2" name="Slide Image Placeholder 1"/>
+          <p:cNvSpPr>
+            <a:spLocks noGrp="1" noRot="1" noChangeAspect="1"/>
+          </p:cNvSpPr>
+          <p:nvPr>
+            <p:ph type="sldImg"/>
+          </p:nvPr>
+        </p:nvSpPr>
+        <p:spPr/>
+      </p:sp>
+      <p:sp>
+        <p:nvSpPr>
+          <p:cNvPr id="3" name="Notes Placeholder 2"/>
+          <p:cNvSpPr>
+            <a:spLocks noGrp="1"/>
+          </p:cNvSpPr>
+          <p:nvPr>
+            <p:ph type="body" idx="1"/>
+          </p:nvPr>
+        </p:nvSpPr>
+        <p:spPr/>
+        <p:txBody>
+          <a:bodyPr/>
+          <a:lstStyle/>
+          <a:p>
+            <a:endParaRPr lang="en-US" dirty="0"/>
+          </a:p>
+        </p:txBody>
+      </p:sp>
+      <p:sp>
+        <p:nvSpPr>
+          <p:cNvPr id="4" name="Slide Number Placeholder 3"/>
+          <p:cNvSpPr>
+            <a:spLocks noGrp="1"/>
+          </p:cNvSpPr>
+          <p:nvPr>
+            <p:ph type="sldNum" sz="quarter" idx="10"/>
+          </p:nvPr>
+        </p:nvSpPr>
+        <p:spPr/>
+        <p:txBody>
+          <a:bodyPr/>
+          <a:lstStyle/>
+          <a:p>
+            <a:fld id="{F7021451-1387-4CA6-816F-3879F97B5CBC}" type="slidenum">
+              <a:rPr lang="en-US"/>
+              <a:t>31</a:t>
+            </a:fld>
+            <a:endParaRPr lang="en-US"/>
+          </a:p>
+        </p:txBody>
+      </p:sp>
+    </p:spTree>
+    <p:extLst>
+      <p:ext uri="{BB962C8B-B14F-4D97-AF65-F5344CB8AC3E}">
+        <p14:creationId xmlns:p14="http://schemas.microsoft.com/office/powerpoint/2010/main" val="1024086991"/>
+      </p:ext>
+    </p:extLst>
+  </p:cSld>
+  <p:clrMapOvr>
+    <a:masterClrMapping/>
+  </p:clrMapOvr>
+</p:notes>
 </file>
 
 <file path=ppt/slideLayouts/slideLayout1.xml><?xml version="1.0" encoding="utf-8"?>
@@ -941,6 +2013,41 @@
     <p:extLst>
       <p:ext uri="{BB962C8B-B14F-4D97-AF65-F5344CB8AC3E}">
         <p14:creationId xmlns:p14="http://schemas.microsoft.com/office/powerpoint/2010/main" val="545555373"/>
+      </p:ext>
+    </p:extLst>
+  </p:cSld>
+  <p:clrMapOvr>
+    <a:masterClrMapping/>
+  </p:clrMapOvr>
+</p:sldLayout>
+</file>
+
+<file path=ppt/slideLayouts/slideLayout12.xml><?xml version="1.0" encoding="utf-8"?>
+<p:sldLayout xmlns:a="http://schemas.openxmlformats.org/drawingml/2006/main" xmlns:r="http://schemas.openxmlformats.org/officeDocument/2006/relationships" xmlns:p="http://schemas.openxmlformats.org/presentationml/2006/main">
+  <p:cSld name="DEFAULT">
+    <p:bg>
+      <p:bgRef idx="1001">
+        <a:schemeClr val="bg1"/>
+      </p:bgRef>
+    </p:bg>
+    <p:spTree>
+      <p:nvGrpSpPr>
+        <p:cNvPr id="1" name=""/>
+        <p:cNvGrpSpPr/>
+        <p:nvPr/>
+      </p:nvGrpSpPr>
+      <p:grpSpPr>
+        <a:xfrm>
+          <a:off x="0" y="0"/>
+          <a:ext cx="0" cy="0"/>
+          <a:chOff x="0" y="0"/>
+          <a:chExt cx="0" cy="0"/>
+        </a:xfrm>
+      </p:grpSpPr>
+    </p:spTree>
+    <p:extLst>
+      <p:ext uri="{BB962C8B-B14F-4D97-AF65-F5344CB8AC3E}">
+        <p14:creationId xmlns:p14="http://schemas.microsoft.com/office/powerpoint/2010/main" val="698424927"/>
       </p:ext>
     </p:extLst>
   </p:cSld>
@@ -3252,6 +4359,7 @@
     <p:sldLayoutId id="2147483657" r:id="rId9"/>
     <p:sldLayoutId id="2147483658" r:id="rId10"/>
     <p:sldLayoutId id="2147483659" r:id="rId11"/>
+    <p:sldLayoutId id="2147483660" r:id="rId12"/>
   </p:sldLayoutIdLst>
   <p:txStyles>
     <p:titleStyle>
@@ -9420,10 +10528,74 @@
       </p:grpSpPr>
       <p:sp>
         <p:nvSpPr>
-          <p:cNvPr id="2" name="Title 1">
-            <a:extLst>
-              <a:ext uri="{FF2B5EF4-FFF2-40B4-BE49-F238E27FC236}">
-                <a16:creationId xmlns:a16="http://schemas.microsoft.com/office/drawing/2014/main" id="{6D8CEF4F-4621-B398-795A-D6013FEE9D2B}"/>
+          <p:cNvPr id="2" name="Text 0"/>
+          <p:cNvSpPr/>
+          <p:nvPr/>
+        </p:nvSpPr>
+        <p:spPr>
+          <a:xfrm>
+            <a:off x="457200" y="731520"/>
+            <a:ext cx="10972800" cy="457200"/>
+          </a:xfrm>
+          <a:prstGeom prst="rect">
+            <a:avLst/>
+          </a:prstGeom>
+          <a:noFill/>
+          <a:ln/>
+        </p:spPr>
+        <p:txBody>
+          <a:bodyPr wrap="square" rtlCol="0" anchor="ctr"/>
+          <a:lstStyle/>
+          <a:p>
+            <a:pPr marL="0" indent="0">
+              <a:buNone/>
+            </a:pPr>
+            <a:r>
+              <a:rPr lang="en-US" sz="3200" b="1" dirty="0">
+                <a:solidFill>
+                  <a:srgbClr val="000000"/>
+                </a:solidFill>
+              </a:rPr>
+              <a:t>Acemoglu et al. (2001)</a:t>
+            </a:r>
+            <a:endParaRPr lang="en-US" sz="3200" dirty="0"/>
+          </a:p>
+        </p:txBody>
+      </p:sp>
+      <p:sp>
+        <p:nvSpPr>
+          <p:cNvPr id="4" name="Text 2"/>
+          <p:cNvSpPr/>
+          <p:nvPr/>
+        </p:nvSpPr>
+        <p:spPr>
+          <a:xfrm>
+            <a:off x="731520" y="1371600"/>
+            <a:ext cx="9144000" cy="914400"/>
+          </a:xfrm>
+          <a:prstGeom prst="rect">
+            <a:avLst/>
+          </a:prstGeom>
+          <a:noFill/>
+          <a:ln/>
+        </p:spPr>
+        <p:txBody>
+          <a:bodyPr wrap="square" rtlCol="0" anchor="ctr"/>
+          <a:lstStyle/>
+          <a:p>
+            <a:pPr marL="0" indent="0">
+              <a:buNone/>
+            </a:pPr>
+            <a:endParaRPr lang="en-US" sz="2200" dirty="0"/>
+          </a:p>
+        </p:txBody>
+      </p:sp>
+      <p:sp>
+        <p:nvSpPr>
+          <p:cNvPr id="5" name="Title 4">
+            <a:extLst>
+              <a:ext uri="{FF2B5EF4-FFF2-40B4-BE49-F238E27FC236}">
+                <a16:creationId xmlns:a16="http://schemas.microsoft.com/office/drawing/2014/main" id="{99B161B7-7A53-19C8-127D-F29888A3023E}"/>
               </a:ext>
             </a:extLst>
           </p:cNvPr>
@@ -9434,134 +10606,492 @@
             <p:ph type="title"/>
           </p:nvPr>
         </p:nvSpPr>
-        <p:spPr/>
-        <p:txBody>
-          <a:bodyPr/>
+        <p:spPr>
+          <a:xfrm>
+            <a:off x="838200" y="1507264"/>
+            <a:ext cx="10515600" cy="2852737"/>
+          </a:xfrm>
+        </p:spPr>
+        <p:txBody>
+          <a:bodyPr>
+            <a:normAutofit/>
+          </a:bodyPr>
           <a:lstStyle/>
           <a:p>
             <a:r>
-              <a:rPr lang="en-GB" dirty="0">
+              <a:rPr lang="en-US" sz="4800" dirty="0">
                 <a:solidFill>
-                  <a:srgbClr val="FF0000"/>
+                  <a:srgbClr val="000000"/>
                 </a:solidFill>
               </a:rPr>
-              <a:t>Further Readings</a:t>
-            </a:r>
-          </a:p>
-        </p:txBody>
-      </p:sp>
-      <p:sp>
-        <p:nvSpPr>
-          <p:cNvPr id="4" name="TextBox 3">
-            <a:extLst>
-              <a:ext uri="{FF2B5EF4-FFF2-40B4-BE49-F238E27FC236}">
-                <a16:creationId xmlns:a16="http://schemas.microsoft.com/office/drawing/2014/main" id="{52A82FCD-3319-124D-1AFA-2E178C88A554}"/>
-              </a:ext>
-            </a:extLst>
-          </p:cNvPr>
-          <p:cNvSpPr txBox="1"/>
+              <a:t>Research question: Do current political institutions cause higher GDP per capita?</a:t>
+            </a:r>
+            <a:endParaRPr lang="en-GB" sz="4800" dirty="0"/>
+          </a:p>
+        </p:txBody>
+      </p:sp>
+    </p:spTree>
+  </p:cSld>
+  <p:clrMapOvr>
+    <a:masterClrMapping/>
+  </p:clrMapOvr>
+</p:sld>
+</file>
+
+<file path=ppt/slides/slide27.xml><?xml version="1.0" encoding="utf-8"?>
+<p:sld xmlns:a="http://schemas.openxmlformats.org/drawingml/2006/main" xmlns:r="http://schemas.openxmlformats.org/officeDocument/2006/relationships" xmlns:p="http://schemas.openxmlformats.org/presentationml/2006/main">
+  <p:cSld>
+    <p:spTree>
+      <p:nvGrpSpPr>
+        <p:cNvPr id="1" name=""/>
+        <p:cNvGrpSpPr/>
+        <p:nvPr/>
+      </p:nvGrpSpPr>
+      <p:grpSpPr>
+        <a:xfrm>
+          <a:off x="0" y="0"/>
+          <a:ext cx="0" cy="0"/>
+          <a:chOff x="0" y="0"/>
+          <a:chExt cx="0" cy="0"/>
+        </a:xfrm>
+      </p:grpSpPr>
+      <p:sp>
+        <p:nvSpPr>
+          <p:cNvPr id="2" name="Text 0"/>
+          <p:cNvSpPr/>
           <p:nvPr/>
         </p:nvSpPr>
         <p:spPr>
           <a:xfrm>
-            <a:off x="949849" y="1820866"/>
-            <a:ext cx="6100996" cy="4524315"/>
+            <a:off x="457200" y="644434"/>
+            <a:ext cx="10972800" cy="457200"/>
           </a:xfrm>
           <a:prstGeom prst="rect">
             <a:avLst/>
           </a:prstGeom>
           <a:noFill/>
+          <a:ln/>
         </p:spPr>
         <p:txBody>
-          <a:bodyPr wrap="square">
-            <a:spAutoFit/>
-          </a:bodyPr>
+          <a:bodyPr wrap="square" rtlCol="0" anchor="ctr"/>
           <a:lstStyle/>
           <a:p>
-            <a:r>
-              <a:rPr lang="en-GB" dirty="0" err="1"/>
-              <a:t>Antonakis</a:t>
-            </a:r>
-            <a:r>
-              <a:rPr lang="en-GB" dirty="0"/>
-              <a:t>, J., </a:t>
-            </a:r>
-            <a:r>
-              <a:rPr lang="en-GB" dirty="0" err="1"/>
-              <a:t>Bendahan</a:t>
-            </a:r>
-            <a:r>
-              <a:rPr lang="en-GB" dirty="0"/>
-              <a:t>, S., </a:t>
-            </a:r>
-            <a:r>
-              <a:rPr lang="en-GB" dirty="0" err="1"/>
-              <a:t>Jacquart</a:t>
-            </a:r>
-            <a:r>
-              <a:rPr lang="en-GB" dirty="0"/>
-              <a:t>, P., &amp; </a:t>
-            </a:r>
-            <a:r>
-              <a:rPr lang="en-GB" dirty="0" err="1"/>
-              <a:t>Lalive</a:t>
-            </a:r>
-            <a:r>
-              <a:rPr lang="en-GB" dirty="0"/>
-              <a:t>, R. (2014). Causality and endogeneity: Problems and solutions. The Oxford Handbook of Leadership and Organizations, 1, 93-117.</a:t>
-            </a:r>
-          </a:p>
-          <a:p>
-            <a:endParaRPr lang="en-GB" dirty="0"/>
-          </a:p>
-          <a:p>
-            <a:r>
-              <a:rPr lang="en-GB" dirty="0" err="1"/>
-              <a:t>Busenbark</a:t>
-            </a:r>
-            <a:r>
-              <a:rPr lang="en-GB" dirty="0"/>
-              <a:t>, J. R., Yoon, H., Gamache, D. L., &amp; Withers, M. C. (2022). Omitted variable bias: Examining management research with the impact threshold of a confounding variable (ITCV). Journal of Management, 48(1), 17-48.</a:t>
-            </a:r>
-          </a:p>
-          <a:p>
-            <a:endParaRPr lang="en-GB" dirty="0"/>
-          </a:p>
-          <a:p>
-            <a:r>
-              <a:rPr lang="en-GB" dirty="0" err="1"/>
-              <a:t>Daryanto</a:t>
-            </a:r>
-            <a:r>
-              <a:rPr lang="en-GB" dirty="0"/>
-              <a:t>, A. (2020). </a:t>
-            </a:r>
-            <a:r>
-              <a:rPr lang="en-GB" dirty="0" err="1"/>
-              <a:t>EndoS</a:t>
-            </a:r>
-            <a:r>
-              <a:rPr lang="en-GB" dirty="0"/>
-              <a:t>: An SPSS macro to assess endogeneity. The Quantitative Methods for Psychology, 16(1), 56-70.</a:t>
-            </a:r>
-          </a:p>
-          <a:p>
-            <a:endParaRPr lang="en-GB" dirty="0"/>
-          </a:p>
-          <a:p>
-            <a:r>
-              <a:rPr lang="en-GB" dirty="0"/>
-              <a:t>Sande, J. B., &amp; Ghosh, M. (2018). Endogeneity in survey research. International Journal of Research in Marketing, 35(2), 185-204.</a:t>
-            </a:r>
+            <a:pPr marL="0" indent="0">
+              <a:buNone/>
+            </a:pPr>
+            <a:r>
+              <a:rPr lang="en-US" sz="3600" b="1" dirty="0">
+                <a:solidFill>
+                  <a:srgbClr val="000000"/>
+                </a:solidFill>
+              </a:rPr>
+              <a:t>The Endogeneity Problem</a:t>
+            </a:r>
+            <a:endParaRPr lang="en-US" sz="3600" dirty="0"/>
+          </a:p>
+        </p:txBody>
+      </p:sp>
+      <p:sp>
+        <p:nvSpPr>
+          <p:cNvPr id="3" name="Text 1"/>
+          <p:cNvSpPr/>
+          <p:nvPr/>
+        </p:nvSpPr>
+        <p:spPr>
+          <a:xfrm>
+            <a:off x="1145177" y="2353492"/>
+            <a:ext cx="9144000" cy="2743200"/>
+          </a:xfrm>
+          <a:prstGeom prst="rect">
+            <a:avLst/>
+          </a:prstGeom>
+          <a:noFill/>
+          <a:ln/>
+        </p:spPr>
+        <p:txBody>
+          <a:bodyPr wrap="square" rtlCol="0" anchor="ctr"/>
+          <a:lstStyle/>
+          <a:p>
+            <a:pPr marL="0" indent="0">
+              <a:buNone/>
+            </a:pPr>
+            <a:r>
+              <a:rPr lang="en-US" sz="3200" dirty="0">
+                <a:solidFill>
+                  <a:srgbClr val="000000"/>
+                </a:solidFill>
+              </a:rPr>
+              <a:t>Model: log(GDP)=β0+β1Risk+u</a:t>
+            </a:r>
+            <a:endParaRPr lang="en-US" sz="3200" dirty="0"/>
+          </a:p>
+          <a:p>
+            <a:pPr marL="0" indent="0">
+              <a:buNone/>
+            </a:pPr>
+            <a:endParaRPr lang="en-US" sz="3200" dirty="0"/>
+          </a:p>
+          <a:p>
+            <a:pPr marL="0" indent="0">
+              <a:buNone/>
+            </a:pPr>
+            <a:r>
+              <a:rPr lang="en-US" sz="3200" dirty="0">
+                <a:solidFill>
+                  <a:srgbClr val="000000"/>
+                </a:solidFill>
+              </a:rPr>
+              <a:t>• Risk measures institutional quality</a:t>
+            </a:r>
+            <a:endParaRPr lang="en-US" sz="3200" dirty="0"/>
+          </a:p>
+          <a:p>
+            <a:pPr marL="0" indent="0">
+              <a:buNone/>
+            </a:pPr>
+            <a:r>
+              <a:rPr lang="en-US" sz="3200" dirty="0">
+                <a:solidFill>
+                  <a:srgbClr val="000000"/>
+                </a:solidFill>
+              </a:rPr>
+              <a:t>• OLS coefficient = 0.522</a:t>
+            </a:r>
+            <a:endParaRPr lang="en-US" sz="3200" dirty="0"/>
+          </a:p>
+          <a:p>
+            <a:pPr marL="0" indent="0">
+              <a:buNone/>
+            </a:pPr>
+            <a:r>
+              <a:rPr lang="en-US" sz="3200" dirty="0">
+                <a:solidFill>
+                  <a:srgbClr val="000000"/>
+                </a:solidFill>
+              </a:rPr>
+              <a:t>• Omitted factors affect both institutions and GDP</a:t>
+            </a:r>
+            <a:endParaRPr lang="en-US" sz="3200" dirty="0"/>
           </a:p>
         </p:txBody>
       </p:sp>
     </p:spTree>
-    <p:extLst>
-      <p:ext uri="{BB962C8B-B14F-4D97-AF65-F5344CB8AC3E}">
-        <p14:creationId xmlns:p14="http://schemas.microsoft.com/office/powerpoint/2010/main" val="3993109663"/>
-      </p:ext>
-    </p:extLst>
+  </p:cSld>
+  <p:clrMapOvr>
+    <a:masterClrMapping/>
+  </p:clrMapOvr>
+</p:sld>
+</file>
+
+<file path=ppt/slides/slide28.xml><?xml version="1.0" encoding="utf-8"?>
+<p:sld xmlns:a="http://schemas.openxmlformats.org/drawingml/2006/main" xmlns:r="http://schemas.openxmlformats.org/officeDocument/2006/relationships" xmlns:p="http://schemas.openxmlformats.org/presentationml/2006/main">
+  <p:cSld>
+    <p:spTree>
+      <p:nvGrpSpPr>
+        <p:cNvPr id="1" name=""/>
+        <p:cNvGrpSpPr/>
+        <p:nvPr/>
+      </p:nvGrpSpPr>
+      <p:grpSpPr>
+        <a:xfrm>
+          <a:off x="0" y="0"/>
+          <a:ext cx="0" cy="0"/>
+          <a:chOff x="0" y="0"/>
+          <a:chExt cx="0" cy="0"/>
+        </a:xfrm>
+      </p:grpSpPr>
+      <p:sp>
+        <p:nvSpPr>
+          <p:cNvPr id="2" name="Text 0"/>
+          <p:cNvSpPr/>
+          <p:nvPr/>
+        </p:nvSpPr>
+        <p:spPr>
+          <a:xfrm>
+            <a:off x="582384" y="502920"/>
+            <a:ext cx="10972800" cy="457200"/>
+          </a:xfrm>
+          <a:prstGeom prst="rect">
+            <a:avLst/>
+          </a:prstGeom>
+          <a:noFill/>
+          <a:ln/>
+        </p:spPr>
+        <p:txBody>
+          <a:bodyPr wrap="square" rtlCol="0" anchor="ctr"/>
+          <a:lstStyle/>
+          <a:p>
+            <a:pPr marL="0" indent="0">
+              <a:buNone/>
+            </a:pPr>
+            <a:r>
+              <a:rPr lang="en-US" sz="3200" b="1" dirty="0">
+                <a:solidFill>
+                  <a:srgbClr val="000000"/>
+                </a:solidFill>
+              </a:rPr>
+              <a:t>Instrument: Settler Mortality</a:t>
+            </a:r>
+            <a:endParaRPr lang="en-US" sz="3200" dirty="0"/>
+          </a:p>
+        </p:txBody>
+      </p:sp>
+      <p:sp>
+        <p:nvSpPr>
+          <p:cNvPr id="3" name="Text 1"/>
+          <p:cNvSpPr/>
+          <p:nvPr/>
+        </p:nvSpPr>
+        <p:spPr>
+          <a:xfrm>
+            <a:off x="731520" y="1097280"/>
+            <a:ext cx="10058400" cy="2743200"/>
+          </a:xfrm>
+          <a:prstGeom prst="rect">
+            <a:avLst/>
+          </a:prstGeom>
+          <a:noFill/>
+          <a:ln/>
+        </p:spPr>
+        <p:txBody>
+          <a:bodyPr wrap="square" rtlCol="0" anchor="ctr"/>
+          <a:lstStyle/>
+          <a:p>
+            <a:pPr marL="0" indent="0">
+              <a:buNone/>
+            </a:pPr>
+            <a:r>
+              <a:rPr lang="en-US" sz="2800" dirty="0">
+                <a:solidFill>
+                  <a:srgbClr val="000000"/>
+                </a:solidFill>
+              </a:rPr>
+              <a:t>• Settler mortality influenced colonial strategy</a:t>
+            </a:r>
+            <a:endParaRPr lang="en-US" sz="2800" dirty="0"/>
+          </a:p>
+          <a:p>
+            <a:pPr lvl="1"/>
+            <a:r>
+              <a:rPr lang="en-US" sz="2800" dirty="0">
+                <a:solidFill>
+                  <a:srgbClr val="000000"/>
+                </a:solidFill>
+              </a:rPr>
+              <a:t>• High mortality → extractive institutions</a:t>
+            </a:r>
+            <a:endParaRPr lang="en-US" sz="2800" dirty="0"/>
+          </a:p>
+          <a:p>
+            <a:pPr lvl="1"/>
+            <a:r>
+              <a:rPr lang="en-US" sz="2800" dirty="0">
+                <a:solidFill>
+                  <a:srgbClr val="000000"/>
+                </a:solidFill>
+              </a:rPr>
+              <a:t>• Low mortality → settlement institutions</a:t>
+            </a:r>
+            <a:endParaRPr lang="en-US" sz="2800" dirty="0"/>
+          </a:p>
+          <a:p>
+            <a:pPr marL="0" indent="0">
+              <a:buNone/>
+            </a:pPr>
+            <a:r>
+              <a:rPr lang="en-US" sz="2800" dirty="0">
+                <a:solidFill>
+                  <a:srgbClr val="000000"/>
+                </a:solidFill>
+              </a:rPr>
+              <a:t>• Historical mortality should not directly affect current GDP</a:t>
+            </a:r>
+            <a:endParaRPr lang="en-US" sz="2800" dirty="0"/>
+          </a:p>
+        </p:txBody>
+      </p:sp>
+      <p:sp>
+        <p:nvSpPr>
+          <p:cNvPr id="4" name="Text 2"/>
+          <p:cNvSpPr/>
+          <p:nvPr/>
+        </p:nvSpPr>
+        <p:spPr>
+          <a:xfrm>
+            <a:off x="2743199" y="4114800"/>
+            <a:ext cx="6651171" cy="457200"/>
+          </a:xfrm>
+          <a:prstGeom prst="rect">
+            <a:avLst/>
+          </a:prstGeom>
+          <a:noFill/>
+          <a:ln/>
+        </p:spPr>
+        <p:txBody>
+          <a:bodyPr wrap="square" rtlCol="0" anchor="ctr"/>
+          <a:lstStyle/>
+          <a:p>
+            <a:pPr marL="0" indent="0">
+              <a:buNone/>
+            </a:pPr>
+            <a:r>
+              <a:rPr lang="en-US" sz="3200" b="1" dirty="0">
+                <a:solidFill>
+                  <a:srgbClr val="000000"/>
+                </a:solidFill>
+              </a:rPr>
+              <a:t>Mortality → Institutions → GDP</a:t>
+            </a:r>
+            <a:endParaRPr lang="en-US" sz="3200" dirty="0"/>
+          </a:p>
+        </p:txBody>
+      </p:sp>
+    </p:spTree>
+  </p:cSld>
+  <p:clrMapOvr>
+    <a:masterClrMapping/>
+  </p:clrMapOvr>
+</p:sld>
+</file>
+
+<file path=ppt/slides/slide29.xml><?xml version="1.0" encoding="utf-8"?>
+<p:sld xmlns:a="http://schemas.openxmlformats.org/drawingml/2006/main" xmlns:r="http://schemas.openxmlformats.org/officeDocument/2006/relationships" xmlns:p="http://schemas.openxmlformats.org/presentationml/2006/main">
+  <p:cSld>
+    <p:spTree>
+      <p:nvGrpSpPr>
+        <p:cNvPr id="1" name=""/>
+        <p:cNvGrpSpPr/>
+        <p:nvPr/>
+      </p:nvGrpSpPr>
+      <p:grpSpPr>
+        <a:xfrm>
+          <a:off x="0" y="0"/>
+          <a:ext cx="0" cy="0"/>
+          <a:chOff x="0" y="0"/>
+          <a:chExt cx="0" cy="0"/>
+        </a:xfrm>
+      </p:grpSpPr>
+      <p:sp>
+        <p:nvSpPr>
+          <p:cNvPr id="2" name="Text 0"/>
+          <p:cNvSpPr/>
+          <p:nvPr/>
+        </p:nvSpPr>
+        <p:spPr>
+          <a:xfrm>
+            <a:off x="783772" y="1047205"/>
+            <a:ext cx="10972800" cy="457200"/>
+          </a:xfrm>
+          <a:prstGeom prst="rect">
+            <a:avLst/>
+          </a:prstGeom>
+          <a:noFill/>
+          <a:ln/>
+        </p:spPr>
+        <p:txBody>
+          <a:bodyPr wrap="square" rtlCol="0" anchor="ctr"/>
+          <a:lstStyle/>
+          <a:p>
+            <a:pPr marL="0" indent="0">
+              <a:buNone/>
+            </a:pPr>
+            <a:r>
+              <a:rPr lang="en-US" sz="3200" b="1" dirty="0">
+                <a:solidFill>
+                  <a:srgbClr val="000000"/>
+                </a:solidFill>
+              </a:rPr>
+              <a:t>Why the Instrument is Valid</a:t>
+            </a:r>
+            <a:endParaRPr lang="en-US" sz="3200" dirty="0"/>
+          </a:p>
+        </p:txBody>
+      </p:sp>
+      <p:sp>
+        <p:nvSpPr>
+          <p:cNvPr id="3" name="Text 1"/>
+          <p:cNvSpPr/>
+          <p:nvPr/>
+        </p:nvSpPr>
+        <p:spPr>
+          <a:xfrm>
+            <a:off x="1382486" y="2416628"/>
+            <a:ext cx="9144000" cy="2743200"/>
+          </a:xfrm>
+          <a:prstGeom prst="rect">
+            <a:avLst/>
+          </a:prstGeom>
+          <a:noFill/>
+          <a:ln/>
+        </p:spPr>
+        <p:txBody>
+          <a:bodyPr wrap="square" rtlCol="0" anchor="ctr"/>
+          <a:lstStyle/>
+          <a:p>
+            <a:pPr marL="0" indent="0">
+              <a:buNone/>
+            </a:pPr>
+            <a:r>
+              <a:rPr lang="en-US" sz="3200" dirty="0">
+                <a:solidFill>
+                  <a:srgbClr val="000000"/>
+                </a:solidFill>
+              </a:rPr>
+              <a:t>Relevance:</a:t>
+            </a:r>
+            <a:endParaRPr lang="en-US" sz="3200" dirty="0"/>
+          </a:p>
+          <a:p>
+            <a:pPr marL="0" indent="0">
+              <a:buNone/>
+            </a:pPr>
+            <a:r>
+              <a:rPr lang="en-US" sz="3200" dirty="0">
+                <a:solidFill>
+                  <a:srgbClr val="000000"/>
+                </a:solidFill>
+              </a:rPr>
+              <a:t>Mortality affected institution building.</a:t>
+            </a:r>
+            <a:endParaRPr lang="en-US" sz="3200" dirty="0"/>
+          </a:p>
+          <a:p>
+            <a:pPr marL="0" indent="0">
+              <a:buNone/>
+            </a:pPr>
+            <a:endParaRPr lang="en-US" sz="3200" dirty="0"/>
+          </a:p>
+          <a:p>
+            <a:pPr marL="0" indent="0">
+              <a:buNone/>
+            </a:pPr>
+            <a:r>
+              <a:rPr lang="en-US" sz="3200" dirty="0">
+                <a:solidFill>
+                  <a:srgbClr val="000000"/>
+                </a:solidFill>
+              </a:rPr>
+              <a:t>Exclusion Restriction:</a:t>
+            </a:r>
+            <a:endParaRPr lang="en-US" sz="3200" dirty="0"/>
+          </a:p>
+          <a:p>
+            <a:pPr marL="0" indent="0">
+              <a:buNone/>
+            </a:pPr>
+            <a:r>
+              <a:rPr lang="en-US" sz="3200" dirty="0">
+                <a:solidFill>
+                  <a:srgbClr val="000000"/>
+                </a:solidFill>
+              </a:rPr>
+              <a:t>Mortality affects GDP only through institutions.</a:t>
+            </a:r>
+            <a:endParaRPr lang="en-US" sz="3200" dirty="0"/>
+          </a:p>
+        </p:txBody>
+      </p:sp>
+    </p:spTree>
   </p:cSld>
   <p:clrMapOvr>
     <a:masterClrMapping/>
@@ -9699,6 +11229,456 @@
     <p:extLst>
       <p:ext uri="{BB962C8B-B14F-4D97-AF65-F5344CB8AC3E}">
         <p14:creationId xmlns:p14="http://schemas.microsoft.com/office/powerpoint/2010/main" val="2718271772"/>
+      </p:ext>
+    </p:extLst>
+  </p:cSld>
+  <p:clrMapOvr>
+    <a:masterClrMapping/>
+  </p:clrMapOvr>
+</p:sld>
+</file>
+
+<file path=ppt/slides/slide30.xml><?xml version="1.0" encoding="utf-8"?>
+<p:sld xmlns:a="http://schemas.openxmlformats.org/drawingml/2006/main" xmlns:r="http://schemas.openxmlformats.org/officeDocument/2006/relationships" xmlns:p="http://schemas.openxmlformats.org/presentationml/2006/main">
+  <p:cSld>
+    <p:spTree>
+      <p:nvGrpSpPr>
+        <p:cNvPr id="1" name=""/>
+        <p:cNvGrpSpPr/>
+        <p:nvPr/>
+      </p:nvGrpSpPr>
+      <p:grpSpPr>
+        <a:xfrm>
+          <a:off x="0" y="0"/>
+          <a:ext cx="0" cy="0"/>
+          <a:chOff x="0" y="0"/>
+          <a:chExt cx="0" cy="0"/>
+        </a:xfrm>
+      </p:grpSpPr>
+      <p:sp>
+        <p:nvSpPr>
+          <p:cNvPr id="2" name="Text 0"/>
+          <p:cNvSpPr/>
+          <p:nvPr/>
+        </p:nvSpPr>
+        <p:spPr>
+          <a:xfrm>
+            <a:off x="696686" y="755469"/>
+            <a:ext cx="10972800" cy="457200"/>
+          </a:xfrm>
+          <a:prstGeom prst="rect">
+            <a:avLst/>
+          </a:prstGeom>
+          <a:noFill/>
+          <a:ln/>
+        </p:spPr>
+        <p:txBody>
+          <a:bodyPr wrap="square" rtlCol="0" anchor="ctr"/>
+          <a:lstStyle/>
+          <a:p>
+            <a:pPr marL="0" indent="0">
+              <a:buNone/>
+            </a:pPr>
+            <a:r>
+              <a:rPr lang="en-US" sz="3200" b="1" dirty="0">
+                <a:solidFill>
+                  <a:srgbClr val="000000"/>
+                </a:solidFill>
+              </a:rPr>
+              <a:t>Results: OLS vs TSLS</a:t>
+            </a:r>
+            <a:endParaRPr lang="en-US" sz="3200" dirty="0"/>
+          </a:p>
+        </p:txBody>
+      </p:sp>
+      <p:sp>
+        <p:nvSpPr>
+          <p:cNvPr id="3" name="Text 1"/>
+          <p:cNvSpPr/>
+          <p:nvPr/>
+        </p:nvSpPr>
+        <p:spPr>
+          <a:xfrm>
+            <a:off x="827314" y="1915885"/>
+            <a:ext cx="10003972" cy="2743200"/>
+          </a:xfrm>
+          <a:prstGeom prst="rect">
+            <a:avLst/>
+          </a:prstGeom>
+          <a:noFill/>
+          <a:ln/>
+        </p:spPr>
+        <p:txBody>
+          <a:bodyPr wrap="square" rtlCol="0" anchor="ctr"/>
+          <a:lstStyle/>
+          <a:p>
+            <a:pPr marL="0" indent="0">
+              <a:buNone/>
+            </a:pPr>
+            <a:r>
+              <a:rPr lang="en-US" sz="3200" dirty="0">
+                <a:solidFill>
+                  <a:srgbClr val="000000"/>
+                </a:solidFill>
+              </a:rPr>
+              <a:t>OLS β = 0.522</a:t>
+            </a:r>
+            <a:endParaRPr lang="en-US" sz="3200" dirty="0"/>
+          </a:p>
+          <a:p>
+            <a:pPr marL="0" indent="0">
+              <a:buNone/>
+            </a:pPr>
+            <a:endParaRPr lang="en-US" sz="3200" dirty="0"/>
+          </a:p>
+          <a:p>
+            <a:pPr marL="0" indent="0">
+              <a:buNone/>
+            </a:pPr>
+            <a:r>
+              <a:rPr lang="en-US" sz="3200" dirty="0">
+                <a:solidFill>
+                  <a:srgbClr val="000000"/>
+                </a:solidFill>
+              </a:rPr>
+              <a:t>TSLS β = 0.944</a:t>
+            </a:r>
+            <a:endParaRPr lang="en-US" sz="3200" dirty="0"/>
+          </a:p>
+          <a:p>
+            <a:pPr marL="0" indent="0">
+              <a:buNone/>
+            </a:pPr>
+            <a:endParaRPr lang="en-US" sz="3200" dirty="0"/>
+          </a:p>
+          <a:p>
+            <a:pPr marL="0" indent="0">
+              <a:buNone/>
+            </a:pPr>
+            <a:r>
+              <a:rPr lang="en-US" sz="3200" dirty="0">
+                <a:solidFill>
+                  <a:srgbClr val="000000"/>
+                </a:solidFill>
+              </a:rPr>
+              <a:t>OLS understates the causal impact of institutions on GDP.</a:t>
+            </a:r>
+            <a:endParaRPr lang="en-US" sz="3200" dirty="0"/>
+          </a:p>
+        </p:txBody>
+      </p:sp>
+    </p:spTree>
+  </p:cSld>
+  <p:clrMapOvr>
+    <a:masterClrMapping/>
+  </p:clrMapOvr>
+</p:sld>
+</file>
+
+<file path=ppt/slides/slide31.xml><?xml version="1.0" encoding="utf-8"?>
+<p:sld xmlns:a="http://schemas.openxmlformats.org/drawingml/2006/main" xmlns:r="http://schemas.openxmlformats.org/officeDocument/2006/relationships" xmlns:p="http://schemas.openxmlformats.org/presentationml/2006/main">
+  <p:cSld>
+    <p:spTree>
+      <p:nvGrpSpPr>
+        <p:cNvPr id="1" name=""/>
+        <p:cNvGrpSpPr/>
+        <p:nvPr/>
+      </p:nvGrpSpPr>
+      <p:grpSpPr>
+        <a:xfrm>
+          <a:off x="0" y="0"/>
+          <a:ext cx="0" cy="0"/>
+          <a:chOff x="0" y="0"/>
+          <a:chExt cx="0" cy="0"/>
+        </a:xfrm>
+      </p:grpSpPr>
+      <p:sp>
+        <p:nvSpPr>
+          <p:cNvPr id="2" name="Text 0"/>
+          <p:cNvSpPr/>
+          <p:nvPr/>
+        </p:nvSpPr>
+        <p:spPr>
+          <a:xfrm>
+            <a:off x="457200" y="502920"/>
+            <a:ext cx="10972800" cy="457200"/>
+          </a:xfrm>
+          <a:prstGeom prst="rect">
+            <a:avLst/>
+          </a:prstGeom>
+          <a:noFill/>
+          <a:ln/>
+        </p:spPr>
+        <p:txBody>
+          <a:bodyPr wrap="square" rtlCol="0" anchor="ctr"/>
+          <a:lstStyle/>
+          <a:p>
+            <a:pPr marL="0" indent="0">
+              <a:buNone/>
+            </a:pPr>
+            <a:r>
+              <a:rPr lang="en-US" sz="3200" b="1" dirty="0">
+                <a:solidFill>
+                  <a:srgbClr val="000000"/>
+                </a:solidFill>
+              </a:rPr>
+              <a:t>Diagnostic Tests</a:t>
+            </a:r>
+            <a:endParaRPr lang="en-US" sz="3200" dirty="0"/>
+          </a:p>
+        </p:txBody>
+      </p:sp>
+      <p:sp>
+        <p:nvSpPr>
+          <p:cNvPr id="3" name="Text 1"/>
+          <p:cNvSpPr/>
+          <p:nvPr/>
+        </p:nvSpPr>
+        <p:spPr>
+          <a:xfrm>
+            <a:off x="731520" y="1097280"/>
+            <a:ext cx="10058400" cy="3657600"/>
+          </a:xfrm>
+          <a:prstGeom prst="rect">
+            <a:avLst/>
+          </a:prstGeom>
+          <a:noFill/>
+          <a:ln/>
+        </p:spPr>
+        <p:txBody>
+          <a:bodyPr wrap="square" rtlCol="0" anchor="ctr"/>
+          <a:lstStyle/>
+          <a:p>
+            <a:pPr marL="0" indent="0">
+              <a:buNone/>
+            </a:pPr>
+            <a:r>
+              <a:rPr lang="en-US" sz="2800" dirty="0">
+                <a:solidFill>
+                  <a:srgbClr val="000000"/>
+                </a:solidFill>
+              </a:rPr>
+              <a:t>• Hausman F = 17.621 (endogeneity present)</a:t>
+            </a:r>
+            <a:endParaRPr lang="en-US" sz="2800" dirty="0"/>
+          </a:p>
+          <a:p>
+            <a:pPr marL="0" indent="0">
+              <a:buNone/>
+            </a:pPr>
+            <a:r>
+              <a:rPr lang="en-US" sz="2800" dirty="0">
+                <a:solidFill>
+                  <a:srgbClr val="000000"/>
+                </a:solidFill>
+              </a:rPr>
+              <a:t>• Cragg-Donald F = 22.95 (strong instrument)</a:t>
+            </a:r>
+            <a:endParaRPr lang="en-US" sz="2800" dirty="0"/>
+          </a:p>
+          <a:p>
+            <a:pPr marL="0" indent="0">
+              <a:buNone/>
+            </a:pPr>
+            <a:r>
+              <a:rPr lang="en-US" sz="2800" dirty="0">
+                <a:solidFill>
+                  <a:srgbClr val="000000"/>
+                </a:solidFill>
+              </a:rPr>
+              <a:t>• Overidentification test not applicable: just-identified model</a:t>
+            </a:r>
+            <a:endParaRPr lang="en-US" sz="2800" dirty="0"/>
+          </a:p>
+          <a:p>
+            <a:pPr marL="0" indent="0">
+              <a:buNone/>
+            </a:pPr>
+            <a:endParaRPr lang="en-US" sz="2800" dirty="0"/>
+          </a:p>
+          <a:p>
+            <a:pPr marL="0" indent="0">
+              <a:buNone/>
+            </a:pPr>
+            <a:r>
+              <a:rPr lang="en-US" sz="2800" dirty="0">
+                <a:solidFill>
+                  <a:srgbClr val="000000"/>
+                </a:solidFill>
+              </a:rPr>
+              <a:t>Conclusion: Settler mortality is a strong IV and institutions have a larger causal effect than OLS suggests.</a:t>
+            </a:r>
+            <a:endParaRPr lang="en-US" sz="2800" dirty="0"/>
+          </a:p>
+        </p:txBody>
+      </p:sp>
+    </p:spTree>
+  </p:cSld>
+  <p:clrMapOvr>
+    <a:masterClrMapping/>
+  </p:clrMapOvr>
+</p:sld>
+</file>
+
+<file path=ppt/slides/slide32.xml><?xml version="1.0" encoding="utf-8"?>
+<p:sld xmlns:a="http://schemas.openxmlformats.org/drawingml/2006/main" xmlns:r="http://schemas.openxmlformats.org/officeDocument/2006/relationships" xmlns:p="http://schemas.openxmlformats.org/presentationml/2006/main">
+  <p:cSld>
+    <p:spTree>
+      <p:nvGrpSpPr>
+        <p:cNvPr id="1" name=""/>
+        <p:cNvGrpSpPr/>
+        <p:nvPr/>
+      </p:nvGrpSpPr>
+      <p:grpSpPr>
+        <a:xfrm>
+          <a:off x="0" y="0"/>
+          <a:ext cx="0" cy="0"/>
+          <a:chOff x="0" y="0"/>
+          <a:chExt cx="0" cy="0"/>
+        </a:xfrm>
+      </p:grpSpPr>
+      <p:sp>
+        <p:nvSpPr>
+          <p:cNvPr id="2" name="Title 1">
+            <a:extLst>
+              <a:ext uri="{FF2B5EF4-FFF2-40B4-BE49-F238E27FC236}">
+                <a16:creationId xmlns:a16="http://schemas.microsoft.com/office/drawing/2014/main" id="{6D8CEF4F-4621-B398-795A-D6013FEE9D2B}"/>
+              </a:ext>
+            </a:extLst>
+          </p:cNvPr>
+          <p:cNvSpPr>
+            <a:spLocks noGrp="1"/>
+          </p:cNvSpPr>
+          <p:nvPr>
+            <p:ph type="title"/>
+          </p:nvPr>
+        </p:nvSpPr>
+        <p:spPr/>
+        <p:txBody>
+          <a:bodyPr/>
+          <a:lstStyle/>
+          <a:p>
+            <a:r>
+              <a:rPr lang="en-GB" dirty="0">
+                <a:solidFill>
+                  <a:srgbClr val="FF0000"/>
+                </a:solidFill>
+              </a:rPr>
+              <a:t>Further Readings</a:t>
+            </a:r>
+          </a:p>
+        </p:txBody>
+      </p:sp>
+      <p:sp>
+        <p:nvSpPr>
+          <p:cNvPr id="4" name="TextBox 3">
+            <a:extLst>
+              <a:ext uri="{FF2B5EF4-FFF2-40B4-BE49-F238E27FC236}">
+                <a16:creationId xmlns:a16="http://schemas.microsoft.com/office/drawing/2014/main" id="{52A82FCD-3319-124D-1AFA-2E178C88A554}"/>
+              </a:ext>
+            </a:extLst>
+          </p:cNvPr>
+          <p:cNvSpPr txBox="1"/>
+          <p:nvPr/>
+        </p:nvSpPr>
+        <p:spPr>
+          <a:xfrm>
+            <a:off x="949849" y="1820866"/>
+            <a:ext cx="6100996" cy="4524315"/>
+          </a:xfrm>
+          <a:prstGeom prst="rect">
+            <a:avLst/>
+          </a:prstGeom>
+          <a:noFill/>
+        </p:spPr>
+        <p:txBody>
+          <a:bodyPr wrap="square">
+            <a:spAutoFit/>
+          </a:bodyPr>
+          <a:lstStyle/>
+          <a:p>
+            <a:r>
+              <a:rPr lang="en-GB" dirty="0" err="1"/>
+              <a:t>Antonakis</a:t>
+            </a:r>
+            <a:r>
+              <a:rPr lang="en-GB" dirty="0"/>
+              <a:t>, J., </a:t>
+            </a:r>
+            <a:r>
+              <a:rPr lang="en-GB" dirty="0" err="1"/>
+              <a:t>Bendahan</a:t>
+            </a:r>
+            <a:r>
+              <a:rPr lang="en-GB" dirty="0"/>
+              <a:t>, S., </a:t>
+            </a:r>
+            <a:r>
+              <a:rPr lang="en-GB" dirty="0" err="1"/>
+              <a:t>Jacquart</a:t>
+            </a:r>
+            <a:r>
+              <a:rPr lang="en-GB" dirty="0"/>
+              <a:t>, P., &amp; </a:t>
+            </a:r>
+            <a:r>
+              <a:rPr lang="en-GB" dirty="0" err="1"/>
+              <a:t>Lalive</a:t>
+            </a:r>
+            <a:r>
+              <a:rPr lang="en-GB" dirty="0"/>
+              <a:t>, R. (2014). Causality and endogeneity: Problems and solutions. The Oxford Handbook of Leadership and Organizations, 1, 93-117.</a:t>
+            </a:r>
+          </a:p>
+          <a:p>
+            <a:endParaRPr lang="en-GB" dirty="0"/>
+          </a:p>
+          <a:p>
+            <a:r>
+              <a:rPr lang="en-GB" dirty="0" err="1"/>
+              <a:t>Busenbark</a:t>
+            </a:r>
+            <a:r>
+              <a:rPr lang="en-GB" dirty="0"/>
+              <a:t>, J. R., Yoon, H., Gamache, D. L., &amp; Withers, M. C. (2022). Omitted variable bias: Examining management research with the impact threshold of a confounding variable (ITCV). Journal of Management, 48(1), 17-48.</a:t>
+            </a:r>
+          </a:p>
+          <a:p>
+            <a:endParaRPr lang="en-GB" dirty="0"/>
+          </a:p>
+          <a:p>
+            <a:r>
+              <a:rPr lang="en-GB" dirty="0" err="1"/>
+              <a:t>Daryanto</a:t>
+            </a:r>
+            <a:r>
+              <a:rPr lang="en-GB" dirty="0"/>
+              <a:t>, A. (2020). </a:t>
+            </a:r>
+            <a:r>
+              <a:rPr lang="en-GB" dirty="0" err="1"/>
+              <a:t>EndoS</a:t>
+            </a:r>
+            <a:r>
+              <a:rPr lang="en-GB" dirty="0"/>
+              <a:t>: An SPSS macro to assess endogeneity. The Quantitative Methods for Psychology, 16(1), 56-70.</a:t>
+            </a:r>
+          </a:p>
+          <a:p>
+            <a:endParaRPr lang="en-GB" dirty="0"/>
+          </a:p>
+          <a:p>
+            <a:r>
+              <a:rPr lang="en-GB" dirty="0"/>
+              <a:t>Sande, J. B., &amp; Ghosh, M. (2018). Endogeneity in survey research. International Journal of Research in Marketing, 35(2), 185-204.</a:t>
+            </a:r>
+          </a:p>
+        </p:txBody>
+      </p:sp>
+    </p:spTree>
+    <p:extLst>
+      <p:ext uri="{BB962C8B-B14F-4D97-AF65-F5344CB8AC3E}">
+        <p14:creationId xmlns:p14="http://schemas.microsoft.com/office/powerpoint/2010/main" val="3993109663"/>
       </p:ext>
     </p:extLst>
   </p:cSld>
@@ -10894,4 +12874,319 @@
     </a:ext>
   </a:extLst>
 </a:theme>
+</file>
+
+<file path=ppt/theme/theme2.xml><?xml version="1.0" encoding="utf-8"?>
+<a:theme xmlns:a="http://schemas.openxmlformats.org/drawingml/2006/main" name="Office Theme">
+  <a:themeElements>
+    <a:clrScheme name="Office">
+      <a:dk1>
+        <a:sysClr val="windowText" lastClr="000000"/>
+      </a:dk1>
+      <a:lt1>
+        <a:sysClr val="window" lastClr="FFFFFF"/>
+      </a:lt1>
+      <a:dk2>
+        <a:srgbClr val="0E2841"/>
+      </a:dk2>
+      <a:lt2>
+        <a:srgbClr val="E8E8E8"/>
+      </a:lt2>
+      <a:accent1>
+        <a:srgbClr val="156082"/>
+      </a:accent1>
+      <a:accent2>
+        <a:srgbClr val="E97132"/>
+      </a:accent2>
+      <a:accent3>
+        <a:srgbClr val="196B24"/>
+      </a:accent3>
+      <a:accent4>
+        <a:srgbClr val="0F9ED5"/>
+      </a:accent4>
+      <a:accent5>
+        <a:srgbClr val="A02B93"/>
+      </a:accent5>
+      <a:accent6>
+        <a:srgbClr val="4EA72E"/>
+      </a:accent6>
+      <a:hlink>
+        <a:srgbClr val="467886"/>
+      </a:hlink>
+      <a:folHlink>
+        <a:srgbClr val="96607D"/>
+      </a:folHlink>
+    </a:clrScheme>
+    <a:fontScheme name="Office">
+      <a:majorFont>
+        <a:latin typeface="Aptos Display" panose="02110004020202020204"/>
+        <a:ea typeface=""/>
+        <a:cs typeface=""/>
+        <a:font script="Jpan" typeface="游ゴシック Light"/>
+        <a:font script="Hang" typeface="맑은 고딕"/>
+        <a:font script="Hans" typeface="等线 Light"/>
+        <a:font script="Hant" typeface="新細明體"/>
+        <a:font script="Arab" typeface="Times New Roman"/>
+        <a:font script="Hebr" typeface="Times New Roman"/>
+        <a:font script="Thai" typeface="Angsana New"/>
+        <a:font script="Ethi" typeface="Nyala"/>
+        <a:font script="Beng" typeface="Vrinda"/>
+        <a:font script="Gujr" typeface="Shruti"/>
+        <a:font script="Khmr" typeface="MoolBoran"/>
+        <a:font script="Knda" typeface="Tunga"/>
+        <a:font script="Guru" typeface="Raavi"/>
+        <a:font script="Cans" typeface="Euphemia"/>
+        <a:font script="Cher" typeface="Plantagenet Cherokee"/>
+        <a:font script="Yiii" typeface="Microsoft Yi Baiti"/>
+        <a:font script="Tibt" typeface="Microsoft Himalaya"/>
+        <a:font script="Thaa" typeface="MV Boli"/>
+        <a:font script="Deva" typeface="Mangal"/>
+        <a:font script="Telu" typeface="Gautami"/>
+        <a:font script="Taml" typeface="Latha"/>
+        <a:font script="Syrc" typeface="Estrangelo Edessa"/>
+        <a:font script="Orya" typeface="Kalinga"/>
+        <a:font script="Mlym" typeface="Kartika"/>
+        <a:font script="Laoo" typeface="DokChampa"/>
+        <a:font script="Sinh" typeface="Iskoola Pota"/>
+        <a:font script="Mong" typeface="Mongolian Baiti"/>
+        <a:font script="Viet" typeface="Times New Roman"/>
+        <a:font script="Uigh" typeface="Microsoft Uighur"/>
+        <a:font script="Geor" typeface="Sylfaen"/>
+        <a:font script="Armn" typeface="Arial"/>
+        <a:font script="Bugi" typeface="Leelawadee UI"/>
+        <a:font script="Bopo" typeface="Microsoft JhengHei"/>
+        <a:font script="Java" typeface="Javanese Text"/>
+        <a:font script="Lisu" typeface="Segoe UI"/>
+        <a:font script="Mymr" typeface="Myanmar Text"/>
+        <a:font script="Nkoo" typeface="Ebrima"/>
+        <a:font script="Olck" typeface="Nirmala UI"/>
+        <a:font script="Osma" typeface="Ebrima"/>
+        <a:font script="Phag" typeface="Phagspa"/>
+        <a:font script="Syrn" typeface="Estrangelo Edessa"/>
+        <a:font script="Syrj" typeface="Estrangelo Edessa"/>
+        <a:font script="Syre" typeface="Estrangelo Edessa"/>
+        <a:font script="Sora" typeface="Nirmala UI"/>
+        <a:font script="Tale" typeface="Microsoft Tai Le"/>
+        <a:font script="Talu" typeface="Microsoft New Tai Lue"/>
+        <a:font script="Tfng" typeface="Ebrima"/>
+      </a:majorFont>
+      <a:minorFont>
+        <a:latin typeface="Aptos" panose="02110004020202020204"/>
+        <a:ea typeface=""/>
+        <a:cs typeface=""/>
+        <a:font script="Jpan" typeface="游ゴシック"/>
+        <a:font script="Hang" typeface="맑은 고딕"/>
+        <a:font script="Hans" typeface="等线"/>
+        <a:font script="Hant" typeface="新細明體"/>
+        <a:font script="Arab" typeface="Arial"/>
+        <a:font script="Hebr" typeface="Arial"/>
+        <a:font script="Thai" typeface="Cordia New"/>
+        <a:font script="Ethi" typeface="Nyala"/>
+        <a:font script="Beng" typeface="Vrinda"/>
+        <a:font script="Gujr" typeface="Shruti"/>
+        <a:font script="Khmr" typeface="DaunPenh"/>
+        <a:font script="Knda" typeface="Tunga"/>
+        <a:font script="Guru" typeface="Raavi"/>
+        <a:font script="Cans" typeface="Euphemia"/>
+        <a:font script="Cher" typeface="Plantagenet Cherokee"/>
+        <a:font script="Yiii" typeface="Microsoft Yi Baiti"/>
+        <a:font script="Tibt" typeface="Microsoft Himalaya"/>
+        <a:font script="Thaa" typeface="MV Boli"/>
+        <a:font script="Deva" typeface="Mangal"/>
+        <a:font script="Telu" typeface="Gautami"/>
+        <a:font script="Taml" typeface="Latha"/>
+        <a:font script="Syrc" typeface="Estrangelo Edessa"/>
+        <a:font script="Orya" typeface="Kalinga"/>
+        <a:font script="Mlym" typeface="Kartika"/>
+        <a:font script="Laoo" typeface="DokChampa"/>
+        <a:font script="Sinh" typeface="Iskoola Pota"/>
+        <a:font script="Mong" typeface="Mongolian Baiti"/>
+        <a:font script="Viet" typeface="Arial"/>
+        <a:font script="Uigh" typeface="Microsoft Uighur"/>
+        <a:font script="Geor" typeface="Sylfaen"/>
+        <a:font script="Armn" typeface="Arial"/>
+        <a:font script="Bugi" typeface="Leelawadee UI"/>
+        <a:font script="Bopo" typeface="Microsoft JhengHei"/>
+        <a:font script="Java" typeface="Javanese Text"/>
+        <a:font script="Lisu" typeface="Segoe UI"/>
+        <a:font script="Mymr" typeface="Myanmar Text"/>
+        <a:font script="Nkoo" typeface="Ebrima"/>
+        <a:font script="Olck" typeface="Nirmala UI"/>
+        <a:font script="Osma" typeface="Ebrima"/>
+        <a:font script="Phag" typeface="Phagspa"/>
+        <a:font script="Syrn" typeface="Estrangelo Edessa"/>
+        <a:font script="Syrj" typeface="Estrangelo Edessa"/>
+        <a:font script="Syre" typeface="Estrangelo Edessa"/>
+        <a:font script="Sora" typeface="Nirmala UI"/>
+        <a:font script="Tale" typeface="Microsoft Tai Le"/>
+        <a:font script="Talu" typeface="Microsoft New Tai Lue"/>
+        <a:font script="Tfng" typeface="Ebrima"/>
+      </a:minorFont>
+    </a:fontScheme>
+    <a:fmtScheme name="Office">
+      <a:fillStyleLst>
+        <a:solidFill>
+          <a:schemeClr val="phClr"/>
+        </a:solidFill>
+        <a:gradFill rotWithShape="1">
+          <a:gsLst>
+            <a:gs pos="0">
+              <a:schemeClr val="phClr">
+                <a:lumMod val="110000"/>
+                <a:satMod val="105000"/>
+                <a:tint val="67000"/>
+              </a:schemeClr>
+            </a:gs>
+            <a:gs pos="50000">
+              <a:schemeClr val="phClr">
+                <a:lumMod val="105000"/>
+                <a:satMod val="103000"/>
+                <a:tint val="73000"/>
+              </a:schemeClr>
+            </a:gs>
+            <a:gs pos="100000">
+              <a:schemeClr val="phClr">
+                <a:lumMod val="105000"/>
+                <a:satMod val="109000"/>
+                <a:tint val="81000"/>
+              </a:schemeClr>
+            </a:gs>
+          </a:gsLst>
+          <a:lin ang="5400000" scaled="0"/>
+        </a:gradFill>
+        <a:gradFill rotWithShape="1">
+          <a:gsLst>
+            <a:gs pos="0">
+              <a:schemeClr val="phClr">
+                <a:satMod val="103000"/>
+                <a:lumMod val="102000"/>
+                <a:tint val="94000"/>
+              </a:schemeClr>
+            </a:gs>
+            <a:gs pos="50000">
+              <a:schemeClr val="phClr">
+                <a:satMod val="110000"/>
+                <a:lumMod val="100000"/>
+                <a:shade val="100000"/>
+              </a:schemeClr>
+            </a:gs>
+            <a:gs pos="100000">
+              <a:schemeClr val="phClr">
+                <a:lumMod val="99000"/>
+                <a:satMod val="120000"/>
+                <a:shade val="78000"/>
+              </a:schemeClr>
+            </a:gs>
+          </a:gsLst>
+          <a:lin ang="5400000" scaled="0"/>
+        </a:gradFill>
+      </a:fillStyleLst>
+      <a:lnStyleLst>
+        <a:ln w="12700" cap="flat" cmpd="sng" algn="ctr">
+          <a:solidFill>
+            <a:schemeClr val="phClr"/>
+          </a:solidFill>
+          <a:prstDash val="solid"/>
+          <a:miter lim="800000"/>
+        </a:ln>
+        <a:ln w="19050" cap="flat" cmpd="sng" algn="ctr">
+          <a:solidFill>
+            <a:schemeClr val="phClr"/>
+          </a:solidFill>
+          <a:prstDash val="solid"/>
+          <a:miter lim="800000"/>
+        </a:ln>
+        <a:ln w="25400" cap="flat" cmpd="sng" algn="ctr">
+          <a:solidFill>
+            <a:schemeClr val="phClr"/>
+          </a:solidFill>
+          <a:prstDash val="solid"/>
+          <a:miter lim="800000"/>
+        </a:ln>
+      </a:lnStyleLst>
+      <a:effectStyleLst>
+        <a:effectStyle>
+          <a:effectLst/>
+        </a:effectStyle>
+        <a:effectStyle>
+          <a:effectLst/>
+        </a:effectStyle>
+        <a:effectStyle>
+          <a:effectLst>
+            <a:outerShdw blurRad="57150" dist="19050" dir="5400000" algn="ctr" rotWithShape="0">
+              <a:srgbClr val="000000">
+                <a:alpha val="63000"/>
+              </a:srgbClr>
+            </a:outerShdw>
+          </a:effectLst>
+        </a:effectStyle>
+      </a:effectStyleLst>
+      <a:bgFillStyleLst>
+        <a:solidFill>
+          <a:schemeClr val="phClr"/>
+        </a:solidFill>
+        <a:solidFill>
+          <a:schemeClr val="phClr">
+            <a:tint val="95000"/>
+            <a:satMod val="170000"/>
+          </a:schemeClr>
+        </a:solidFill>
+        <a:gradFill rotWithShape="1">
+          <a:gsLst>
+            <a:gs pos="0">
+              <a:schemeClr val="phClr">
+                <a:tint val="93000"/>
+                <a:satMod val="150000"/>
+                <a:shade val="98000"/>
+                <a:lumMod val="102000"/>
+              </a:schemeClr>
+            </a:gs>
+            <a:gs pos="50000">
+              <a:schemeClr val="phClr">
+                <a:tint val="98000"/>
+                <a:satMod val="130000"/>
+                <a:shade val="90000"/>
+                <a:lumMod val="103000"/>
+              </a:schemeClr>
+            </a:gs>
+            <a:gs pos="100000">
+              <a:schemeClr val="phClr">
+                <a:shade val="63000"/>
+                <a:satMod val="120000"/>
+              </a:schemeClr>
+            </a:gs>
+          </a:gsLst>
+          <a:lin ang="5400000" scaled="0"/>
+        </a:gradFill>
+      </a:bgFillStyleLst>
+    </a:fmtScheme>
+  </a:themeElements>
+  <a:objectDefaults>
+    <a:lnDef>
+      <a:spPr/>
+      <a:bodyPr/>
+      <a:lstStyle/>
+      <a:style>
+        <a:lnRef idx="2">
+          <a:schemeClr val="accent1"/>
+        </a:lnRef>
+        <a:fillRef idx="0">
+          <a:schemeClr val="accent1"/>
+        </a:fillRef>
+        <a:effectRef idx="1">
+          <a:schemeClr val="accent1"/>
+        </a:effectRef>
+        <a:fontRef idx="minor">
+          <a:schemeClr val="tx1"/>
+        </a:fontRef>
+      </a:style>
+    </a:lnDef>
+  </a:objectDefaults>
+  <a:extraClrSchemeLst/>
+  <a:extLst>
+    <a:ext uri="{05A4C25C-085E-4340-85A3-A5531E510DB2}">
+      <thm15:themeFamily xmlns:thm15="http://schemas.microsoft.com/office/thememl/2012/main" name="Office Theme" id="{2E142A2C-CD16-42D6-873A-C26D2A0506FA}" vid="{1BDDFF52-6CD6-40A5-AB3C-68EB2F1E4D0A}"/>
+    </a:ext>
+  </a:extLst>
+</a:theme>
 </file>